--- a/10-Knowledge-Products/KP1-GEA/videos/module_2/en/decks/KP1_M2_2.3_Deck_v0.2.pptx
+++ b/10-Knowledge-Products/KP1-GEA/videos/module_2/en/decks/KP1_M2_2.3_Deck_v0.2.pptx
@@ -14,14 +14,14 @@
     <p:handoutMasterId r:id="rId47"/>
   </p:handoutMasterIdLst>
   <p:sldIdLst>
-    <p:sldId id="2681" r:id="rId8"/>
-    <p:sldId id="2711" r:id="rId33"/>
-    <p:sldId id="2712" r:id="rId34"/>
     <p:sldId id="2713" r:id="rId35"/>
     <p:sldId id="2714" r:id="rId36"/>
     <p:sldId id="2715" r:id="rId37"/>
     <p:sldId id="2716" r:id="rId38"/>
     <p:sldId id="2717" r:id="rId39"/>
+    <p:sldId id="2718" r:id="rId40"/>
+    <p:sldId id="2719" r:id="rId41"/>
+    <p:sldId id="2720" r:id="rId42"/>
   </p:sldIdLst>
   <p:sldSz cx="12192000" cy="6858000"/>
   <p:notesSz cx="6858000" cy="9144000"/>
@@ -933,152 +933,6 @@
           <a:lstStyle/>
           <a:p>
             <a:r>
-              <a:t>VO: One discipline makes principles useful instead of decorative. For each one, write three things: the statement, the reason, and the implication — what the principle forces you to do, or to refuse. Take 'reuse before build'. Statement: we consume an existing building block before we build a new one. Reason: the country pays once instead of many times. Implication: any project proposing to build its own identity or payment function must first show why the shared one cannot be used — and the EA Board can say no. A principle with a written implication can settle an argument. A principle without one cannot.</a:t>
-            </a:r>
-          </a:p>
-          <a:p/>
-          <a:p>
-            <a:r>
-              <a:t>The implication band is the operative beat of 2.3 — the only full-colour block in the video. Hold it.</a:t>
-            </a:r>
-          </a:p>
-        </p:txBody>
-      </p:sp>
-      <p:sp>
-        <p:nvSpPr>
-          <p:cNvPr id="4" name="Slide Number Placeholder 3"/>
-          <p:cNvSpPr>
-            <a:spLocks noGrp="1"/>
-          </p:cNvSpPr>
-          <p:nvPr>
-            <p:ph type="sldNum" idx="5" sz="quarter"/>
-          </p:nvPr>
-        </p:nvSpPr>
-        <p:spPr/>
-      </p:sp>
-    </p:spTree>
-  </p:cSld>
-  <p:clrMapOvr>
-    <a:masterClrMapping/>
-  </p:clrMapOvr>
-</p:notes>
-</file>
-
-<file path=ppt/notesSlides/notesSlide18.xml><?xml version="1.0" encoding="utf-8"?>
-<p:notes xmlns:a="http://schemas.openxmlformats.org/drawingml/2006/main" xmlns:p="http://schemas.openxmlformats.org/presentationml/2006/main" xmlns:r="http://schemas.openxmlformats.org/officeDocument/2006/relationships">
-  <p:cSld>
-    <p:spTree>
-      <p:nvGrpSpPr>
-        <p:cNvPr id="1" name=""/>
-        <p:cNvGrpSpPr/>
-        <p:nvPr/>
-      </p:nvGrpSpPr>
-      <p:grpSpPr>
-        <a:xfrm>
-          <a:off x="0" y="0"/>
-          <a:ext cx="0" cy="0"/>
-          <a:chOff x="0" y="0"/>
-          <a:chExt cx="0" cy="0"/>
-        </a:xfrm>
-      </p:grpSpPr>
-      <p:sp>
-        <p:nvSpPr>
-          <p:cNvPr id="2" name="Slide Image Placeholder 1"/>
-          <p:cNvSpPr>
-            <a:spLocks noGrp="1"/>
-          </p:cNvSpPr>
-          <p:nvPr>
-            <p:ph type="sldImg" idx="2"/>
-          </p:nvPr>
-        </p:nvSpPr>
-        <p:spPr/>
-      </p:sp>
-      <p:sp>
-        <p:nvSpPr>
-          <p:cNvPr id="3" name="Notes Placeholder 2"/>
-          <p:cNvSpPr>
-            <a:spLocks noGrp="1"/>
-          </p:cNvSpPr>
-          <p:nvPr>
-            <p:ph type="body" idx="3" sz="quarter"/>
-          </p:nvPr>
-        </p:nvSpPr>
-        <p:spPr/>
-        <p:txBody>
-          <a:bodyPr/>
-          <a:lstStyle/>
-          <a:p>
-            <a:r>
-              <a:t>VO, slide 1: Every architecture team faces the same temptation early on. Someone says: let us write our country's architectural principles. Three months later there are forty drafts, half contradicting each other, and no agreement. There is a faster way — the principles already exist.</a:t>
-            </a:r>
-          </a:p>
-        </p:txBody>
-      </p:sp>
-      <p:sp>
-        <p:nvSpPr>
-          <p:cNvPr id="4" name="Slide Number Placeholder 3"/>
-          <p:cNvSpPr>
-            <a:spLocks noGrp="1"/>
-          </p:cNvSpPr>
-          <p:nvPr>
-            <p:ph type="sldNum" idx="5" sz="quarter"/>
-          </p:nvPr>
-        </p:nvSpPr>
-        <p:spPr/>
-      </p:sp>
-    </p:spTree>
-  </p:cSld>
-  <p:clrMapOvr>
-    <a:masterClrMapping/>
-  </p:clrMapOvr>
-</p:notes>
-</file>
-
-<file path=ppt/notesSlides/notesSlide19.xml><?xml version="1.0" encoding="utf-8"?>
-<p:notes xmlns:a="http://schemas.openxmlformats.org/drawingml/2006/main" xmlns:p="http://schemas.openxmlformats.org/presentationml/2006/main" xmlns:r="http://schemas.openxmlformats.org/officeDocument/2006/relationships">
-  <p:cSld>
-    <p:spTree>
-      <p:nvGrpSpPr>
-        <p:cNvPr id="1" name=""/>
-        <p:cNvGrpSpPr/>
-        <p:nvPr/>
-      </p:nvGrpSpPr>
-      <p:grpSpPr>
-        <a:xfrm>
-          <a:off x="0" y="0"/>
-          <a:ext cx="0" cy="0"/>
-          <a:chOff x="0" y="0"/>
-          <a:chExt cx="0" cy="0"/>
-        </a:xfrm>
-      </p:grpSpPr>
-      <p:sp>
-        <p:nvSpPr>
-          <p:cNvPr id="2" name="Slide Image Placeholder 1"/>
-          <p:cNvSpPr>
-            <a:spLocks noGrp="1"/>
-          </p:cNvSpPr>
-          <p:nvPr>
-            <p:ph type="sldImg" idx="2"/>
-          </p:nvPr>
-        </p:nvSpPr>
-        <p:spPr/>
-      </p:sp>
-      <p:sp>
-        <p:nvSpPr>
-          <p:cNvPr id="3" name="Notes Placeholder 2"/>
-          <p:cNvSpPr>
-            <a:spLocks noGrp="1"/>
-          </p:cNvSpPr>
-          <p:nvPr>
-            <p:ph type="body" idx="3" sz="quarter"/>
-          </p:nvPr>
-        </p:nvSpPr>
-        <p:spPr/>
-        <p:txBody>
-          <a:bodyPr/>
-          <a:lstStyle/>
-          <a:p>
-            <a:r>
               <a:t>VO: First, be clear what a principle is for. An architectural principle is a short rule that settles a design argument before it starts. 'Reuse before you buy; buy before you build.' 'Data has one owner.' 'The citizen is asked for information only once.' A good principle is a decision you make once, so your team does not re-argue it on every project. Principles are working tools, not wall decorations. If a principle never changes a decision, it is not a principle — it is a slogan.</a:t>
             </a:r>
           </a:p>
@@ -1149,7 +1003,7 @@
           <a:lstStyle/>
           <a:p>
             <a:r>
-              <a:t>VO: Adopting them is three steps, not a three-month workshop. Step one: take the ten as your baseline. Step two: tailor the wording to your country — point each principle at your own laws, your data-protection act, your procurement rules, so it has teeth in your context. Step three: add at most a few principles your country genuinely needs that PAERA does not cover, and add them deliberately, with a reason written down. That is the whole job. You inherit the thinking; you localise the wording. You do not start from a blank page.</a:t>
+              <a:t>VO: Every architecture team faces the same temptation early on. Someone says: let us write our country's architectural principles. Three months later there are forty drafts, half contradicting each other, and no agreement. There is a faster way — the principles already exist.</a:t>
             </a:r>
           </a:p>
         </p:txBody>
@@ -1219,83 +1073,7 @@
           <a:lstStyle/>
           <a:p>
             <a:r>
-              <a:t>VO: PAERA publishes ten architectural principles in section 5.2. They cover the ground every public-sector architecture needs. Rule of law, so every system has a legal basis. Intrinsic security and privacy, built in, not added later. Openness and transparency. Interoperability by default. Once-only — the state asks a citizen for the same information only once. User-centred and inclusive design. Reuse and sharing before building new. Data as a managed asset, with one source of truth. Technology neutrality, to avoid lock-in. And sustainability, so what you build can be maintained. Ten principles, already debated across many countries, ready to adopt.</a:t>
-            </a:r>
-          </a:p>
-          <a:p/>
-          <a:p>
-            <a:r>
-              <a:t>Reveal cumulatively, one row at a time, in the order spoken. This is the reference payload of the video.</a:t>
-            </a:r>
-          </a:p>
-        </p:txBody>
-      </p:sp>
-      <p:sp>
-        <p:nvSpPr>
-          <p:cNvPr id="4" name="Slide Number Placeholder 3"/>
-          <p:cNvSpPr>
-            <a:spLocks noGrp="1"/>
-          </p:cNvSpPr>
-          <p:nvPr>
-            <p:ph type="sldNum" idx="5" sz="quarter"/>
-          </p:nvPr>
-        </p:nvSpPr>
-        <p:spPr/>
-      </p:sp>
-    </p:spTree>
-  </p:cSld>
-  <p:clrMapOvr>
-    <a:masterClrMapping/>
-  </p:clrMapOvr>
-</p:notes>
-</file>
-
-<file path=ppt/notesSlides/notesSlide21.xml><?xml version="1.0" encoding="utf-8"?>
-<p:notes xmlns:a="http://schemas.openxmlformats.org/drawingml/2006/main" xmlns:p="http://schemas.openxmlformats.org/presentationml/2006/main" xmlns:r="http://schemas.openxmlformats.org/officeDocument/2006/relationships">
-  <p:cSld>
-    <p:spTree>
-      <p:nvGrpSpPr>
-        <p:cNvPr id="1" name=""/>
-        <p:cNvGrpSpPr/>
-        <p:nvPr/>
-      </p:nvGrpSpPr>
-      <p:grpSpPr>
-        <a:xfrm>
-          <a:off x="0" y="0"/>
-          <a:ext cx="0" cy="0"/>
-          <a:chOff x="0" y="0"/>
-          <a:chExt cx="0" cy="0"/>
-        </a:xfrm>
-      </p:grpSpPr>
-      <p:sp>
-        <p:nvSpPr>
-          <p:cNvPr id="2" name="Slide Image Placeholder 1"/>
-          <p:cNvSpPr>
-            <a:spLocks noGrp="1"/>
-          </p:cNvSpPr>
-          <p:nvPr>
-            <p:ph type="sldImg" idx="2"/>
-          </p:nvPr>
-        </p:nvSpPr>
-        <p:spPr/>
-      </p:sp>
-      <p:sp>
-        <p:nvSpPr>
-          <p:cNvPr id="3" name="Notes Placeholder 2"/>
-          <p:cNvSpPr>
-            <a:spLocks noGrp="1"/>
-          </p:cNvSpPr>
-          <p:nvPr>
-            <p:ph type="body" idx="3" sz="quarter"/>
-          </p:nvPr>
-        </p:nvSpPr>
-        <p:spPr/>
-        <p:txBody>
-          <a:bodyPr/>
-          <a:lstStyle/>
-          <a:p>
-            <a:r>
-              <a:t>Title card for standalone video 2.3. Content slides are identical to the corresponding section of the combined deck KP1_M2_Deck_v0.2.pptx; voice-over is in each slide’s notes.</a:t>
+              <a:t>Title card — the cold open. The hosts name the module, the video number, the title and the single message on this slide; no scripted narration. Hold until the opener begins; the opener is narrated on the next slide.</a:t>
             </a:r>
           </a:p>
         </p:txBody>
@@ -1365,13 +1143,13 @@
           <a:lstStyle/>
           <a:p>
             <a:r>
-              <a:t>PRACTICE BOX (on-screen only — never read it, never paraphrase it, never point at it). It replaces the narrated handoff: this video ends on the recap and the Sources slide.</a:t>
+              <a:t>VO: PAERA publishes ten architectural principles in section 5.2. They cover the ground every public-sector architecture needs. Rule of law, so every system has a legal basis. Intrinsic security and privacy, built in, not added later. Openness and transparency. Interoperability by default. Once-only — the state asks a citizen for the same information only once. User-centred and inclusive design. Reuse and sharing before building new. Data as a managed asset, with one source of truth. Technology neutrality, to avoid lock-in. And sustainability, so what you build can be maintained. Ten principles, already debated across many countries, ready to adopt.</a:t>
             </a:r>
           </a:p>
           <a:p/>
           <a:p>
             <a:r>
-              <a:t>VO: Do not spend your first year writing principles. Adopt PAERA's ten, point each at your country's laws, and give each a written implication so it can settle a real argument.</a:t>
+              <a:t>Reveal cumulatively, one row at a time, in the order spoken. This is the reference payload of the video.</a:t>
             </a:r>
           </a:p>
         </p:txBody>
@@ -1397,6 +1175,228 @@
 </file>
 
 <file path=ppt/notesSlides/notesSlide24.xml><?xml version="1.0" encoding="utf-8"?>
+<p:notes xmlns:a="http://schemas.openxmlformats.org/drawingml/2006/main" xmlns:p="http://schemas.openxmlformats.org/presentationml/2006/main" xmlns:r="http://schemas.openxmlformats.org/officeDocument/2006/relationships">
+  <p:cSld>
+    <p:spTree>
+      <p:nvGrpSpPr>
+        <p:cNvPr id="1" name=""/>
+        <p:cNvGrpSpPr/>
+        <p:nvPr/>
+      </p:nvGrpSpPr>
+      <p:grpSpPr>
+        <a:xfrm>
+          <a:off x="0" y="0"/>
+          <a:ext cx="0" cy="0"/>
+          <a:chOff x="0" y="0"/>
+          <a:chExt cx="0" cy="0"/>
+        </a:xfrm>
+      </p:grpSpPr>
+      <p:sp>
+        <p:nvSpPr>
+          <p:cNvPr id="2" name="Slide Image Placeholder 1"/>
+          <p:cNvSpPr>
+            <a:spLocks noGrp="1"/>
+          </p:cNvSpPr>
+          <p:nvPr>
+            <p:ph type="sldImg" idx="2"/>
+          </p:nvPr>
+        </p:nvSpPr>
+        <p:spPr/>
+      </p:sp>
+      <p:sp>
+        <p:nvSpPr>
+          <p:cNvPr id="3" name="Notes Placeholder 2"/>
+          <p:cNvSpPr>
+            <a:spLocks noGrp="1"/>
+          </p:cNvSpPr>
+          <p:nvPr>
+            <p:ph type="body" idx="3" sz="quarter"/>
+          </p:nvPr>
+        </p:nvSpPr>
+        <p:spPr/>
+        <p:txBody>
+          <a:bodyPr/>
+          <a:lstStyle/>
+          <a:p>
+            <a:r>
+              <a:t>VO: Adopting them is three steps, not a three-month workshop. Step one: take the ten as your baseline. Step two: tailor the wording to your country — point each principle at your own laws, your data-protection act, your procurement rules, so it has teeth in your context. Step three: add at most a few principles your country genuinely needs that PAERA does not cover, and add them deliberately, with a reason written down. That is the whole job. You inherit the thinking; you localise the wording. You do not start from a blank page.</a:t>
+            </a:r>
+          </a:p>
+        </p:txBody>
+      </p:sp>
+      <p:sp>
+        <p:nvSpPr>
+          <p:cNvPr id="4" name="Slide Number Placeholder 3"/>
+          <p:cNvSpPr>
+            <a:spLocks noGrp="1"/>
+          </p:cNvSpPr>
+          <p:nvPr>
+            <p:ph type="sldNum" idx="5" sz="quarter"/>
+          </p:nvPr>
+        </p:nvSpPr>
+        <p:spPr/>
+      </p:sp>
+    </p:spTree>
+  </p:cSld>
+  <p:clrMapOvr>
+    <a:masterClrMapping/>
+  </p:clrMapOvr>
+</p:notes>
+</file>
+
+<file path=ppt/notesSlides/notesSlide25.xml><?xml version="1.0" encoding="utf-8"?>
+<p:notes xmlns:a="http://schemas.openxmlformats.org/drawingml/2006/main" xmlns:p="http://schemas.openxmlformats.org/presentationml/2006/main" xmlns:r="http://schemas.openxmlformats.org/officeDocument/2006/relationships">
+  <p:cSld>
+    <p:spTree>
+      <p:nvGrpSpPr>
+        <p:cNvPr id="1" name=""/>
+        <p:cNvGrpSpPr/>
+        <p:nvPr/>
+      </p:nvGrpSpPr>
+      <p:grpSpPr>
+        <a:xfrm>
+          <a:off x="0" y="0"/>
+          <a:ext cx="0" cy="0"/>
+          <a:chOff x="0" y="0"/>
+          <a:chExt cx="0" cy="0"/>
+        </a:xfrm>
+      </p:grpSpPr>
+      <p:sp>
+        <p:nvSpPr>
+          <p:cNvPr id="2" name="Slide Image Placeholder 1"/>
+          <p:cNvSpPr>
+            <a:spLocks noGrp="1"/>
+          </p:cNvSpPr>
+          <p:nvPr>
+            <p:ph type="sldImg" idx="2"/>
+          </p:nvPr>
+        </p:nvSpPr>
+        <p:spPr/>
+      </p:sp>
+      <p:sp>
+        <p:nvSpPr>
+          <p:cNvPr id="3" name="Notes Placeholder 2"/>
+          <p:cNvSpPr>
+            <a:spLocks noGrp="1"/>
+          </p:cNvSpPr>
+          <p:nvPr>
+            <p:ph type="body" idx="3" sz="quarter"/>
+          </p:nvPr>
+        </p:nvSpPr>
+        <p:spPr/>
+        <p:txBody>
+          <a:bodyPr/>
+          <a:lstStyle/>
+          <a:p>
+            <a:r>
+              <a:t>VO: One discipline makes principles useful instead of decorative. For each one, write three things: the statement, the reason, and the implication — what the principle forces you to do, or to refuse. Take 'reuse before build'. Statement: we consume an existing building block before we build a new one. Reason: the country pays once instead of many times. Implication: any project proposing to build its own identity or payment function must first show why the shared one cannot be used — and the EA Board can say no. A principle with a written implication can settle an argument. A principle without one cannot.</a:t>
+            </a:r>
+          </a:p>
+          <a:p/>
+          <a:p>
+            <a:r>
+              <a:t>The implication band is the operative beat of 2.3 — the only full-colour block in the video. Hold it.</a:t>
+            </a:r>
+          </a:p>
+        </p:txBody>
+      </p:sp>
+      <p:sp>
+        <p:nvSpPr>
+          <p:cNvPr id="4" name="Slide Number Placeholder 3"/>
+          <p:cNvSpPr>
+            <a:spLocks noGrp="1"/>
+          </p:cNvSpPr>
+          <p:nvPr>
+            <p:ph type="sldNum" idx="5" sz="quarter"/>
+          </p:nvPr>
+        </p:nvSpPr>
+        <p:spPr/>
+      </p:sp>
+    </p:spTree>
+  </p:cSld>
+  <p:clrMapOvr>
+    <a:masterClrMapping/>
+  </p:clrMapOvr>
+</p:notes>
+</file>
+
+<file path=ppt/notesSlides/notesSlide26.xml><?xml version="1.0" encoding="utf-8"?>
+<p:notes xmlns:a="http://schemas.openxmlformats.org/drawingml/2006/main" xmlns:p="http://schemas.openxmlformats.org/presentationml/2006/main" xmlns:r="http://schemas.openxmlformats.org/officeDocument/2006/relationships">
+  <p:cSld>
+    <p:spTree>
+      <p:nvGrpSpPr>
+        <p:cNvPr id="1" name=""/>
+        <p:cNvGrpSpPr/>
+        <p:nvPr/>
+      </p:nvGrpSpPr>
+      <p:grpSpPr>
+        <a:xfrm>
+          <a:off x="0" y="0"/>
+          <a:ext cx="0" cy="0"/>
+          <a:chOff x="0" y="0"/>
+          <a:chExt cx="0" cy="0"/>
+        </a:xfrm>
+      </p:grpSpPr>
+      <p:sp>
+        <p:nvSpPr>
+          <p:cNvPr id="2" name="Slide Image Placeholder 1"/>
+          <p:cNvSpPr>
+            <a:spLocks noGrp="1"/>
+          </p:cNvSpPr>
+          <p:nvPr>
+            <p:ph type="sldImg" idx="2"/>
+          </p:nvPr>
+        </p:nvSpPr>
+        <p:spPr/>
+      </p:sp>
+      <p:sp>
+        <p:nvSpPr>
+          <p:cNvPr id="3" name="Notes Placeholder 2"/>
+          <p:cNvSpPr>
+            <a:spLocks noGrp="1"/>
+          </p:cNvSpPr>
+          <p:nvPr>
+            <p:ph type="body" idx="3" sz="quarter"/>
+          </p:nvPr>
+        </p:nvSpPr>
+        <p:spPr/>
+        <p:txBody>
+          <a:bodyPr/>
+          <a:lstStyle/>
+          <a:p>
+            <a:r>
+              <a:t>PRACTICE BOX (on-screen only — never read it, never paraphrase it, never point at it). It replaces the narrated handoff: this video ends on the recap and the Sources slide.</a:t>
+            </a:r>
+          </a:p>
+          <a:p/>
+          <a:p>
+            <a:r>
+              <a:t>VO: Do not spend your first year writing principles. Adopt PAERA's ten, point each at your country's laws, and give each a written implication so it can settle a real argument.</a:t>
+            </a:r>
+          </a:p>
+        </p:txBody>
+      </p:sp>
+      <p:sp>
+        <p:nvSpPr>
+          <p:cNvPr id="4" name="Slide Number Placeholder 3"/>
+          <p:cNvSpPr>
+            <a:spLocks noGrp="1"/>
+          </p:cNvSpPr>
+          <p:nvPr>
+            <p:ph type="sldNum" idx="5" sz="quarter"/>
+          </p:nvPr>
+        </p:nvSpPr>
+        <p:spPr/>
+      </p:sp>
+    </p:spTree>
+  </p:cSld>
+  <p:clrMapOvr>
+    <a:masterClrMapping/>
+  </p:clrMapOvr>
+</p:notes>
+</file>
+
+<file path=ppt/notesSlides/notesSlide27.xml><?xml version="1.0" encoding="utf-8"?>
 <p:notes xmlns:a="http://schemas.openxmlformats.org/drawingml/2006/main" xmlns:p="http://schemas.openxmlformats.org/presentationml/2006/main" xmlns:r="http://schemas.openxmlformats.org/officeDocument/2006/relationships">
   <p:cSld>
     <p:spTree>
@@ -11602,1360 +11602,6 @@
 </p:sldMaster>
 </file>
 
-<file path=ppt/slides/slide1.xml><?xml version="1.0" encoding="utf-8"?>
-<p:sld xmlns:a="http://schemas.openxmlformats.org/drawingml/2006/main" xmlns:r="http://schemas.openxmlformats.org/officeDocument/2006/relationships" xmlns:p="http://schemas.openxmlformats.org/presentationml/2006/main">
-  <p:cSld>
-    <p:spTree>
-      <p:nvGrpSpPr>
-        <p:cNvPr id="1" name=""/>
-        <p:cNvGrpSpPr/>
-        <p:nvPr/>
-      </p:nvGrpSpPr>
-      <p:grpSpPr>
-        <a:xfrm>
-          <a:off x="0" y="0"/>
-          <a:ext cx="0" cy="0"/>
-          <a:chOff x="0" y="0"/>
-          <a:chExt cx="0" cy="0"/>
-        </a:xfrm>
-      </p:grpSpPr>
-      <p:cxnSp>
-        <p:nvCxnSpPr>
-          <p:cNvPr id="11" name="Straight Connector 10">
-            <a:extLst>
-              <a:ext uri="{FF2B5EF4-FFF2-40B4-BE49-F238E27FC236}">
-                <a16:creationId xmlns:a16="http://schemas.microsoft.com/office/drawing/2014/main" id="{D9AD66F2-F7C0-4D03-9150-D28F17AC561D}"/>
-              </a:ext>
-            </a:extLst>
-          </p:cNvPr>
-          <p:cNvCxnSpPr>
-            <a:cxnSpLocks/>
-          </p:cNvCxnSpPr>
-          <p:nvPr/>
-        </p:nvCxnSpPr>
-        <p:spPr>
-          <a:xfrm>
-            <a:off x="373021" y="2198718"/>
-            <a:ext cx="6843567" cy="0"/>
-          </a:xfrm>
-          <a:prstGeom prst="line">
-            <a:avLst/>
-          </a:prstGeom>
-          <a:ln w="12700">
-            <a:solidFill>
-              <a:srgbClr val="009CD6"/>
-            </a:solidFill>
-          </a:ln>
-        </p:spPr>
-        <p:style>
-          <a:lnRef idx="1">
-            <a:schemeClr val="accent1"/>
-          </a:lnRef>
-          <a:fillRef idx="0">
-            <a:schemeClr val="accent1"/>
-          </a:fillRef>
-          <a:effectRef idx="0">
-            <a:schemeClr val="accent1"/>
-          </a:effectRef>
-          <a:fontRef idx="minor">
-            <a:schemeClr val="tx1"/>
-          </a:fontRef>
-        </p:style>
-      </p:cxnSp>
-      <p:sp>
-        <p:nvSpPr>
-          <p:cNvPr id="12" name="Title 9">
-            <a:extLst>
-              <a:ext uri="{FF2B5EF4-FFF2-40B4-BE49-F238E27FC236}">
-                <a16:creationId xmlns:a16="http://schemas.microsoft.com/office/drawing/2014/main" id="{EEB08032-CE0E-4986-AEDF-A41026C0E8B9}"/>
-              </a:ext>
-            </a:extLst>
-          </p:cNvPr>
-          <p:cNvSpPr txBox="1">
-            <a:spLocks/>
-          </p:cNvSpPr>
-          <p:nvPr/>
-        </p:nvSpPr>
-        <p:spPr>
-          <a:xfrm>
-            <a:off x="237734" y="702833"/>
-            <a:ext cx="6432007" cy="1218817"/>
-          </a:xfrm>
-          <a:prstGeom prst="rect">
-            <a:avLst/>
-          </a:prstGeom>
-        </p:spPr>
-        <p:txBody>
-          <a:bodyPr anchor="b">
-            <a:noAutofit/>
-          </a:bodyPr>
-          <a:lstStyle>
-            <a:lvl1pPr algn="l" defTabSz="914400" rtl="0" eaLnBrk="1" latinLnBrk="0" hangingPunct="1">
-              <a:lnSpc>
-                <a:spcPct val="90000"/>
-              </a:lnSpc>
-              <a:spcBef>
-                <a:spcPct val="0"/>
-              </a:spcBef>
-              <a:buNone/>
-              <a:defRPr sz="4000" kern="1200">
-                <a:solidFill>
-                  <a:schemeClr val="bg1"/>
-                </a:solidFill>
-                <a:latin typeface="Arial" panose="020B0604020202020204" pitchFamily="34" charset="0"/>
-                <a:ea typeface="+mj-ea"/>
-                <a:cs typeface="Arial" panose="020B0604020202020204" pitchFamily="34" charset="0"/>
-              </a:defRPr>
-            </a:lvl1pPr>
-          </a:lstStyle>
-          <a:p>
-            <a:r>
-              <a:rPr sz="2800" b="1" i="0">
-                <a:solidFill>
-                  <a:srgbClr val="1A1A1A"/>
-                </a:solidFill>
-                <a:latin typeface="Arial"/>
-              </a:rPr>
-              <a:t>2.3 — Adopt your principles, don't draft them</a:t>
-            </a:r>
-          </a:p>
-        </p:txBody>
-      </p:sp>
-      <p:pic>
-        <p:nvPicPr>
-          <p:cNvPr id="7" name="Picture 6">
-            <a:extLst>
-              <a:ext uri="{FF2B5EF4-FFF2-40B4-BE49-F238E27FC236}">
-                <a16:creationId xmlns:a16="http://schemas.microsoft.com/office/drawing/2014/main" id="{A2066351-C569-4C4C-A096-308777FCDC32}"/>
-              </a:ext>
-            </a:extLst>
-          </p:cNvPr>
-          <p:cNvPicPr>
-            <a:picLocks noChangeAspect="1"/>
-          </p:cNvPicPr>
-          <p:nvPr/>
-        </p:nvPicPr>
-        <p:blipFill>
-          <a:blip r:embed="rId2">
-            <a:extLst>
-              <a:ext uri="{28A0092B-C50C-407E-A947-70E740481C1C}">
-                <a14:useLocalDpi xmlns:a14="http://schemas.microsoft.com/office/drawing/2010/main" val="0"/>
-              </a:ext>
-            </a:extLst>
-          </a:blip>
-          <a:srcRect t="20219" b="14729"/>
-          <a:stretch>
-            <a:fillRect/>
-          </a:stretch>
-        </p:blipFill>
-        <p:spPr>
-          <a:xfrm>
-            <a:off x="0" y="5620871"/>
-            <a:ext cx="1323975" cy="1218816"/>
-          </a:xfrm>
-          <a:prstGeom prst="rect">
-            <a:avLst/>
-          </a:prstGeom>
-        </p:spPr>
-      </p:pic>
-      <p:sp>
-        <p:nvSpPr>
-          <p:cNvPr id="14" name="Title 9">
-            <a:extLst>
-              <a:ext uri="{FF2B5EF4-FFF2-40B4-BE49-F238E27FC236}">
-                <a16:creationId xmlns:a16="http://schemas.microsoft.com/office/drawing/2014/main" id="{B5087B80-3EE4-1881-0130-ED58CA625092}"/>
-              </a:ext>
-            </a:extLst>
-          </p:cNvPr>
-          <p:cNvSpPr txBox="1">
-            <a:spLocks/>
-          </p:cNvSpPr>
-          <p:nvPr/>
-        </p:nvSpPr>
-        <p:spPr>
-          <a:xfrm>
-            <a:off x="284452" y="2475786"/>
-            <a:ext cx="6382893" cy="953213"/>
-          </a:xfrm>
-          <a:prstGeom prst="rect">
-            <a:avLst/>
-          </a:prstGeom>
-        </p:spPr>
-        <p:txBody>
-          <a:bodyPr anchor="t">
-            <a:noAutofit/>
-          </a:bodyPr>
-          <a:lstStyle>
-            <a:lvl1pPr algn="l" defTabSz="914400" rtl="0" eaLnBrk="1" latinLnBrk="0" hangingPunct="1">
-              <a:lnSpc>
-                <a:spcPct val="90000"/>
-              </a:lnSpc>
-              <a:spcBef>
-                <a:spcPct val="0"/>
-              </a:spcBef>
-              <a:buNone/>
-              <a:defRPr sz="4000" kern="1200">
-                <a:solidFill>
-                  <a:schemeClr val="bg1"/>
-                </a:solidFill>
-                <a:latin typeface="Arial" panose="020B0604020202020204" pitchFamily="34" charset="0"/>
-                <a:ea typeface="+mj-ea"/>
-                <a:cs typeface="Arial" panose="020B0604020202020204" pitchFamily="34" charset="0"/>
-              </a:defRPr>
-            </a:lvl1pPr>
-          </a:lstStyle>
-          <a:p>
-            <a:pPr marL="0" marR="0" lvl="0" indent="0" rtl="0">
-              <a:spcBef>
-                <a:spcPts val="600"/>
-              </a:spcBef>
-              <a:spcAft>
-                <a:spcPts val="0"/>
-              </a:spcAft>
-              <a:buNone/>
-            </a:pPr>
-            <a:r>
-              <a:rPr sz="1300" b="1" i="0">
-                <a:solidFill>
-                  <a:srgbClr val="006E96"/>
-                </a:solidFill>
-                <a:latin typeface="Arial"/>
-              </a:rPr>
-              <a:t>KP1 · Government Enterprise Architecture · Module 2 · Video 2.3</a:t>
-            </a:r>
-          </a:p>
-          <a:p>
-            <a:r>
-              <a:rPr sz="1200" b="0" i="1">
-                <a:solidFill>
-                  <a:srgbClr val="595959"/>
-                </a:solidFill>
-                <a:latin typeface="Arial"/>
-              </a:rPr>
-              <a:t>PAERA publishes ten architectural principles, already debated across many countries. Your job is to adopt them, tailor the wording to your context, and use them to settle design arguments — not to spend your first year drafting principles from scratch.</a:t>
-            </a:r>
-          </a:p>
-        </p:txBody>
-      </p:sp>
-      <p:sp>
-        <p:nvSpPr>
-          <p:cNvPr id="17" name="Title 9">
-            <a:extLst>
-              <a:ext uri="{FF2B5EF4-FFF2-40B4-BE49-F238E27FC236}">
-                <a16:creationId xmlns:a16="http://schemas.microsoft.com/office/drawing/2014/main" id="{5E8796F7-DD26-D250-5E97-B38B22298E72}"/>
-              </a:ext>
-            </a:extLst>
-          </p:cNvPr>
-          <p:cNvSpPr txBox="1">
-            <a:spLocks/>
-          </p:cNvSpPr>
-          <p:nvPr/>
-        </p:nvSpPr>
-        <p:spPr>
-          <a:xfrm>
-            <a:off x="284452" y="4363897"/>
-            <a:ext cx="6382893" cy="953213"/>
-          </a:xfrm>
-          <a:prstGeom prst="rect">
-            <a:avLst/>
-          </a:prstGeom>
-        </p:spPr>
-        <p:txBody>
-          <a:bodyPr anchor="t">
-            <a:noAutofit/>
-          </a:bodyPr>
-          <a:lstStyle>
-            <a:lvl1pPr algn="l" defTabSz="914400" rtl="0" eaLnBrk="1" latinLnBrk="0" hangingPunct="1">
-              <a:lnSpc>
-                <a:spcPct val="90000"/>
-              </a:lnSpc>
-              <a:spcBef>
-                <a:spcPct val="0"/>
-              </a:spcBef>
-              <a:buNone/>
-              <a:defRPr sz="4000" kern="1200">
-                <a:solidFill>
-                  <a:schemeClr val="bg1"/>
-                </a:solidFill>
-                <a:latin typeface="Arial" panose="020B0604020202020204" pitchFamily="34" charset="0"/>
-                <a:ea typeface="+mj-ea"/>
-                <a:cs typeface="Arial" panose="020B0604020202020204" pitchFamily="34" charset="0"/>
-              </a:defRPr>
-            </a:lvl1pPr>
-          </a:lstStyle>
-          <a:p>
-            <a:pPr marL="0" marR="0" lvl="0" indent="0" rtl="0">
-              <a:spcBef>
-                <a:spcPts val="600"/>
-              </a:spcBef>
-              <a:spcAft>
-                <a:spcPts val="1200"/>
-              </a:spcAft>
-              <a:buNone/>
-            </a:pPr>
-            <a:r>
-              <a:rPr sz="1400" b="1" i="0">
-                <a:solidFill>
-                  <a:srgbClr val="1A1A1A"/>
-                </a:solidFill>
-                <a:latin typeface="Arial"/>
-              </a:rPr>
-              <a:t>Target audience: </a:t>
-            </a:r>
-            <a:r>
-              <a:rPr sz="1400" b="0" i="0">
-                <a:solidFill>
-                  <a:srgbClr val="1A1A1A"/>
-                </a:solidFill>
-                <a:latin typeface="Arial"/>
-              </a:rPr>
-              <a:t>Chief architect · senior architect · sector ICT lead</a:t>
-            </a:r>
-          </a:p>
-        </p:txBody>
-      </p:sp>
-      <p:sp>
-        <p:nvSpPr>
-          <p:cNvPr id="18" name="Rectangle 17"/>
-          <p:cNvSpPr/>
-          <p:nvPr/>
-        </p:nvSpPr>
-        <p:spPr>
-          <a:xfrm>
-            <a:off x="7022592" y="0"/>
-            <a:ext cx="5169103" cy="6858000"/>
-          </a:xfrm>
-          <a:prstGeom prst="rect">
-            <a:avLst/>
-          </a:prstGeom>
-          <a:solidFill>
-            <a:srgbClr val="009CD6"/>
-          </a:solidFill>
-          <a:ln>
-            <a:noFill/>
-          </a:ln>
-          <a:effectLst/>
-        </p:spPr>
-        <p:style>
-          <a:lnRef idx="1">
-            <a:schemeClr val="accent1"/>
-          </a:lnRef>
-          <a:fillRef idx="3">
-            <a:schemeClr val="accent1"/>
-          </a:fillRef>
-          <a:effectRef idx="2">
-            <a:schemeClr val="accent1"/>
-          </a:effectRef>
-          <a:fontRef idx="minor">
-            <a:schemeClr val="lt1"/>
-          </a:fontRef>
-        </p:style>
-        <p:txBody>
-          <a:bodyPr rtlCol="0" anchor="ctr"/>
-          <a:lstStyle/>
-          <a:p>
-            <a:pPr algn="ctr"/>
-          </a:p>
-        </p:txBody>
-      </p:sp>
-      <p:sp>
-        <p:nvSpPr>
-          <p:cNvPr id="19" name="TextBox 18"/>
-          <p:cNvSpPr txBox="1"/>
-          <p:nvPr/>
-        </p:nvSpPr>
-        <p:spPr>
-          <a:xfrm>
-            <a:off x="7452360" y="457200"/>
-            <a:ext cx="4297680" cy="457200"/>
-          </a:xfrm>
-          <a:prstGeom prst="rect">
-            <a:avLst/>
-          </a:prstGeom>
-          <a:noFill/>
-        </p:spPr>
-        <p:txBody>
-          <a:bodyPr wrap="square">
-            <a:spAutoFit/>
-          </a:bodyPr>
-          <a:lstStyle/>
-          <a:p>
-            <a:r>
-              <a:rPr sz="1100" b="1" i="0">
-                <a:solidFill>
-                  <a:srgbClr val="E5F5FB"/>
-                </a:solidFill>
-                <a:latin typeface="Arial"/>
-              </a:rPr>
-              <a:t>THE FOUR LAYERS THIS MODULE TEACHES</a:t>
-            </a:r>
-          </a:p>
-        </p:txBody>
-      </p:sp>
-      <p:sp>
-        <p:nvSpPr>
-          <p:cNvPr id="20" name="Rounded Rectangle 19"/>
-          <p:cNvSpPr/>
-          <p:nvPr/>
-        </p:nvSpPr>
-        <p:spPr>
-          <a:xfrm>
-            <a:off x="7452360" y="960120"/>
-            <a:ext cx="3840480" cy="658368"/>
-          </a:xfrm>
-          <a:prstGeom prst="roundRect">
-            <a:avLst>
-              <a:gd name="adj" fmla="val 14000"/>
-            </a:avLst>
-          </a:prstGeom>
-          <a:solidFill>
-            <a:srgbClr val="FFFFFF"/>
-          </a:solidFill>
-          <a:ln>
-            <a:noFill/>
-          </a:ln>
-          <a:effectLst/>
-        </p:spPr>
-        <p:style>
-          <a:lnRef idx="1">
-            <a:schemeClr val="accent1"/>
-          </a:lnRef>
-          <a:fillRef idx="3">
-            <a:schemeClr val="accent1"/>
-          </a:fillRef>
-          <a:effectRef idx="2">
-            <a:schemeClr val="accent1"/>
-          </a:effectRef>
-          <a:fontRef idx="minor">
-            <a:schemeClr val="lt1"/>
-          </a:fontRef>
-        </p:style>
-        <p:txBody>
-          <a:bodyPr rtlCol="0" anchor="ctr" lIns="164592" wrap="square"/>
-          <a:lstStyle/>
-          <a:p>
-            <a:pPr algn="ctr"/>
-            <a:r>
-              <a:rPr sz="1500" b="1" i="0">
-                <a:solidFill>
-                  <a:srgbClr val="1A1A1A"/>
-                </a:solidFill>
-                <a:latin typeface="Arial"/>
-              </a:rPr>
-              <a:t>Business — what the body does</a:t>
-            </a:r>
-          </a:p>
-        </p:txBody>
-      </p:sp>
-      <p:sp>
-        <p:nvSpPr>
-          <p:cNvPr id="21" name="Rounded Rectangle 20"/>
-          <p:cNvSpPr/>
-          <p:nvPr/>
-        </p:nvSpPr>
-        <p:spPr>
-          <a:xfrm>
-            <a:off x="7452360" y="1892808"/>
-            <a:ext cx="3840480" cy="658368"/>
-          </a:xfrm>
-          <a:prstGeom prst="roundRect">
-            <a:avLst>
-              <a:gd name="adj" fmla="val 14000"/>
-            </a:avLst>
-          </a:prstGeom>
-          <a:solidFill>
-            <a:srgbClr val="FFFFFF"/>
-          </a:solidFill>
-          <a:ln>
-            <a:noFill/>
-          </a:ln>
-          <a:effectLst/>
-        </p:spPr>
-        <p:style>
-          <a:lnRef idx="1">
-            <a:schemeClr val="accent1"/>
-          </a:lnRef>
-          <a:fillRef idx="3">
-            <a:schemeClr val="accent1"/>
-          </a:fillRef>
-          <a:effectRef idx="2">
-            <a:schemeClr val="accent1"/>
-          </a:effectRef>
-          <a:fontRef idx="minor">
-            <a:schemeClr val="lt1"/>
-          </a:fontRef>
-        </p:style>
-        <p:txBody>
-          <a:bodyPr rtlCol="0" anchor="ctr" lIns="164592" wrap="square"/>
-          <a:lstStyle/>
-          <a:p>
-            <a:pPr algn="ctr"/>
-            <a:r>
-              <a:rPr sz="1500" b="1" i="0">
-                <a:solidFill>
-                  <a:srgbClr val="1A1A1A"/>
-                </a:solidFill>
-                <a:latin typeface="Arial"/>
-              </a:rPr>
-              <a:t>Data — what it holds, who owns it</a:t>
-            </a:r>
-          </a:p>
-        </p:txBody>
-      </p:sp>
-      <p:sp>
-        <p:nvSpPr>
-          <p:cNvPr id="22" name="Rounded Rectangle 21"/>
-          <p:cNvSpPr/>
-          <p:nvPr/>
-        </p:nvSpPr>
-        <p:spPr>
-          <a:xfrm>
-            <a:off x="7452360" y="2825496"/>
-            <a:ext cx="3840480" cy="658368"/>
-          </a:xfrm>
-          <a:prstGeom prst="roundRect">
-            <a:avLst>
-              <a:gd name="adj" fmla="val 14000"/>
-            </a:avLst>
-          </a:prstGeom>
-          <a:solidFill>
-            <a:srgbClr val="FFFFFF"/>
-          </a:solidFill>
-          <a:ln>
-            <a:noFill/>
-          </a:ln>
-          <a:effectLst/>
-        </p:spPr>
-        <p:style>
-          <a:lnRef idx="1">
-            <a:schemeClr val="accent1"/>
-          </a:lnRef>
-          <a:fillRef idx="3">
-            <a:schemeClr val="accent1"/>
-          </a:fillRef>
-          <a:effectRef idx="2">
-            <a:schemeClr val="accent1"/>
-          </a:effectRef>
-          <a:fontRef idx="minor">
-            <a:schemeClr val="lt1"/>
-          </a:fontRef>
-        </p:style>
-        <p:txBody>
-          <a:bodyPr rtlCol="0" anchor="ctr" lIns="164592" wrap="square"/>
-          <a:lstStyle/>
-          <a:p>
-            <a:pPr algn="ctr"/>
-            <a:r>
-              <a:rPr sz="1500" b="1" i="0">
-                <a:solidFill>
-                  <a:srgbClr val="1A1A1A"/>
-                </a:solidFill>
-                <a:latin typeface="Arial"/>
-              </a:rPr>
-              <a:t>Application — what supports the work</a:t>
-            </a:r>
-          </a:p>
-        </p:txBody>
-      </p:sp>
-      <p:sp>
-        <p:nvSpPr>
-          <p:cNvPr id="23" name="Rounded Rectangle 22"/>
-          <p:cNvSpPr/>
-          <p:nvPr/>
-        </p:nvSpPr>
-        <p:spPr>
-          <a:xfrm>
-            <a:off x="7452360" y="3758184"/>
-            <a:ext cx="3840480" cy="658368"/>
-          </a:xfrm>
-          <a:prstGeom prst="roundRect">
-            <a:avLst>
-              <a:gd name="adj" fmla="val 14000"/>
-            </a:avLst>
-          </a:prstGeom>
-          <a:solidFill>
-            <a:srgbClr val="006E96"/>
-          </a:solidFill>
-          <a:ln>
-            <a:noFill/>
-          </a:ln>
-          <a:effectLst/>
-        </p:spPr>
-        <p:style>
-          <a:lnRef idx="1">
-            <a:schemeClr val="accent1"/>
-          </a:lnRef>
-          <a:fillRef idx="3">
-            <a:schemeClr val="accent1"/>
-          </a:fillRef>
-          <a:effectRef idx="2">
-            <a:schemeClr val="accent1"/>
-          </a:effectRef>
-          <a:fontRef idx="minor">
-            <a:schemeClr val="lt1"/>
-          </a:fontRef>
-        </p:style>
-        <p:txBody>
-          <a:bodyPr rtlCol="0" anchor="ctr" lIns="164592" wrap="square"/>
-          <a:lstStyle/>
-          <a:p>
-            <a:pPr algn="ctr"/>
-            <a:r>
-              <a:rPr sz="1500" b="1" i="0">
-                <a:solidFill>
-                  <a:srgbClr val="FFFFFF"/>
-                </a:solidFill>
-                <a:latin typeface="Arial"/>
-              </a:rPr>
-              <a:t>Technology — what it all runs on</a:t>
-            </a:r>
-          </a:p>
-        </p:txBody>
-      </p:sp>
-      <p:sp>
-        <p:nvSpPr>
-          <p:cNvPr id="24" name="TextBox 23"/>
-          <p:cNvSpPr txBox="1"/>
-          <p:nvPr/>
-        </p:nvSpPr>
-        <p:spPr>
-          <a:xfrm>
-            <a:off x="7452360" y="5806440"/>
-            <a:ext cx="4297680" cy="731520"/>
-          </a:xfrm>
-          <a:prstGeom prst="rect">
-            <a:avLst/>
-          </a:prstGeom>
-          <a:noFill/>
-        </p:spPr>
-        <p:txBody>
-          <a:bodyPr wrap="square">
-            <a:spAutoFit/>
-          </a:bodyPr>
-          <a:lstStyle/>
-          <a:p>
-            <a:r>
-              <a:rPr sz="1200" b="0" i="0">
-                <a:solidFill>
-                  <a:srgbClr val="FFFFFF"/>
-                </a:solidFill>
-                <a:latin typeface="Arial"/>
-              </a:rPr>
-              <a:t>6 shared entities · 10 principles to adopt · 2 traps to catch at Assess</a:t>
-            </a:r>
-          </a:p>
-        </p:txBody>
-      </p:sp>
-    </p:spTree>
-    <p:extLst>
-      <p:ext uri="{BB962C8B-B14F-4D97-AF65-F5344CB8AC3E}">
-        <p14:creationId xmlns:p14="http://schemas.microsoft.com/office/powerpoint/2010/main" val="1196800265"/>
-      </p:ext>
-    </p:extLst>
-  </p:cSld>
-  <p:clrMapOvr>
-    <a:masterClrMapping/>
-  </p:clrMapOvr>
-</p:sld>
-</file>
-
-<file path=ppt/slides/slide18.xml><?xml version="1.0" encoding="utf-8"?>
-<p:sld xmlns:a="http://schemas.openxmlformats.org/drawingml/2006/main" xmlns:p="http://schemas.openxmlformats.org/presentationml/2006/main" xmlns:r="http://schemas.openxmlformats.org/officeDocument/2006/relationships">
-  <p:cSld>
-    <p:spTree>
-      <p:nvGrpSpPr>
-        <p:cNvPr id="1" name=""/>
-        <p:cNvGrpSpPr/>
-        <p:nvPr/>
-      </p:nvGrpSpPr>
-      <p:grpSpPr/>
-      <p:sp>
-        <p:nvSpPr>
-          <p:cNvPr id="2" name="TextBox 1"/>
-          <p:cNvSpPr txBox="1"/>
-          <p:nvPr/>
-        </p:nvSpPr>
-        <p:spPr>
-          <a:xfrm>
-            <a:off x="822960" y="822960"/>
-            <a:ext cx="7315200" cy="457200"/>
-          </a:xfrm>
-          <a:prstGeom prst="rect">
-            <a:avLst/>
-          </a:prstGeom>
-          <a:noFill/>
-        </p:spPr>
-        <p:txBody>
-          <a:bodyPr wrap="square">
-            <a:spAutoFit/>
-          </a:bodyPr>
-          <a:lstStyle/>
-          <a:p>
-            <a:r>
-              <a:rPr sz="1200" b="1" i="0">
-                <a:solidFill>
-                  <a:srgbClr val="595959"/>
-                </a:solidFill>
-                <a:latin typeface="Arial"/>
-              </a:rPr>
-              <a:t>KP1 · MODULE 2 · VIDEO 2.3</a:t>
-            </a:r>
-          </a:p>
-        </p:txBody>
-      </p:sp>
-      <p:sp>
-        <p:nvSpPr>
-          <p:cNvPr id="3" name="TextBox 2"/>
-          <p:cNvSpPr txBox="1"/>
-          <p:nvPr/>
-        </p:nvSpPr>
-        <p:spPr>
-          <a:xfrm>
-            <a:off x="822960" y="1828800"/>
-            <a:ext cx="2011680" cy="1097280"/>
-          </a:xfrm>
-          <a:prstGeom prst="rect">
-            <a:avLst/>
-          </a:prstGeom>
-          <a:noFill/>
-        </p:spPr>
-        <p:txBody>
-          <a:bodyPr wrap="square">
-            <a:spAutoFit/>
-          </a:bodyPr>
-          <a:lstStyle/>
-          <a:p>
-            <a:r>
-              <a:rPr sz="6000" b="1" i="0">
-                <a:solidFill>
-                  <a:srgbClr val="009CD6"/>
-                </a:solidFill>
-                <a:latin typeface="Arial"/>
-              </a:rPr>
-              <a:t>2.3</a:t>
-            </a:r>
-          </a:p>
-        </p:txBody>
-      </p:sp>
-      <p:sp>
-        <p:nvSpPr>
-          <p:cNvPr id="4" name="TextBox 3"/>
-          <p:cNvSpPr txBox="1"/>
-          <p:nvPr/>
-        </p:nvSpPr>
-        <p:spPr>
-          <a:xfrm>
-            <a:off x="822960" y="2880360"/>
-            <a:ext cx="9601200" cy="1371600"/>
-          </a:xfrm>
-          <a:prstGeom prst="rect">
-            <a:avLst/>
-          </a:prstGeom>
-          <a:noFill/>
-        </p:spPr>
-        <p:txBody>
-          <a:bodyPr wrap="square">
-            <a:spAutoFit/>
-          </a:bodyPr>
-          <a:lstStyle/>
-          <a:p>
-            <a:r>
-              <a:rPr sz="3400" b="1" i="0">
-                <a:solidFill>
-                  <a:srgbClr val="1A1A1A"/>
-                </a:solidFill>
-                <a:latin typeface="Arial"/>
-              </a:rPr>
-              <a:t>Adopt your principles, don't draft them</a:t>
-            </a:r>
-          </a:p>
-        </p:txBody>
-      </p:sp>
-      <p:sp>
-        <p:nvSpPr>
-          <p:cNvPr id="5" name="TextBox 4"/>
-          <p:cNvSpPr txBox="1"/>
-          <p:nvPr/>
-        </p:nvSpPr>
-        <p:spPr>
-          <a:xfrm>
-            <a:off x="822960" y="4343400"/>
-            <a:ext cx="9875520" cy="1554480"/>
-          </a:xfrm>
-          <a:prstGeom prst="rect">
-            <a:avLst/>
-          </a:prstGeom>
-          <a:noFill/>
-        </p:spPr>
-        <p:txBody>
-          <a:bodyPr wrap="square">
-            <a:spAutoFit/>
-          </a:bodyPr>
-          <a:lstStyle/>
-          <a:p>
-            <a:r>
-              <a:rPr sz="1700" b="0" i="1">
-                <a:solidFill>
-                  <a:srgbClr val="595959"/>
-                </a:solidFill>
-                <a:latin typeface="Arial"/>
-              </a:rPr>
-              <a:t>PAERA publishes ten architectural principles, already debated across many countries. Your job is to adopt them, tailor the wording to your context, and use them to settle design arguments — not to spend your first year drafting principles from scratch.</a:t>
-            </a:r>
-          </a:p>
-        </p:txBody>
-      </p:sp>
-      <p:sp>
-        <p:nvSpPr>
-          <p:cNvPr id="6" name="TextBox 5"/>
-          <p:cNvSpPr txBox="1"/>
-          <p:nvPr/>
-        </p:nvSpPr>
-        <p:spPr>
-          <a:xfrm>
-            <a:off x="822960" y="5989320"/>
-            <a:ext cx="7315200" cy="365760"/>
-          </a:xfrm>
-          <a:prstGeom prst="rect">
-            <a:avLst/>
-          </a:prstGeom>
-          <a:noFill/>
-        </p:spPr>
-        <p:txBody>
-          <a:bodyPr wrap="square">
-            <a:spAutoFit/>
-          </a:bodyPr>
-          <a:lstStyle/>
-          <a:p>
-            <a:r>
-              <a:rPr sz="1200" b="0" i="0">
-                <a:solidFill>
-                  <a:srgbClr val="595959"/>
-                </a:solidFill>
-                <a:latin typeface="Arial"/>
-              </a:rPr>
-              <a:t>~4 minutes · standalone video · voice-over on text slides</a:t>
-            </a:r>
-          </a:p>
-        </p:txBody>
-      </p:sp>
-    </p:spTree>
-  </p:cSld>
-  <p:clrMapOvr>
-    <a:masterClrMapping/>
-  </p:clrMapOvr>
-</p:sld>
-</file>
-
-<file path=ppt/slides/slide19.xml><?xml version="1.0" encoding="utf-8"?>
-<p:sld xmlns:a="http://schemas.openxmlformats.org/drawingml/2006/main" xmlns:p="http://schemas.openxmlformats.org/presentationml/2006/main" xmlns:r="http://schemas.openxmlformats.org/officeDocument/2006/relationships">
-  <p:cSld>
-    <p:spTree>
-      <p:nvGrpSpPr>
-        <p:cNvPr id="1" name=""/>
-        <p:cNvGrpSpPr/>
-        <p:nvPr/>
-      </p:nvGrpSpPr>
-      <p:grpSpPr/>
-      <p:sp>
-        <p:nvSpPr>
-          <p:cNvPr id="2" name="Rectangle 1"/>
-          <p:cNvSpPr/>
-          <p:nvPr/>
-        </p:nvSpPr>
-        <p:spPr>
-          <a:xfrm>
-            <a:off x="457200" y="384048"/>
-            <a:ext cx="45720" cy="256032"/>
-          </a:xfrm>
-          <a:prstGeom prst="rect">
-            <a:avLst/>
-          </a:prstGeom>
-          <a:solidFill>
-            <a:srgbClr val="009CD6"/>
-          </a:solidFill>
-          <a:ln>
-            <a:noFill/>
-          </a:ln>
-          <a:effectLst/>
-        </p:spPr>
-        <p:style>
-          <a:lnRef idx="1">
-            <a:schemeClr val="accent1"/>
-          </a:lnRef>
-          <a:fillRef idx="3">
-            <a:schemeClr val="accent1"/>
-          </a:fillRef>
-          <a:effectRef idx="2">
-            <a:schemeClr val="accent1"/>
-          </a:effectRef>
-          <a:fontRef idx="minor">
-            <a:schemeClr val="lt1"/>
-          </a:fontRef>
-        </p:style>
-        <p:txBody>
-          <a:bodyPr rtlCol="0" anchor="ctr"/>
-          <a:lstStyle/>
-          <a:p>
-            <a:pPr algn="ctr"/>
-          </a:p>
-        </p:txBody>
-      </p:sp>
-      <p:sp>
-        <p:nvSpPr>
-          <p:cNvPr id="3" name="TextBox 2"/>
-          <p:cNvSpPr txBox="1"/>
-          <p:nvPr/>
-        </p:nvSpPr>
-        <p:spPr>
-          <a:xfrm>
-            <a:off x="621792" y="274320"/>
-            <a:ext cx="11247120" cy="914400"/>
-          </a:xfrm>
-          <a:prstGeom prst="rect">
-            <a:avLst/>
-          </a:prstGeom>
-          <a:noFill/>
-        </p:spPr>
-        <p:txBody>
-          <a:bodyPr wrap="square">
-            <a:spAutoFit/>
-          </a:bodyPr>
-          <a:lstStyle/>
-          <a:p>
-            <a:r>
-              <a:rPr sz="2800" b="1" i="0">
-                <a:solidFill>
-                  <a:srgbClr val="1A1A1A"/>
-                </a:solidFill>
-                <a:latin typeface="Arial"/>
-              </a:rPr>
-              <a:t>A principle is a short rule that settles a design argument before it starts</a:t>
-            </a:r>
-          </a:p>
-        </p:txBody>
-      </p:sp>
-      <p:sp>
-        <p:nvSpPr>
-          <p:cNvPr id="4" name="Rounded Rectangle 3"/>
-          <p:cNvSpPr/>
-          <p:nvPr/>
-        </p:nvSpPr>
-        <p:spPr>
-          <a:xfrm>
-            <a:off x="658368" y="1645920"/>
-            <a:ext cx="3493008" cy="1737360"/>
-          </a:xfrm>
-          <a:prstGeom prst="roundRect">
-            <a:avLst>
-              <a:gd name="adj" fmla="val 4500"/>
-            </a:avLst>
-          </a:prstGeom>
-          <a:solidFill>
-            <a:srgbClr val="E5F5FB"/>
-          </a:solidFill>
-          <a:ln>
-            <a:noFill/>
-          </a:ln>
-          <a:effectLst/>
-        </p:spPr>
-        <p:style>
-          <a:lnRef idx="1">
-            <a:schemeClr val="accent1"/>
-          </a:lnRef>
-          <a:fillRef idx="3">
-            <a:schemeClr val="accent1"/>
-          </a:fillRef>
-          <a:effectRef idx="2">
-            <a:schemeClr val="accent1"/>
-          </a:effectRef>
-          <a:fontRef idx="minor">
-            <a:schemeClr val="lt1"/>
-          </a:fontRef>
-        </p:style>
-        <p:txBody>
-          <a:bodyPr rtlCol="0" anchor="ctr"/>
-          <a:lstStyle/>
-          <a:p>
-            <a:pPr algn="ctr"/>
-          </a:p>
-        </p:txBody>
-      </p:sp>
-      <p:sp>
-        <p:nvSpPr>
-          <p:cNvPr id="5" name="TextBox 4"/>
-          <p:cNvSpPr txBox="1"/>
-          <p:nvPr/>
-        </p:nvSpPr>
-        <p:spPr>
-          <a:xfrm>
-            <a:off x="859536" y="1792224"/>
-            <a:ext cx="3090672" cy="1463039"/>
-          </a:xfrm>
-          <a:prstGeom prst="rect">
-            <a:avLst/>
-          </a:prstGeom>
-          <a:noFill/>
-        </p:spPr>
-        <p:txBody>
-          <a:bodyPr wrap="square">
-            <a:spAutoFit/>
-          </a:bodyPr>
-          <a:lstStyle/>
-          <a:p>
-            <a:pPr>
-              <a:spcAft>
-                <a:spcPts val="700"/>
-              </a:spcAft>
-            </a:pPr>
-            <a:r>
-              <a:rPr sz="1800" b="1" i="0">
-                <a:solidFill>
-                  <a:srgbClr val="006E96"/>
-                </a:solidFill>
-                <a:latin typeface="Arial"/>
-              </a:rPr>
-              <a:t>Reuse before you buy; buy before you build.</a:t>
-            </a:r>
-          </a:p>
-        </p:txBody>
-      </p:sp>
-      <p:sp>
-        <p:nvSpPr>
-          <p:cNvPr id="6" name="Rounded Rectangle 5"/>
-          <p:cNvSpPr/>
-          <p:nvPr/>
-        </p:nvSpPr>
-        <p:spPr>
-          <a:xfrm>
-            <a:off x="4352544" y="1645920"/>
-            <a:ext cx="3493008" cy="1737360"/>
-          </a:xfrm>
-          <a:prstGeom prst="roundRect">
-            <a:avLst>
-              <a:gd name="adj" fmla="val 4500"/>
-            </a:avLst>
-          </a:prstGeom>
-          <a:solidFill>
-            <a:srgbClr val="E5F5FB"/>
-          </a:solidFill>
-          <a:ln>
-            <a:noFill/>
-          </a:ln>
-          <a:effectLst/>
-        </p:spPr>
-        <p:style>
-          <a:lnRef idx="1">
-            <a:schemeClr val="accent1"/>
-          </a:lnRef>
-          <a:fillRef idx="3">
-            <a:schemeClr val="accent1"/>
-          </a:fillRef>
-          <a:effectRef idx="2">
-            <a:schemeClr val="accent1"/>
-          </a:effectRef>
-          <a:fontRef idx="minor">
-            <a:schemeClr val="lt1"/>
-          </a:fontRef>
-        </p:style>
-        <p:txBody>
-          <a:bodyPr rtlCol="0" anchor="ctr"/>
-          <a:lstStyle/>
-          <a:p>
-            <a:pPr algn="ctr"/>
-          </a:p>
-        </p:txBody>
-      </p:sp>
-      <p:sp>
-        <p:nvSpPr>
-          <p:cNvPr id="7" name="TextBox 6"/>
-          <p:cNvSpPr txBox="1"/>
-          <p:nvPr/>
-        </p:nvSpPr>
-        <p:spPr>
-          <a:xfrm>
-            <a:off x="4553712" y="1792224"/>
-            <a:ext cx="3090672" cy="1463039"/>
-          </a:xfrm>
-          <a:prstGeom prst="rect">
-            <a:avLst/>
-          </a:prstGeom>
-          <a:noFill/>
-        </p:spPr>
-        <p:txBody>
-          <a:bodyPr wrap="square">
-            <a:spAutoFit/>
-          </a:bodyPr>
-          <a:lstStyle/>
-          <a:p>
-            <a:pPr>
-              <a:spcAft>
-                <a:spcPts val="700"/>
-              </a:spcAft>
-            </a:pPr>
-            <a:r>
-              <a:rPr sz="1800" b="1" i="0">
-                <a:solidFill>
-                  <a:srgbClr val="006E96"/>
-                </a:solidFill>
-                <a:latin typeface="Arial"/>
-              </a:rPr>
-              <a:t>Data has one owner.</a:t>
-            </a:r>
-          </a:p>
-        </p:txBody>
-      </p:sp>
-      <p:sp>
-        <p:nvSpPr>
-          <p:cNvPr id="8" name="Rounded Rectangle 7"/>
-          <p:cNvSpPr/>
-          <p:nvPr/>
-        </p:nvSpPr>
-        <p:spPr>
-          <a:xfrm>
-            <a:off x="8046720" y="1645920"/>
-            <a:ext cx="3493008" cy="1737360"/>
-          </a:xfrm>
-          <a:prstGeom prst="roundRect">
-            <a:avLst>
-              <a:gd name="adj" fmla="val 4500"/>
-            </a:avLst>
-          </a:prstGeom>
-          <a:solidFill>
-            <a:srgbClr val="E5F5FB"/>
-          </a:solidFill>
-          <a:ln>
-            <a:noFill/>
-          </a:ln>
-          <a:effectLst/>
-        </p:spPr>
-        <p:style>
-          <a:lnRef idx="1">
-            <a:schemeClr val="accent1"/>
-          </a:lnRef>
-          <a:fillRef idx="3">
-            <a:schemeClr val="accent1"/>
-          </a:fillRef>
-          <a:effectRef idx="2">
-            <a:schemeClr val="accent1"/>
-          </a:effectRef>
-          <a:fontRef idx="minor">
-            <a:schemeClr val="lt1"/>
-          </a:fontRef>
-        </p:style>
-        <p:txBody>
-          <a:bodyPr rtlCol="0" anchor="ctr"/>
-          <a:lstStyle/>
-          <a:p>
-            <a:pPr algn="ctr"/>
-          </a:p>
-        </p:txBody>
-      </p:sp>
-      <p:sp>
-        <p:nvSpPr>
-          <p:cNvPr id="9" name="TextBox 8"/>
-          <p:cNvSpPr txBox="1"/>
-          <p:nvPr/>
-        </p:nvSpPr>
-        <p:spPr>
-          <a:xfrm>
-            <a:off x="8247888" y="1792224"/>
-            <a:ext cx="3090672" cy="1463039"/>
-          </a:xfrm>
-          <a:prstGeom prst="rect">
-            <a:avLst/>
-          </a:prstGeom>
-          <a:noFill/>
-        </p:spPr>
-        <p:txBody>
-          <a:bodyPr wrap="square">
-            <a:spAutoFit/>
-          </a:bodyPr>
-          <a:lstStyle/>
-          <a:p>
-            <a:pPr>
-              <a:spcAft>
-                <a:spcPts val="700"/>
-              </a:spcAft>
-            </a:pPr>
-            <a:r>
-              <a:rPr sz="1800" b="1" i="0">
-                <a:solidFill>
-                  <a:srgbClr val="006E96"/>
-                </a:solidFill>
-                <a:latin typeface="Arial"/>
-              </a:rPr>
-              <a:t>Ask the citizen only once.</a:t>
-            </a:r>
-          </a:p>
-        </p:txBody>
-      </p:sp>
-      <p:sp>
-        <p:nvSpPr>
-          <p:cNvPr id="10" name="TextBox 9"/>
-          <p:cNvSpPr txBox="1"/>
-          <p:nvPr/>
-        </p:nvSpPr>
-        <p:spPr>
-          <a:xfrm>
-            <a:off x="658368" y="3749039"/>
-            <a:ext cx="10881360" cy="1463040"/>
-          </a:xfrm>
-          <a:prstGeom prst="rect">
-            <a:avLst/>
-          </a:prstGeom>
-          <a:noFill/>
-        </p:spPr>
-        <p:txBody>
-          <a:bodyPr wrap="square">
-            <a:spAutoFit/>
-          </a:bodyPr>
-          <a:lstStyle/>
-          <a:p>
-            <a:pPr>
-              <a:spcAft>
-                <a:spcPts val="1000"/>
-              </a:spcAft>
-            </a:pPr>
-            <a:r>
-              <a:rPr sz="2100" b="0" i="0">
-                <a:solidFill>
-                  <a:srgbClr val="1A1A1A"/>
-                </a:solidFill>
-                <a:latin typeface="Arial"/>
-              </a:rPr>
-              <a:t>A decision you make once, so your team does not re-argue it on every project.</a:t>
-            </a:r>
-          </a:p>
-        </p:txBody>
-      </p:sp>
-      <p:sp>
-        <p:nvSpPr>
-          <p:cNvPr id="11" name="Rounded Rectangle 10"/>
-          <p:cNvSpPr/>
-          <p:nvPr/>
-        </p:nvSpPr>
-        <p:spPr>
-          <a:xfrm>
-            <a:off x="658368" y="4892040"/>
-            <a:ext cx="10881360" cy="1005840"/>
-          </a:xfrm>
-          <a:prstGeom prst="roundRect">
-            <a:avLst>
-              <a:gd name="adj" fmla="val 4500"/>
-            </a:avLst>
-          </a:prstGeom>
-          <a:solidFill>
-            <a:srgbClr val="F2F2F2"/>
-          </a:solidFill>
-          <a:ln>
-            <a:noFill/>
-          </a:ln>
-          <a:effectLst/>
-        </p:spPr>
-        <p:style>
-          <a:lnRef idx="1">
-            <a:schemeClr val="accent1"/>
-          </a:lnRef>
-          <a:fillRef idx="3">
-            <a:schemeClr val="accent1"/>
-          </a:fillRef>
-          <a:effectRef idx="2">
-            <a:schemeClr val="accent1"/>
-          </a:effectRef>
-          <a:fontRef idx="minor">
-            <a:schemeClr val="lt1"/>
-          </a:fontRef>
-        </p:style>
-        <p:txBody>
-          <a:bodyPr rtlCol="0" anchor="ctr"/>
-          <a:lstStyle/>
-          <a:p>
-            <a:pPr algn="ctr"/>
-          </a:p>
-        </p:txBody>
-      </p:sp>
-      <p:sp>
-        <p:nvSpPr>
-          <p:cNvPr id="12" name="TextBox 11"/>
-          <p:cNvSpPr txBox="1"/>
-          <p:nvPr/>
-        </p:nvSpPr>
-        <p:spPr>
-          <a:xfrm>
-            <a:off x="859536" y="5038344"/>
-            <a:ext cx="10479024" cy="731520"/>
-          </a:xfrm>
-          <a:prstGeom prst="rect">
-            <a:avLst/>
-          </a:prstGeom>
-          <a:noFill/>
-        </p:spPr>
-        <p:txBody>
-          <a:bodyPr wrap="square">
-            <a:spAutoFit/>
-          </a:bodyPr>
-          <a:lstStyle/>
-          <a:p>
-            <a:pPr>
-              <a:spcAft>
-                <a:spcPts val="700"/>
-              </a:spcAft>
-            </a:pPr>
-            <a:r>
-              <a:rPr sz="2000" b="1" i="0">
-                <a:solidFill>
-                  <a:srgbClr val="1A1A1A"/>
-                </a:solidFill>
-                <a:latin typeface="Arial"/>
-              </a:rPr>
-              <a:t>If a principle never changes a decision, it is not a principle — it is a slogan.</a:t>
-            </a:r>
-          </a:p>
-        </p:txBody>
-      </p:sp>
-      <p:sp>
-        <p:nvSpPr>
-          <p:cNvPr id="13" name="TextBox 12"/>
-          <p:cNvSpPr txBox="1"/>
-          <p:nvPr/>
-        </p:nvSpPr>
-        <p:spPr>
-          <a:xfrm>
-            <a:off x="457200" y="6473952"/>
-            <a:ext cx="7772400" cy="292608"/>
-          </a:xfrm>
-          <a:prstGeom prst="rect">
-            <a:avLst/>
-          </a:prstGeom>
-          <a:noFill/>
-        </p:spPr>
-        <p:txBody>
-          <a:bodyPr wrap="square">
-            <a:spAutoFit/>
-          </a:bodyPr>
-          <a:lstStyle/>
-          <a:p>
-            <a:r>
-              <a:rPr sz="900" b="0" i="0">
-                <a:solidFill>
-                  <a:srgbClr val="595959"/>
-                </a:solidFill>
-                <a:latin typeface="Arial"/>
-              </a:rPr>
-              <a:t>2.3 · Adopt your principles, don't draft them</a:t>
-            </a:r>
-          </a:p>
-        </p:txBody>
-      </p:sp>
-    </p:spTree>
-  </p:cSld>
-  <p:clrMapOvr>
-    <a:masterClrMapping/>
-  </p:clrMapOvr>
-</p:sld>
-</file>
-
 <file path=ppt/slides/slide20.xml><?xml version="1.0" encoding="utf-8"?>
 <p:sld xmlns:a="http://schemas.openxmlformats.org/drawingml/2006/main" xmlns:p="http://schemas.openxmlformats.org/presentationml/2006/main" xmlns:r="http://schemas.openxmlformats.org/officeDocument/2006/relationships">
   <p:cSld>
@@ -12968,58 +11614,14 @@
       <p:grpSpPr/>
       <p:sp>
         <p:nvSpPr>
-          <p:cNvPr id="2" name="Rectangle 1"/>
-          <p:cNvSpPr/>
-          <p:nvPr/>
-        </p:nvSpPr>
-        <p:spPr>
-          <a:xfrm>
-            <a:off x="457200" y="384048"/>
-            <a:ext cx="45720" cy="256032"/>
-          </a:xfrm>
-          <a:prstGeom prst="rect">
-            <a:avLst/>
-          </a:prstGeom>
-          <a:solidFill>
-            <a:srgbClr val="009CD6"/>
-          </a:solidFill>
-          <a:ln>
-            <a:noFill/>
-          </a:ln>
-          <a:effectLst/>
-        </p:spPr>
-        <p:style>
-          <a:lnRef idx="1">
-            <a:schemeClr val="accent1"/>
-          </a:lnRef>
-          <a:fillRef idx="3">
-            <a:schemeClr val="accent1"/>
-          </a:fillRef>
-          <a:effectRef idx="2">
-            <a:schemeClr val="accent1"/>
-          </a:effectRef>
-          <a:fontRef idx="minor">
-            <a:schemeClr val="lt1"/>
-          </a:fontRef>
-        </p:style>
-        <p:txBody>
-          <a:bodyPr rtlCol="0" anchor="ctr"/>
-          <a:lstStyle/>
-          <a:p>
-            <a:pPr algn="ctr"/>
-          </a:p>
-        </p:txBody>
-      </p:sp>
-      <p:sp>
-        <p:nvSpPr>
-          <p:cNvPr id="3" name="TextBox 2"/>
+          <p:cNvPr id="2" name="TextBox 1"/>
           <p:cNvSpPr txBox="1"/>
           <p:nvPr/>
         </p:nvSpPr>
         <p:spPr>
           <a:xfrm>
-            <a:off x="621792" y="274320"/>
-            <a:ext cx="11247120" cy="914400"/>
+            <a:off x="822960" y="822960"/>
+            <a:ext cx="7315200" cy="457200"/>
           </a:xfrm>
           <a:prstGeom prst="rect">
             <a:avLst/>
@@ -13033,66 +11635,81 @@
           <a:lstStyle/>
           <a:p>
             <a:r>
-              <a:rPr sz="2800" b="1" i="0">
+              <a:rPr sz="1200" b="1" i="0">
+                <a:solidFill>
+                  <a:srgbClr val="595959"/>
+                </a:solidFill>
+                <a:latin typeface="Arial"/>
+              </a:rPr>
+              <a:t>KP1 · MODULE 2 · VIDEO 2.3</a:t>
+            </a:r>
+          </a:p>
+        </p:txBody>
+      </p:sp>
+      <p:sp>
+        <p:nvSpPr>
+          <p:cNvPr id="3" name="TextBox 2"/>
+          <p:cNvSpPr txBox="1"/>
+          <p:nvPr/>
+        </p:nvSpPr>
+        <p:spPr>
+          <a:xfrm>
+            <a:off x="822960" y="1828800"/>
+            <a:ext cx="2011680" cy="1097280"/>
+          </a:xfrm>
+          <a:prstGeom prst="rect">
+            <a:avLst/>
+          </a:prstGeom>
+          <a:noFill/>
+        </p:spPr>
+        <p:txBody>
+          <a:bodyPr wrap="square">
+            <a:spAutoFit/>
+          </a:bodyPr>
+          <a:lstStyle/>
+          <a:p>
+            <a:r>
+              <a:rPr sz="6000" b="1" i="0">
+                <a:solidFill>
+                  <a:srgbClr val="009CD6"/>
+                </a:solidFill>
+                <a:latin typeface="Arial"/>
+              </a:rPr>
+              <a:t>2.3</a:t>
+            </a:r>
+          </a:p>
+        </p:txBody>
+      </p:sp>
+      <p:sp>
+        <p:nvSpPr>
+          <p:cNvPr id="4" name="TextBox 3"/>
+          <p:cNvSpPr txBox="1"/>
+          <p:nvPr/>
+        </p:nvSpPr>
+        <p:spPr>
+          <a:xfrm>
+            <a:off x="822960" y="2880360"/>
+            <a:ext cx="9601200" cy="1371600"/>
+          </a:xfrm>
+          <a:prstGeom prst="rect">
+            <a:avLst/>
+          </a:prstGeom>
+          <a:noFill/>
+        </p:spPr>
+        <p:txBody>
+          <a:bodyPr wrap="square">
+            <a:spAutoFit/>
+          </a:bodyPr>
+          <a:lstStyle/>
+          <a:p>
+            <a:r>
+              <a:rPr sz="3400" b="1" i="0">
                 <a:solidFill>
                   <a:srgbClr val="1A1A1A"/>
                 </a:solidFill>
                 <a:latin typeface="Arial"/>
               </a:rPr>
-              <a:t>PAERA gives you ten — already debated across many countries</a:t>
-            </a:r>
-          </a:p>
-        </p:txBody>
-      </p:sp>
-      <p:sp>
-        <p:nvSpPr>
-          <p:cNvPr id="4" name="Oval 3"/>
-          <p:cNvSpPr/>
-          <p:nvPr/>
-        </p:nvSpPr>
-        <p:spPr>
-          <a:xfrm>
-            <a:off x="658368" y="1536192"/>
-            <a:ext cx="310896" cy="310896"/>
-          </a:xfrm>
-          <a:prstGeom prst="ellipse">
-            <a:avLst/>
-          </a:prstGeom>
-          <a:solidFill>
-            <a:srgbClr val="009CD6"/>
-          </a:solidFill>
-          <a:ln>
-            <a:noFill/>
-          </a:ln>
-          <a:effectLst/>
-        </p:spPr>
-        <p:style>
-          <a:lnRef idx="1">
-            <a:schemeClr val="accent1"/>
-          </a:lnRef>
-          <a:fillRef idx="3">
-            <a:schemeClr val="accent1"/>
-          </a:fillRef>
-          <a:effectRef idx="2">
-            <a:schemeClr val="accent1"/>
-          </a:effectRef>
-          <a:fontRef idx="minor">
-            <a:schemeClr val="lt1"/>
-          </a:fontRef>
-        </p:style>
-        <p:txBody>
-          <a:bodyPr rtlCol="0" anchor="ctr" lIns="0" rIns="0" tIns="0" bIns="0" wrap="square"/>
-          <a:lstStyle/>
-          <a:p>
-            <a:pPr algn="ctr"/>
-            <a:r>
-              <a:rPr sz="1300" b="1" i="0">
-                <a:solidFill>
-                  <a:srgbClr val="FFFFFF"/>
-                </a:solidFill>
-                <a:latin typeface="Arial"/>
-              </a:rPr>
-              <a:t>1</a:t>
+              <a:t>Adopt your principles, don't draft them</a:t>
             </a:r>
           </a:p>
         </p:txBody>
@@ -13105,8 +11722,8 @@
         </p:nvSpPr>
         <p:spPr>
           <a:xfrm>
-            <a:off x="1115568" y="1481328"/>
-            <a:ext cx="4937760" cy="822960"/>
+            <a:off x="822960" y="4343400"/>
+            <a:ext cx="9875520" cy="1554480"/>
           </a:xfrm>
           <a:prstGeom prst="rect">
             <a:avLst/>
@@ -13120,1182 +11737,47 @@
           <a:lstStyle/>
           <a:p>
             <a:r>
-              <a:rPr sz="1700" b="1" i="0">
-                <a:solidFill>
-                  <a:srgbClr val="1A1A1A"/>
-                </a:solidFill>
-                <a:latin typeface="Arial"/>
-              </a:rPr>
-              <a:t>Rule of law</a:t>
-            </a:r>
-          </a:p>
-        </p:txBody>
-      </p:sp>
-      <p:sp>
-        <p:nvSpPr>
-          <p:cNvPr id="6" name="Rectangle 5"/>
-          <p:cNvSpPr/>
-          <p:nvPr/>
-        </p:nvSpPr>
-        <p:spPr>
-          <a:xfrm>
-            <a:off x="658368" y="2322576"/>
-            <a:ext cx="5257800" cy="12700"/>
-          </a:xfrm>
-          <a:prstGeom prst="rect">
-            <a:avLst/>
-          </a:prstGeom>
-          <a:solidFill>
-            <a:srgbClr val="DDECF4"/>
-          </a:solidFill>
-          <a:ln>
-            <a:noFill/>
-          </a:ln>
-          <a:effectLst/>
-        </p:spPr>
-        <p:style>
-          <a:lnRef idx="1">
-            <a:schemeClr val="accent1"/>
-          </a:lnRef>
-          <a:fillRef idx="3">
-            <a:schemeClr val="accent1"/>
-          </a:fillRef>
-          <a:effectRef idx="2">
-            <a:schemeClr val="accent1"/>
-          </a:effectRef>
-          <a:fontRef idx="minor">
-            <a:schemeClr val="lt1"/>
-          </a:fontRef>
-        </p:style>
-        <p:txBody>
-          <a:bodyPr rtlCol="0" anchor="ctr"/>
-          <a:lstStyle/>
-          <a:p>
-            <a:pPr algn="ctr"/>
-          </a:p>
-        </p:txBody>
-      </p:sp>
-      <p:sp>
-        <p:nvSpPr>
-          <p:cNvPr id="7" name="Oval 6"/>
-          <p:cNvSpPr/>
-          <p:nvPr/>
-        </p:nvSpPr>
-        <p:spPr>
-          <a:xfrm>
-            <a:off x="658368" y="2468880"/>
-            <a:ext cx="310896" cy="310896"/>
-          </a:xfrm>
-          <a:prstGeom prst="ellipse">
-            <a:avLst/>
-          </a:prstGeom>
-          <a:solidFill>
-            <a:srgbClr val="009CD6"/>
-          </a:solidFill>
-          <a:ln>
-            <a:noFill/>
-          </a:ln>
-          <a:effectLst/>
-        </p:spPr>
-        <p:style>
-          <a:lnRef idx="1">
-            <a:schemeClr val="accent1"/>
-          </a:lnRef>
-          <a:fillRef idx="3">
-            <a:schemeClr val="accent1"/>
-          </a:fillRef>
-          <a:effectRef idx="2">
-            <a:schemeClr val="accent1"/>
-          </a:effectRef>
-          <a:fontRef idx="minor">
-            <a:schemeClr val="lt1"/>
-          </a:fontRef>
-        </p:style>
-        <p:txBody>
-          <a:bodyPr rtlCol="0" anchor="ctr" lIns="0" rIns="0" tIns="0" bIns="0" wrap="square"/>
-          <a:lstStyle/>
-          <a:p>
-            <a:pPr algn="ctr"/>
-            <a:r>
-              <a:rPr sz="1300" b="1" i="0">
-                <a:solidFill>
-                  <a:srgbClr val="FFFFFF"/>
-                </a:solidFill>
-                <a:latin typeface="Arial"/>
-              </a:rPr>
-              <a:t>2</a:t>
-            </a:r>
-          </a:p>
-        </p:txBody>
-      </p:sp>
-      <p:sp>
-        <p:nvSpPr>
-          <p:cNvPr id="8" name="TextBox 7"/>
-          <p:cNvSpPr txBox="1"/>
-          <p:nvPr/>
-        </p:nvSpPr>
-        <p:spPr>
-          <a:xfrm>
-            <a:off x="1115568" y="2414016"/>
-            <a:ext cx="4937760" cy="822960"/>
-          </a:xfrm>
-          <a:prstGeom prst="rect">
-            <a:avLst/>
-          </a:prstGeom>
-          <a:noFill/>
-        </p:spPr>
-        <p:txBody>
-          <a:bodyPr wrap="square">
-            <a:spAutoFit/>
-          </a:bodyPr>
-          <a:lstStyle/>
-          <a:p>
-            <a:r>
-              <a:rPr sz="1700" b="1" i="0">
-                <a:solidFill>
-                  <a:srgbClr val="1A1A1A"/>
-                </a:solidFill>
-                <a:latin typeface="Arial"/>
-              </a:rPr>
-              <a:t>Intrinsic security and privacy</a:t>
-            </a:r>
-          </a:p>
-        </p:txBody>
-      </p:sp>
-      <p:sp>
-        <p:nvSpPr>
-          <p:cNvPr id="9" name="Rectangle 8"/>
-          <p:cNvSpPr/>
-          <p:nvPr/>
-        </p:nvSpPr>
-        <p:spPr>
-          <a:xfrm>
-            <a:off x="658368" y="3255264"/>
-            <a:ext cx="5257800" cy="12700"/>
-          </a:xfrm>
-          <a:prstGeom prst="rect">
-            <a:avLst/>
-          </a:prstGeom>
-          <a:solidFill>
-            <a:srgbClr val="DDECF4"/>
-          </a:solidFill>
-          <a:ln>
-            <a:noFill/>
-          </a:ln>
-          <a:effectLst/>
-        </p:spPr>
-        <p:style>
-          <a:lnRef idx="1">
-            <a:schemeClr val="accent1"/>
-          </a:lnRef>
-          <a:fillRef idx="3">
-            <a:schemeClr val="accent1"/>
-          </a:fillRef>
-          <a:effectRef idx="2">
-            <a:schemeClr val="accent1"/>
-          </a:effectRef>
-          <a:fontRef idx="minor">
-            <a:schemeClr val="lt1"/>
-          </a:fontRef>
-        </p:style>
-        <p:txBody>
-          <a:bodyPr rtlCol="0" anchor="ctr"/>
-          <a:lstStyle/>
-          <a:p>
-            <a:pPr algn="ctr"/>
-          </a:p>
-        </p:txBody>
-      </p:sp>
-      <p:sp>
-        <p:nvSpPr>
-          <p:cNvPr id="10" name="Oval 9"/>
-          <p:cNvSpPr/>
-          <p:nvPr/>
-        </p:nvSpPr>
-        <p:spPr>
-          <a:xfrm>
-            <a:off x="658368" y="3401568"/>
-            <a:ext cx="310896" cy="310896"/>
-          </a:xfrm>
-          <a:prstGeom prst="ellipse">
-            <a:avLst/>
-          </a:prstGeom>
-          <a:solidFill>
-            <a:srgbClr val="009CD6"/>
-          </a:solidFill>
-          <a:ln>
-            <a:noFill/>
-          </a:ln>
-          <a:effectLst/>
-        </p:spPr>
-        <p:style>
-          <a:lnRef idx="1">
-            <a:schemeClr val="accent1"/>
-          </a:lnRef>
-          <a:fillRef idx="3">
-            <a:schemeClr val="accent1"/>
-          </a:fillRef>
-          <a:effectRef idx="2">
-            <a:schemeClr val="accent1"/>
-          </a:effectRef>
-          <a:fontRef idx="minor">
-            <a:schemeClr val="lt1"/>
-          </a:fontRef>
-        </p:style>
-        <p:txBody>
-          <a:bodyPr rtlCol="0" anchor="ctr" lIns="0" rIns="0" tIns="0" bIns="0" wrap="square"/>
-          <a:lstStyle/>
-          <a:p>
-            <a:pPr algn="ctr"/>
-            <a:r>
-              <a:rPr sz="1300" b="1" i="0">
-                <a:solidFill>
-                  <a:srgbClr val="FFFFFF"/>
-                </a:solidFill>
-                <a:latin typeface="Arial"/>
-              </a:rPr>
-              <a:t>3</a:t>
-            </a:r>
-          </a:p>
-        </p:txBody>
-      </p:sp>
-      <p:sp>
-        <p:nvSpPr>
-          <p:cNvPr id="11" name="TextBox 10"/>
-          <p:cNvSpPr txBox="1"/>
-          <p:nvPr/>
-        </p:nvSpPr>
-        <p:spPr>
-          <a:xfrm>
-            <a:off x="1115568" y="3346704"/>
-            <a:ext cx="4937760" cy="822960"/>
-          </a:xfrm>
-          <a:prstGeom prst="rect">
-            <a:avLst/>
-          </a:prstGeom>
-          <a:noFill/>
-        </p:spPr>
-        <p:txBody>
-          <a:bodyPr wrap="square">
-            <a:spAutoFit/>
-          </a:bodyPr>
-          <a:lstStyle/>
-          <a:p>
-            <a:r>
-              <a:rPr sz="1700" b="1" i="0">
-                <a:solidFill>
-                  <a:srgbClr val="1A1A1A"/>
-                </a:solidFill>
-                <a:latin typeface="Arial"/>
-              </a:rPr>
-              <a:t>Openness and transparency</a:t>
-            </a:r>
-          </a:p>
-        </p:txBody>
-      </p:sp>
-      <p:sp>
-        <p:nvSpPr>
-          <p:cNvPr id="12" name="Rectangle 11"/>
-          <p:cNvSpPr/>
-          <p:nvPr/>
-        </p:nvSpPr>
-        <p:spPr>
-          <a:xfrm>
-            <a:off x="658368" y="4187952"/>
-            <a:ext cx="5257800" cy="12700"/>
-          </a:xfrm>
-          <a:prstGeom prst="rect">
-            <a:avLst/>
-          </a:prstGeom>
-          <a:solidFill>
-            <a:srgbClr val="DDECF4"/>
-          </a:solidFill>
-          <a:ln>
-            <a:noFill/>
-          </a:ln>
-          <a:effectLst/>
-        </p:spPr>
-        <p:style>
-          <a:lnRef idx="1">
-            <a:schemeClr val="accent1"/>
-          </a:lnRef>
-          <a:fillRef idx="3">
-            <a:schemeClr val="accent1"/>
-          </a:fillRef>
-          <a:effectRef idx="2">
-            <a:schemeClr val="accent1"/>
-          </a:effectRef>
-          <a:fontRef idx="minor">
-            <a:schemeClr val="lt1"/>
-          </a:fontRef>
-        </p:style>
-        <p:txBody>
-          <a:bodyPr rtlCol="0" anchor="ctr"/>
-          <a:lstStyle/>
-          <a:p>
-            <a:pPr algn="ctr"/>
-          </a:p>
-        </p:txBody>
-      </p:sp>
-      <p:sp>
-        <p:nvSpPr>
-          <p:cNvPr id="13" name="Oval 12"/>
-          <p:cNvSpPr/>
-          <p:nvPr/>
-        </p:nvSpPr>
-        <p:spPr>
-          <a:xfrm>
-            <a:off x="658368" y="4334255"/>
-            <a:ext cx="310896" cy="310896"/>
-          </a:xfrm>
-          <a:prstGeom prst="ellipse">
-            <a:avLst/>
-          </a:prstGeom>
-          <a:solidFill>
-            <a:srgbClr val="009CD6"/>
-          </a:solidFill>
-          <a:ln>
-            <a:noFill/>
-          </a:ln>
-          <a:effectLst/>
-        </p:spPr>
-        <p:style>
-          <a:lnRef idx="1">
-            <a:schemeClr val="accent1"/>
-          </a:lnRef>
-          <a:fillRef idx="3">
-            <a:schemeClr val="accent1"/>
-          </a:fillRef>
-          <a:effectRef idx="2">
-            <a:schemeClr val="accent1"/>
-          </a:effectRef>
-          <a:fontRef idx="minor">
-            <a:schemeClr val="lt1"/>
-          </a:fontRef>
-        </p:style>
-        <p:txBody>
-          <a:bodyPr rtlCol="0" anchor="ctr" lIns="0" rIns="0" tIns="0" bIns="0" wrap="square"/>
-          <a:lstStyle/>
-          <a:p>
-            <a:pPr algn="ctr"/>
-            <a:r>
-              <a:rPr sz="1300" b="1" i="0">
-                <a:solidFill>
-                  <a:srgbClr val="FFFFFF"/>
-                </a:solidFill>
-                <a:latin typeface="Arial"/>
-              </a:rPr>
-              <a:t>4</a:t>
-            </a:r>
-          </a:p>
-        </p:txBody>
-      </p:sp>
-      <p:sp>
-        <p:nvSpPr>
-          <p:cNvPr id="14" name="TextBox 13"/>
-          <p:cNvSpPr txBox="1"/>
-          <p:nvPr/>
-        </p:nvSpPr>
-        <p:spPr>
-          <a:xfrm>
-            <a:off x="1115568" y="4279392"/>
-            <a:ext cx="4937760" cy="822960"/>
-          </a:xfrm>
-          <a:prstGeom prst="rect">
-            <a:avLst/>
-          </a:prstGeom>
-          <a:noFill/>
-        </p:spPr>
-        <p:txBody>
-          <a:bodyPr wrap="square">
-            <a:spAutoFit/>
-          </a:bodyPr>
-          <a:lstStyle/>
-          <a:p>
-            <a:r>
-              <a:rPr sz="1700" b="1" i="0">
-                <a:solidFill>
-                  <a:srgbClr val="1A1A1A"/>
-                </a:solidFill>
-                <a:latin typeface="Arial"/>
-              </a:rPr>
-              <a:t>Interoperability by default</a:t>
-            </a:r>
-          </a:p>
-        </p:txBody>
-      </p:sp>
-      <p:sp>
-        <p:nvSpPr>
-          <p:cNvPr id="15" name="Rectangle 14"/>
-          <p:cNvSpPr/>
-          <p:nvPr/>
-        </p:nvSpPr>
-        <p:spPr>
-          <a:xfrm>
-            <a:off x="658368" y="5120640"/>
-            <a:ext cx="5257800" cy="12700"/>
-          </a:xfrm>
-          <a:prstGeom prst="rect">
-            <a:avLst/>
-          </a:prstGeom>
-          <a:solidFill>
-            <a:srgbClr val="DDECF4"/>
-          </a:solidFill>
-          <a:ln>
-            <a:noFill/>
-          </a:ln>
-          <a:effectLst/>
-        </p:spPr>
-        <p:style>
-          <a:lnRef idx="1">
-            <a:schemeClr val="accent1"/>
-          </a:lnRef>
-          <a:fillRef idx="3">
-            <a:schemeClr val="accent1"/>
-          </a:fillRef>
-          <a:effectRef idx="2">
-            <a:schemeClr val="accent1"/>
-          </a:effectRef>
-          <a:fontRef idx="minor">
-            <a:schemeClr val="lt1"/>
-          </a:fontRef>
-        </p:style>
-        <p:txBody>
-          <a:bodyPr rtlCol="0" anchor="ctr"/>
-          <a:lstStyle/>
-          <a:p>
-            <a:pPr algn="ctr"/>
-          </a:p>
-        </p:txBody>
-      </p:sp>
-      <p:sp>
-        <p:nvSpPr>
-          <p:cNvPr id="16" name="Oval 15"/>
-          <p:cNvSpPr/>
-          <p:nvPr/>
-        </p:nvSpPr>
-        <p:spPr>
-          <a:xfrm>
-            <a:off x="658368" y="5266944"/>
-            <a:ext cx="310896" cy="310896"/>
-          </a:xfrm>
-          <a:prstGeom prst="ellipse">
-            <a:avLst/>
-          </a:prstGeom>
-          <a:solidFill>
-            <a:srgbClr val="009CD6"/>
-          </a:solidFill>
-          <a:ln>
-            <a:noFill/>
-          </a:ln>
-          <a:effectLst/>
-        </p:spPr>
-        <p:style>
-          <a:lnRef idx="1">
-            <a:schemeClr val="accent1"/>
-          </a:lnRef>
-          <a:fillRef idx="3">
-            <a:schemeClr val="accent1"/>
-          </a:fillRef>
-          <a:effectRef idx="2">
-            <a:schemeClr val="accent1"/>
-          </a:effectRef>
-          <a:fontRef idx="minor">
-            <a:schemeClr val="lt1"/>
-          </a:fontRef>
-        </p:style>
-        <p:txBody>
-          <a:bodyPr rtlCol="0" anchor="ctr" lIns="0" rIns="0" tIns="0" bIns="0" wrap="square"/>
-          <a:lstStyle/>
-          <a:p>
-            <a:pPr algn="ctr"/>
-            <a:r>
-              <a:rPr sz="1300" b="1" i="0">
-                <a:solidFill>
-                  <a:srgbClr val="FFFFFF"/>
-                </a:solidFill>
-                <a:latin typeface="Arial"/>
-              </a:rPr>
-              <a:t>5</a:t>
-            </a:r>
-          </a:p>
-        </p:txBody>
-      </p:sp>
-      <p:sp>
-        <p:nvSpPr>
-          <p:cNvPr id="17" name="TextBox 16"/>
-          <p:cNvSpPr txBox="1"/>
-          <p:nvPr/>
-        </p:nvSpPr>
-        <p:spPr>
-          <a:xfrm>
-            <a:off x="1115568" y="5212080"/>
-            <a:ext cx="4937760" cy="822960"/>
-          </a:xfrm>
-          <a:prstGeom prst="rect">
-            <a:avLst/>
-          </a:prstGeom>
-          <a:noFill/>
-        </p:spPr>
-        <p:txBody>
-          <a:bodyPr wrap="square">
-            <a:spAutoFit/>
-          </a:bodyPr>
-          <a:lstStyle/>
-          <a:p>
-            <a:r>
-              <a:rPr sz="1700" b="1" i="0">
-                <a:solidFill>
-                  <a:srgbClr val="1A1A1A"/>
-                </a:solidFill>
-                <a:latin typeface="Arial"/>
-              </a:rPr>
-              <a:t>Once-only</a:t>
-            </a:r>
-          </a:p>
-        </p:txBody>
-      </p:sp>
-      <p:sp>
-        <p:nvSpPr>
-          <p:cNvPr id="18" name="Oval 17"/>
-          <p:cNvSpPr/>
-          <p:nvPr/>
-        </p:nvSpPr>
-        <p:spPr>
-          <a:xfrm>
-            <a:off x="6281928" y="1536192"/>
-            <a:ext cx="310896" cy="310896"/>
-          </a:xfrm>
-          <a:prstGeom prst="ellipse">
-            <a:avLst/>
-          </a:prstGeom>
-          <a:solidFill>
-            <a:srgbClr val="009CD6"/>
-          </a:solidFill>
-          <a:ln>
-            <a:noFill/>
-          </a:ln>
-          <a:effectLst/>
-        </p:spPr>
-        <p:style>
-          <a:lnRef idx="1">
-            <a:schemeClr val="accent1"/>
-          </a:lnRef>
-          <a:fillRef idx="3">
-            <a:schemeClr val="accent1"/>
-          </a:fillRef>
-          <a:effectRef idx="2">
-            <a:schemeClr val="accent1"/>
-          </a:effectRef>
-          <a:fontRef idx="minor">
-            <a:schemeClr val="lt1"/>
-          </a:fontRef>
-        </p:style>
-        <p:txBody>
-          <a:bodyPr rtlCol="0" anchor="ctr" lIns="0" rIns="0" tIns="0" bIns="0" wrap="square"/>
-          <a:lstStyle/>
-          <a:p>
-            <a:pPr algn="ctr"/>
-            <a:r>
-              <a:rPr sz="1300" b="1" i="0">
-                <a:solidFill>
-                  <a:srgbClr val="FFFFFF"/>
-                </a:solidFill>
-                <a:latin typeface="Arial"/>
-              </a:rPr>
-              <a:t>6</a:t>
-            </a:r>
-          </a:p>
-        </p:txBody>
-      </p:sp>
-      <p:sp>
-        <p:nvSpPr>
-          <p:cNvPr id="19" name="TextBox 18"/>
-          <p:cNvSpPr txBox="1"/>
-          <p:nvPr/>
-        </p:nvSpPr>
-        <p:spPr>
-          <a:xfrm>
-            <a:off x="6739128" y="1481328"/>
-            <a:ext cx="4937760" cy="822960"/>
-          </a:xfrm>
-          <a:prstGeom prst="rect">
-            <a:avLst/>
-          </a:prstGeom>
-          <a:noFill/>
-        </p:spPr>
-        <p:txBody>
-          <a:bodyPr wrap="square">
-            <a:spAutoFit/>
-          </a:bodyPr>
-          <a:lstStyle/>
-          <a:p>
-            <a:r>
-              <a:rPr sz="1700" b="1" i="0">
-                <a:solidFill>
-                  <a:srgbClr val="1A1A1A"/>
-                </a:solidFill>
-                <a:latin typeface="Arial"/>
-              </a:rPr>
-              <a:t>User-centred and inclusive</a:t>
-            </a:r>
-          </a:p>
-        </p:txBody>
-      </p:sp>
-      <p:sp>
-        <p:nvSpPr>
-          <p:cNvPr id="20" name="Rectangle 19"/>
-          <p:cNvSpPr/>
-          <p:nvPr/>
-        </p:nvSpPr>
-        <p:spPr>
-          <a:xfrm>
-            <a:off x="6281928" y="2322576"/>
-            <a:ext cx="5257800" cy="12700"/>
-          </a:xfrm>
-          <a:prstGeom prst="rect">
-            <a:avLst/>
-          </a:prstGeom>
-          <a:solidFill>
-            <a:srgbClr val="DDECF4"/>
-          </a:solidFill>
-          <a:ln>
-            <a:noFill/>
-          </a:ln>
-          <a:effectLst/>
-        </p:spPr>
-        <p:style>
-          <a:lnRef idx="1">
-            <a:schemeClr val="accent1"/>
-          </a:lnRef>
-          <a:fillRef idx="3">
-            <a:schemeClr val="accent1"/>
-          </a:fillRef>
-          <a:effectRef idx="2">
-            <a:schemeClr val="accent1"/>
-          </a:effectRef>
-          <a:fontRef idx="minor">
-            <a:schemeClr val="lt1"/>
-          </a:fontRef>
-        </p:style>
-        <p:txBody>
-          <a:bodyPr rtlCol="0" anchor="ctr"/>
-          <a:lstStyle/>
-          <a:p>
-            <a:pPr algn="ctr"/>
-          </a:p>
-        </p:txBody>
-      </p:sp>
-      <p:sp>
-        <p:nvSpPr>
-          <p:cNvPr id="21" name="Oval 20"/>
-          <p:cNvSpPr/>
-          <p:nvPr/>
-        </p:nvSpPr>
-        <p:spPr>
-          <a:xfrm>
-            <a:off x="6281928" y="2468880"/>
-            <a:ext cx="310896" cy="310896"/>
-          </a:xfrm>
-          <a:prstGeom prst="ellipse">
-            <a:avLst/>
-          </a:prstGeom>
-          <a:solidFill>
-            <a:srgbClr val="009CD6"/>
-          </a:solidFill>
-          <a:ln>
-            <a:noFill/>
-          </a:ln>
-          <a:effectLst/>
-        </p:spPr>
-        <p:style>
-          <a:lnRef idx="1">
-            <a:schemeClr val="accent1"/>
-          </a:lnRef>
-          <a:fillRef idx="3">
-            <a:schemeClr val="accent1"/>
-          </a:fillRef>
-          <a:effectRef idx="2">
-            <a:schemeClr val="accent1"/>
-          </a:effectRef>
-          <a:fontRef idx="minor">
-            <a:schemeClr val="lt1"/>
-          </a:fontRef>
-        </p:style>
-        <p:txBody>
-          <a:bodyPr rtlCol="0" anchor="ctr" lIns="0" rIns="0" tIns="0" bIns="0" wrap="square"/>
-          <a:lstStyle/>
-          <a:p>
-            <a:pPr algn="ctr"/>
-            <a:r>
-              <a:rPr sz="1300" b="1" i="0">
-                <a:solidFill>
-                  <a:srgbClr val="FFFFFF"/>
-                </a:solidFill>
-                <a:latin typeface="Arial"/>
-              </a:rPr>
-              <a:t>7</a:t>
-            </a:r>
-          </a:p>
-        </p:txBody>
-      </p:sp>
-      <p:sp>
-        <p:nvSpPr>
-          <p:cNvPr id="22" name="TextBox 21"/>
-          <p:cNvSpPr txBox="1"/>
-          <p:nvPr/>
-        </p:nvSpPr>
-        <p:spPr>
-          <a:xfrm>
-            <a:off x="6739128" y="2414016"/>
-            <a:ext cx="4937760" cy="822960"/>
-          </a:xfrm>
-          <a:prstGeom prst="rect">
-            <a:avLst/>
-          </a:prstGeom>
-          <a:noFill/>
-        </p:spPr>
-        <p:txBody>
-          <a:bodyPr wrap="square">
-            <a:spAutoFit/>
-          </a:bodyPr>
-          <a:lstStyle/>
-          <a:p>
-            <a:r>
-              <a:rPr sz="1700" b="1" i="0">
-                <a:solidFill>
-                  <a:srgbClr val="1A1A1A"/>
-                </a:solidFill>
-                <a:latin typeface="Arial"/>
-              </a:rPr>
-              <a:t>Reuse and sharing</a:t>
-            </a:r>
-          </a:p>
-        </p:txBody>
-      </p:sp>
-      <p:sp>
-        <p:nvSpPr>
-          <p:cNvPr id="23" name="Rectangle 22"/>
-          <p:cNvSpPr/>
-          <p:nvPr/>
-        </p:nvSpPr>
-        <p:spPr>
-          <a:xfrm>
-            <a:off x="6281928" y="3255264"/>
-            <a:ext cx="5257800" cy="12700"/>
-          </a:xfrm>
-          <a:prstGeom prst="rect">
-            <a:avLst/>
-          </a:prstGeom>
-          <a:solidFill>
-            <a:srgbClr val="DDECF4"/>
-          </a:solidFill>
-          <a:ln>
-            <a:noFill/>
-          </a:ln>
-          <a:effectLst/>
-        </p:spPr>
-        <p:style>
-          <a:lnRef idx="1">
-            <a:schemeClr val="accent1"/>
-          </a:lnRef>
-          <a:fillRef idx="3">
-            <a:schemeClr val="accent1"/>
-          </a:fillRef>
-          <a:effectRef idx="2">
-            <a:schemeClr val="accent1"/>
-          </a:effectRef>
-          <a:fontRef idx="minor">
-            <a:schemeClr val="lt1"/>
-          </a:fontRef>
-        </p:style>
-        <p:txBody>
-          <a:bodyPr rtlCol="0" anchor="ctr"/>
-          <a:lstStyle/>
-          <a:p>
-            <a:pPr algn="ctr"/>
-          </a:p>
-        </p:txBody>
-      </p:sp>
-      <p:sp>
-        <p:nvSpPr>
-          <p:cNvPr id="24" name="Oval 23"/>
-          <p:cNvSpPr/>
-          <p:nvPr/>
-        </p:nvSpPr>
-        <p:spPr>
-          <a:xfrm>
-            <a:off x="6281928" y="3401568"/>
-            <a:ext cx="310896" cy="310896"/>
-          </a:xfrm>
-          <a:prstGeom prst="ellipse">
-            <a:avLst/>
-          </a:prstGeom>
-          <a:solidFill>
-            <a:srgbClr val="009CD6"/>
-          </a:solidFill>
-          <a:ln>
-            <a:noFill/>
-          </a:ln>
-          <a:effectLst/>
-        </p:spPr>
-        <p:style>
-          <a:lnRef idx="1">
-            <a:schemeClr val="accent1"/>
-          </a:lnRef>
-          <a:fillRef idx="3">
-            <a:schemeClr val="accent1"/>
-          </a:fillRef>
-          <a:effectRef idx="2">
-            <a:schemeClr val="accent1"/>
-          </a:effectRef>
-          <a:fontRef idx="minor">
-            <a:schemeClr val="lt1"/>
-          </a:fontRef>
-        </p:style>
-        <p:txBody>
-          <a:bodyPr rtlCol="0" anchor="ctr" lIns="0" rIns="0" tIns="0" bIns="0" wrap="square"/>
-          <a:lstStyle/>
-          <a:p>
-            <a:pPr algn="ctr"/>
-            <a:r>
-              <a:rPr sz="1300" b="1" i="0">
-                <a:solidFill>
-                  <a:srgbClr val="FFFFFF"/>
-                </a:solidFill>
-                <a:latin typeface="Arial"/>
-              </a:rPr>
-              <a:t>8</a:t>
-            </a:r>
-          </a:p>
-        </p:txBody>
-      </p:sp>
-      <p:sp>
-        <p:nvSpPr>
-          <p:cNvPr id="25" name="TextBox 24"/>
-          <p:cNvSpPr txBox="1"/>
-          <p:nvPr/>
-        </p:nvSpPr>
-        <p:spPr>
-          <a:xfrm>
-            <a:off x="6739128" y="3346704"/>
-            <a:ext cx="4937760" cy="822960"/>
-          </a:xfrm>
-          <a:prstGeom prst="rect">
-            <a:avLst/>
-          </a:prstGeom>
-          <a:noFill/>
-        </p:spPr>
-        <p:txBody>
-          <a:bodyPr wrap="square">
-            <a:spAutoFit/>
-          </a:bodyPr>
-          <a:lstStyle/>
-          <a:p>
-            <a:r>
-              <a:rPr sz="1700" b="1" i="0">
-                <a:solidFill>
-                  <a:srgbClr val="1A1A1A"/>
-                </a:solidFill>
-                <a:latin typeface="Arial"/>
-              </a:rPr>
-              <a:t>Data as a managed asset — one source of truth</a:t>
-            </a:r>
-          </a:p>
-        </p:txBody>
-      </p:sp>
-      <p:sp>
-        <p:nvSpPr>
-          <p:cNvPr id="26" name="Rectangle 25"/>
-          <p:cNvSpPr/>
-          <p:nvPr/>
-        </p:nvSpPr>
-        <p:spPr>
-          <a:xfrm>
-            <a:off x="6281928" y="4187952"/>
-            <a:ext cx="5257800" cy="12700"/>
-          </a:xfrm>
-          <a:prstGeom prst="rect">
-            <a:avLst/>
-          </a:prstGeom>
-          <a:solidFill>
-            <a:srgbClr val="DDECF4"/>
-          </a:solidFill>
-          <a:ln>
-            <a:noFill/>
-          </a:ln>
-          <a:effectLst/>
-        </p:spPr>
-        <p:style>
-          <a:lnRef idx="1">
-            <a:schemeClr val="accent1"/>
-          </a:lnRef>
-          <a:fillRef idx="3">
-            <a:schemeClr val="accent1"/>
-          </a:fillRef>
-          <a:effectRef idx="2">
-            <a:schemeClr val="accent1"/>
-          </a:effectRef>
-          <a:fontRef idx="minor">
-            <a:schemeClr val="lt1"/>
-          </a:fontRef>
-        </p:style>
-        <p:txBody>
-          <a:bodyPr rtlCol="0" anchor="ctr"/>
-          <a:lstStyle/>
-          <a:p>
-            <a:pPr algn="ctr"/>
-          </a:p>
-        </p:txBody>
-      </p:sp>
-      <p:sp>
-        <p:nvSpPr>
-          <p:cNvPr id="27" name="Oval 26"/>
-          <p:cNvSpPr/>
-          <p:nvPr/>
-        </p:nvSpPr>
-        <p:spPr>
-          <a:xfrm>
-            <a:off x="6281928" y="4334255"/>
-            <a:ext cx="310896" cy="310896"/>
-          </a:xfrm>
-          <a:prstGeom prst="ellipse">
-            <a:avLst/>
-          </a:prstGeom>
-          <a:solidFill>
-            <a:srgbClr val="009CD6"/>
-          </a:solidFill>
-          <a:ln>
-            <a:noFill/>
-          </a:ln>
-          <a:effectLst/>
-        </p:spPr>
-        <p:style>
-          <a:lnRef idx="1">
-            <a:schemeClr val="accent1"/>
-          </a:lnRef>
-          <a:fillRef idx="3">
-            <a:schemeClr val="accent1"/>
-          </a:fillRef>
-          <a:effectRef idx="2">
-            <a:schemeClr val="accent1"/>
-          </a:effectRef>
-          <a:fontRef idx="minor">
-            <a:schemeClr val="lt1"/>
-          </a:fontRef>
-        </p:style>
-        <p:txBody>
-          <a:bodyPr rtlCol="0" anchor="ctr" lIns="0" rIns="0" tIns="0" bIns="0" wrap="square"/>
-          <a:lstStyle/>
-          <a:p>
-            <a:pPr algn="ctr"/>
-            <a:r>
-              <a:rPr sz="1300" b="1" i="0">
-                <a:solidFill>
-                  <a:srgbClr val="FFFFFF"/>
-                </a:solidFill>
-                <a:latin typeface="Arial"/>
-              </a:rPr>
-              <a:t>9</a:t>
-            </a:r>
-          </a:p>
-        </p:txBody>
-      </p:sp>
-      <p:sp>
-        <p:nvSpPr>
-          <p:cNvPr id="28" name="TextBox 27"/>
-          <p:cNvSpPr txBox="1"/>
-          <p:nvPr/>
-        </p:nvSpPr>
-        <p:spPr>
-          <a:xfrm>
-            <a:off x="6739128" y="4279392"/>
-            <a:ext cx="4937760" cy="822960"/>
-          </a:xfrm>
-          <a:prstGeom prst="rect">
-            <a:avLst/>
-          </a:prstGeom>
-          <a:noFill/>
-        </p:spPr>
-        <p:txBody>
-          <a:bodyPr wrap="square">
-            <a:spAutoFit/>
-          </a:bodyPr>
-          <a:lstStyle/>
-          <a:p>
-            <a:r>
-              <a:rPr sz="1700" b="1" i="0">
-                <a:solidFill>
-                  <a:srgbClr val="1A1A1A"/>
-                </a:solidFill>
-                <a:latin typeface="Arial"/>
-              </a:rPr>
-              <a:t>Technology neutrality — avoid lock-in</a:t>
-            </a:r>
-          </a:p>
-        </p:txBody>
-      </p:sp>
-      <p:sp>
-        <p:nvSpPr>
-          <p:cNvPr id="29" name="Rectangle 28"/>
-          <p:cNvSpPr/>
-          <p:nvPr/>
-        </p:nvSpPr>
-        <p:spPr>
-          <a:xfrm>
-            <a:off x="6281928" y="5120640"/>
-            <a:ext cx="5257800" cy="12700"/>
-          </a:xfrm>
-          <a:prstGeom prst="rect">
-            <a:avLst/>
-          </a:prstGeom>
-          <a:solidFill>
-            <a:srgbClr val="DDECF4"/>
-          </a:solidFill>
-          <a:ln>
-            <a:noFill/>
-          </a:ln>
-          <a:effectLst/>
-        </p:spPr>
-        <p:style>
-          <a:lnRef idx="1">
-            <a:schemeClr val="accent1"/>
-          </a:lnRef>
-          <a:fillRef idx="3">
-            <a:schemeClr val="accent1"/>
-          </a:fillRef>
-          <a:effectRef idx="2">
-            <a:schemeClr val="accent1"/>
-          </a:effectRef>
-          <a:fontRef idx="minor">
-            <a:schemeClr val="lt1"/>
-          </a:fontRef>
-        </p:style>
-        <p:txBody>
-          <a:bodyPr rtlCol="0" anchor="ctr"/>
-          <a:lstStyle/>
-          <a:p>
-            <a:pPr algn="ctr"/>
-          </a:p>
-        </p:txBody>
-      </p:sp>
-      <p:sp>
-        <p:nvSpPr>
-          <p:cNvPr id="30" name="Oval 29"/>
-          <p:cNvSpPr/>
-          <p:nvPr/>
-        </p:nvSpPr>
-        <p:spPr>
-          <a:xfrm>
-            <a:off x="6281928" y="5266944"/>
-            <a:ext cx="310896" cy="310896"/>
-          </a:xfrm>
-          <a:prstGeom prst="ellipse">
-            <a:avLst/>
-          </a:prstGeom>
-          <a:solidFill>
-            <a:srgbClr val="009CD6"/>
-          </a:solidFill>
-          <a:ln>
-            <a:noFill/>
-          </a:ln>
-          <a:effectLst/>
-        </p:spPr>
-        <p:style>
-          <a:lnRef idx="1">
-            <a:schemeClr val="accent1"/>
-          </a:lnRef>
-          <a:fillRef idx="3">
-            <a:schemeClr val="accent1"/>
-          </a:fillRef>
-          <a:effectRef idx="2">
-            <a:schemeClr val="accent1"/>
-          </a:effectRef>
-          <a:fontRef idx="minor">
-            <a:schemeClr val="lt1"/>
-          </a:fontRef>
-        </p:style>
-        <p:txBody>
-          <a:bodyPr rtlCol="0" anchor="ctr" lIns="0" rIns="0" tIns="0" bIns="0" wrap="square"/>
-          <a:lstStyle/>
-          <a:p>
-            <a:pPr algn="ctr"/>
-            <a:r>
-              <a:rPr sz="1300" b="1" i="0">
-                <a:solidFill>
-                  <a:srgbClr val="FFFFFF"/>
-                </a:solidFill>
-                <a:latin typeface="Arial"/>
-              </a:rPr>
-              <a:t>10</a:t>
-            </a:r>
-          </a:p>
-        </p:txBody>
-      </p:sp>
-      <p:sp>
-        <p:nvSpPr>
-          <p:cNvPr id="31" name="TextBox 30"/>
-          <p:cNvSpPr txBox="1"/>
-          <p:nvPr/>
-        </p:nvSpPr>
-        <p:spPr>
-          <a:xfrm>
-            <a:off x="6739128" y="5212080"/>
-            <a:ext cx="4937760" cy="822960"/>
-          </a:xfrm>
-          <a:prstGeom prst="rect">
-            <a:avLst/>
-          </a:prstGeom>
-          <a:noFill/>
-        </p:spPr>
-        <p:txBody>
-          <a:bodyPr wrap="square">
-            <a:spAutoFit/>
-          </a:bodyPr>
-          <a:lstStyle/>
-          <a:p>
-            <a:r>
-              <a:rPr sz="1700" b="1" i="0">
-                <a:solidFill>
-                  <a:srgbClr val="1A1A1A"/>
-                </a:solidFill>
-                <a:latin typeface="Arial"/>
-              </a:rPr>
-              <a:t>Sustainability</a:t>
-            </a:r>
-          </a:p>
-        </p:txBody>
-      </p:sp>
-      <p:sp>
-        <p:nvSpPr>
-          <p:cNvPr id="32" name="TextBox 31"/>
-          <p:cNvSpPr txBox="1"/>
-          <p:nvPr/>
-        </p:nvSpPr>
-        <p:spPr>
-          <a:xfrm>
-            <a:off x="457200" y="6473952"/>
-            <a:ext cx="7772400" cy="292608"/>
-          </a:xfrm>
-          <a:prstGeom prst="rect">
-            <a:avLst/>
-          </a:prstGeom>
-          <a:noFill/>
-        </p:spPr>
-        <p:txBody>
-          <a:bodyPr wrap="square">
-            <a:spAutoFit/>
-          </a:bodyPr>
-          <a:lstStyle/>
-          <a:p>
-            <a:r>
-              <a:rPr sz="900" b="0" i="0">
+              <a:rPr sz="1700" b="0" i="1">
                 <a:solidFill>
                   <a:srgbClr val="595959"/>
                 </a:solidFill>
                 <a:latin typeface="Arial"/>
               </a:rPr>
-              <a:t>2.3 · Adopt your principles, don't draft them</a:t>
+              <a:t>PAERA publishes ten architectural principles, already debated across many countries. Your job is to adopt them, tailor the wording to your context, and use them to settle design arguments — not to spend your first year drafting principles from scratch.</a:t>
+            </a:r>
+          </a:p>
+        </p:txBody>
+      </p:sp>
+      <p:sp>
+        <p:nvSpPr>
+          <p:cNvPr id="6" name="TextBox 5"/>
+          <p:cNvSpPr txBox="1"/>
+          <p:nvPr/>
+        </p:nvSpPr>
+        <p:spPr>
+          <a:xfrm>
+            <a:off x="822960" y="5989320"/>
+            <a:ext cx="7315200" cy="365760"/>
+          </a:xfrm>
+          <a:prstGeom prst="rect">
+            <a:avLst/>
+          </a:prstGeom>
+          <a:noFill/>
+        </p:spPr>
+        <p:txBody>
+          <a:bodyPr wrap="square">
+            <a:spAutoFit/>
+          </a:bodyPr>
+          <a:lstStyle/>
+          <a:p>
+            <a:r>
+              <a:rPr sz="1200" b="0" i="0">
+                <a:solidFill>
+                  <a:srgbClr val="595959"/>
+                </a:solidFill>
+                <a:latin typeface="Arial"/>
+              </a:rPr>
+              <a:t>~4 minutes · standalone video · voice-over on text slides</a:t>
             </a:r>
           </a:p>
         </p:txBody>
@@ -14320,58 +11802,14 @@
       <p:grpSpPr/>
       <p:sp>
         <p:nvSpPr>
-          <p:cNvPr id="2" name="Rectangle 1"/>
-          <p:cNvSpPr/>
-          <p:nvPr/>
-        </p:nvSpPr>
-        <p:spPr>
-          <a:xfrm>
-            <a:off x="457200" y="384048"/>
-            <a:ext cx="45720" cy="256032"/>
-          </a:xfrm>
-          <a:prstGeom prst="rect">
-            <a:avLst/>
-          </a:prstGeom>
-          <a:solidFill>
-            <a:srgbClr val="009CD6"/>
-          </a:solidFill>
-          <a:ln>
-            <a:noFill/>
-          </a:ln>
-          <a:effectLst/>
-        </p:spPr>
-        <p:style>
-          <a:lnRef idx="1">
-            <a:schemeClr val="accent1"/>
-          </a:lnRef>
-          <a:fillRef idx="3">
-            <a:schemeClr val="accent1"/>
-          </a:fillRef>
-          <a:effectRef idx="2">
-            <a:schemeClr val="accent1"/>
-          </a:effectRef>
-          <a:fontRef idx="minor">
-            <a:schemeClr val="lt1"/>
-          </a:fontRef>
-        </p:style>
-        <p:txBody>
-          <a:bodyPr rtlCol="0" anchor="ctr"/>
-          <a:lstStyle/>
-          <a:p>
-            <a:pPr algn="ctr"/>
-          </a:p>
-        </p:txBody>
-      </p:sp>
-      <p:sp>
-        <p:nvSpPr>
-          <p:cNvPr id="3" name="TextBox 2"/>
+          <p:cNvPr id="2" name="TextBox 1"/>
           <p:cNvSpPr txBox="1"/>
           <p:nvPr/>
         </p:nvSpPr>
         <p:spPr>
           <a:xfrm>
-            <a:off x="621792" y="274320"/>
-            <a:ext cx="11247120" cy="914400"/>
+            <a:off x="1005840" y="1325880"/>
+            <a:ext cx="5486400" cy="365760"/>
           </a:xfrm>
           <a:prstGeom prst="rect">
             <a:avLst/>
@@ -14385,80 +11823,61 @@
           <a:lstStyle/>
           <a:p>
             <a:r>
-              <a:rPr sz="2800" b="1" i="0">
+              <a:rPr sz="1200" b="1" i="0">
+                <a:solidFill>
+                  <a:srgbClr val="006E96"/>
+                </a:solidFill>
+                <a:latin typeface="Arial"/>
+              </a:rPr>
+              <a:t>WHERE WE START</a:t>
+            </a:r>
+          </a:p>
+        </p:txBody>
+      </p:sp>
+      <p:sp>
+        <p:nvSpPr>
+          <p:cNvPr id="3" name="TextBox 2"/>
+          <p:cNvSpPr txBox="1"/>
+          <p:nvPr/>
+        </p:nvSpPr>
+        <p:spPr>
+          <a:xfrm>
+            <a:off x="1005840" y="1783080"/>
+            <a:ext cx="10149840" cy="1737360"/>
+          </a:xfrm>
+          <a:prstGeom prst="rect">
+            <a:avLst/>
+          </a:prstGeom>
+          <a:noFill/>
+        </p:spPr>
+        <p:txBody>
+          <a:bodyPr wrap="square">
+            <a:spAutoFit/>
+          </a:bodyPr>
+          <a:lstStyle/>
+          <a:p>
+            <a:r>
+              <a:rPr sz="3000" b="1" i="0">
                 <a:solidFill>
                   <a:srgbClr val="1A1A1A"/>
                 </a:solidFill>
                 <a:latin typeface="Arial"/>
               </a:rPr>
-              <a:t>Adopting them is three steps, not a three-month workshop</a:t>
-            </a:r>
-          </a:p>
-        </p:txBody>
-      </p:sp>
-      <p:sp>
-        <p:nvSpPr>
-          <p:cNvPr id="4" name="Oval 3"/>
-          <p:cNvSpPr/>
-          <p:nvPr/>
-        </p:nvSpPr>
-        <p:spPr>
-          <a:xfrm>
-            <a:off x="621792" y="1463040"/>
-            <a:ext cx="310896" cy="310896"/>
-          </a:xfrm>
-          <a:prstGeom prst="ellipse">
-            <a:avLst/>
-          </a:prstGeom>
-          <a:solidFill>
-            <a:srgbClr val="009CD6"/>
-          </a:solidFill>
-          <a:ln>
-            <a:noFill/>
-          </a:ln>
-          <a:effectLst/>
-        </p:spPr>
-        <p:style>
-          <a:lnRef idx="1">
-            <a:schemeClr val="accent1"/>
-          </a:lnRef>
-          <a:fillRef idx="3">
-            <a:schemeClr val="accent1"/>
-          </a:fillRef>
-          <a:effectRef idx="2">
-            <a:schemeClr val="accent1"/>
-          </a:effectRef>
-          <a:fontRef idx="minor">
-            <a:schemeClr val="lt1"/>
-          </a:fontRef>
-        </p:style>
-        <p:txBody>
-          <a:bodyPr rtlCol="0" anchor="ctr" lIns="0" rIns="0" tIns="0" bIns="0" wrap="square"/>
-          <a:lstStyle/>
-          <a:p>
-            <a:pPr algn="ctr"/>
-            <a:r>
-              <a:rPr sz="1300" b="1" i="0">
-                <a:solidFill>
-                  <a:srgbClr val="FFFFFF"/>
-                </a:solidFill>
-                <a:latin typeface="Arial"/>
-              </a:rPr>
-              <a:t>1</a:t>
-            </a:r>
-          </a:p>
-        </p:txBody>
-      </p:sp>
-      <p:sp>
-        <p:nvSpPr>
-          <p:cNvPr id="5" name="TextBox 4"/>
+              <a:t>Three months. Forty drafts. No agreement.</a:t>
+            </a:r>
+          </a:p>
+        </p:txBody>
+      </p:sp>
+      <p:sp>
+        <p:nvSpPr>
+          <p:cNvPr id="4" name="TextBox 3"/>
           <p:cNvSpPr txBox="1"/>
           <p:nvPr/>
         </p:nvSpPr>
         <p:spPr>
           <a:xfrm>
-            <a:off x="1115568" y="1417320"/>
-            <a:ext cx="10527487" cy="1569720"/>
+            <a:off x="1005840" y="3611880"/>
+            <a:ext cx="10149840" cy="2377440"/>
           </a:xfrm>
           <a:prstGeom prst="rect">
             <a:avLst/>
@@ -14473,344 +11892,56 @@
           <a:p>
             <a:pPr>
               <a:spcAft>
-                <a:spcPts val="300"/>
+                <a:spcPts val="800"/>
               </a:spcAft>
             </a:pPr>
             <a:r>
-              <a:rPr sz="1900" b="1" i="0">
-                <a:solidFill>
-                  <a:srgbClr val="1A1A1A"/>
-                </a:solidFill>
-                <a:latin typeface="Arial"/>
-              </a:rPr>
-              <a:t>Adopt the ten as your baseline</a:t>
-            </a:r>
-          </a:p>
-          <a:p>
-            <a:pPr>
-              <a:spcAft>
-                <a:spcPts val="300"/>
-              </a:spcAft>
-            </a:pPr>
-            <a:r>
-              <a:rPr sz="1550" b="0" i="0">
+              <a:rPr sz="1700" b="0" i="0">
                 <a:solidFill>
                   <a:srgbClr val="595959"/>
                 </a:solidFill>
                 <a:latin typeface="Arial"/>
               </a:rPr>
-              <a:t>You inherit the thinking instead of starting from a blank page.</a:t>
-            </a:r>
-          </a:p>
-        </p:txBody>
-      </p:sp>
-      <p:sp>
-        <p:nvSpPr>
-          <p:cNvPr id="6" name="Rectangle 5"/>
-          <p:cNvSpPr/>
-          <p:nvPr/>
-        </p:nvSpPr>
-        <p:spPr>
-          <a:xfrm>
-            <a:off x="621792" y="2991612"/>
-            <a:ext cx="10881360" cy="12700"/>
-          </a:xfrm>
-          <a:prstGeom prst="rect">
-            <a:avLst/>
-          </a:prstGeom>
-          <a:solidFill>
-            <a:srgbClr val="DDECF4"/>
-          </a:solidFill>
-          <a:ln>
-            <a:noFill/>
-          </a:ln>
-          <a:effectLst/>
-        </p:spPr>
-        <p:style>
-          <a:lnRef idx="1">
-            <a:schemeClr val="accent1"/>
-          </a:lnRef>
-          <a:fillRef idx="3">
-            <a:schemeClr val="accent1"/>
-          </a:fillRef>
-          <a:effectRef idx="2">
-            <a:schemeClr val="accent1"/>
-          </a:effectRef>
-          <a:fontRef idx="minor">
-            <a:schemeClr val="lt1"/>
-          </a:fontRef>
-        </p:style>
-        <p:txBody>
-          <a:bodyPr rtlCol="0" anchor="ctr"/>
-          <a:lstStyle/>
-          <a:p>
-            <a:pPr algn="ctr"/>
-          </a:p>
-        </p:txBody>
-      </p:sp>
-      <p:sp>
-        <p:nvSpPr>
-          <p:cNvPr id="7" name="Oval 6"/>
-          <p:cNvSpPr/>
-          <p:nvPr/>
-        </p:nvSpPr>
-        <p:spPr>
-          <a:xfrm>
-            <a:off x="621792" y="3078479"/>
-            <a:ext cx="310896" cy="310896"/>
-          </a:xfrm>
-          <a:prstGeom prst="ellipse">
-            <a:avLst/>
-          </a:prstGeom>
-          <a:solidFill>
-            <a:srgbClr val="009CD6"/>
-          </a:solidFill>
-          <a:ln>
-            <a:noFill/>
-          </a:ln>
-          <a:effectLst/>
-        </p:spPr>
-        <p:style>
-          <a:lnRef idx="1">
-            <a:schemeClr val="accent1"/>
-          </a:lnRef>
-          <a:fillRef idx="3">
-            <a:schemeClr val="accent1"/>
-          </a:fillRef>
-          <a:effectRef idx="2">
-            <a:schemeClr val="accent1"/>
-          </a:effectRef>
-          <a:fontRef idx="minor">
-            <a:schemeClr val="lt1"/>
-          </a:fontRef>
-        </p:style>
-        <p:txBody>
-          <a:bodyPr rtlCol="0" anchor="ctr" lIns="0" rIns="0" tIns="0" bIns="0" wrap="square"/>
-          <a:lstStyle/>
-          <a:p>
-            <a:pPr algn="ctr"/>
-            <a:r>
-              <a:rPr sz="1300" b="1" i="0">
-                <a:solidFill>
-                  <a:srgbClr val="FFFFFF"/>
-                </a:solidFill>
-                <a:latin typeface="Arial"/>
-              </a:rPr>
-              <a:t>2</a:t>
-            </a:r>
-          </a:p>
-        </p:txBody>
-      </p:sp>
-      <p:sp>
-        <p:nvSpPr>
-          <p:cNvPr id="8" name="TextBox 7"/>
-          <p:cNvSpPr txBox="1"/>
-          <p:nvPr/>
-        </p:nvSpPr>
-        <p:spPr>
-          <a:xfrm>
-            <a:off x="1115568" y="3032760"/>
-            <a:ext cx="10527487" cy="1569720"/>
-          </a:xfrm>
-          <a:prstGeom prst="rect">
-            <a:avLst/>
-          </a:prstGeom>
-          <a:noFill/>
-        </p:spPr>
-        <p:txBody>
-          <a:bodyPr wrap="square">
-            <a:spAutoFit/>
-          </a:bodyPr>
-          <a:lstStyle/>
+              <a:t>Someone says: let us write our country’s architectural principles.</a:t>
+            </a:r>
+          </a:p>
           <a:p>
             <a:pPr>
               <a:spcAft>
-                <a:spcPts val="300"/>
+                <a:spcPts val="800"/>
               </a:spcAft>
             </a:pPr>
             <a:r>
-              <a:rPr sz="1900" b="1" i="0">
-                <a:solidFill>
-                  <a:srgbClr val="1A1A1A"/>
-                </a:solidFill>
-                <a:latin typeface="Arial"/>
-              </a:rPr>
-              <a:t>Tailor the wording to your country</a:t>
-            </a:r>
-          </a:p>
-          <a:p>
-            <a:pPr>
-              <a:spcAft>
-                <a:spcPts val="300"/>
-              </a:spcAft>
-            </a:pPr>
-            <a:r>
-              <a:rPr sz="1550" b="0" i="0">
+              <a:rPr sz="1700" b="0" i="0">
                 <a:solidFill>
                   <a:srgbClr val="595959"/>
                 </a:solidFill>
                 <a:latin typeface="Arial"/>
               </a:rPr>
-              <a:t>Point each principle at your own laws, your data-protection act, your procurement rules, so it has teeth in your context.</a:t>
-            </a:r>
-          </a:p>
-        </p:txBody>
-      </p:sp>
-      <p:sp>
-        <p:nvSpPr>
-          <p:cNvPr id="9" name="Rectangle 8"/>
-          <p:cNvSpPr/>
-          <p:nvPr/>
-        </p:nvSpPr>
-        <p:spPr>
-          <a:xfrm>
-            <a:off x="621792" y="4607052"/>
-            <a:ext cx="10881360" cy="12700"/>
-          </a:xfrm>
-          <a:prstGeom prst="rect">
-            <a:avLst/>
-          </a:prstGeom>
-          <a:solidFill>
-            <a:srgbClr val="DDECF4"/>
-          </a:solidFill>
-          <a:ln>
-            <a:noFill/>
-          </a:ln>
-          <a:effectLst/>
-        </p:spPr>
-        <p:style>
-          <a:lnRef idx="1">
-            <a:schemeClr val="accent1"/>
-          </a:lnRef>
-          <a:fillRef idx="3">
-            <a:schemeClr val="accent1"/>
-          </a:fillRef>
-          <a:effectRef idx="2">
-            <a:schemeClr val="accent1"/>
-          </a:effectRef>
-          <a:fontRef idx="minor">
-            <a:schemeClr val="lt1"/>
-          </a:fontRef>
-        </p:style>
-        <p:txBody>
-          <a:bodyPr rtlCol="0" anchor="ctr"/>
-          <a:lstStyle/>
-          <a:p>
-            <a:pPr algn="ctr"/>
-          </a:p>
-        </p:txBody>
-      </p:sp>
-      <p:sp>
-        <p:nvSpPr>
-          <p:cNvPr id="10" name="Oval 9"/>
-          <p:cNvSpPr/>
-          <p:nvPr/>
-        </p:nvSpPr>
-        <p:spPr>
-          <a:xfrm>
-            <a:off x="621792" y="4693920"/>
-            <a:ext cx="310896" cy="310896"/>
-          </a:xfrm>
-          <a:prstGeom prst="ellipse">
-            <a:avLst/>
-          </a:prstGeom>
-          <a:solidFill>
-            <a:srgbClr val="009CD6"/>
-          </a:solidFill>
-          <a:ln>
-            <a:noFill/>
-          </a:ln>
-          <a:effectLst/>
-        </p:spPr>
-        <p:style>
-          <a:lnRef idx="1">
-            <a:schemeClr val="accent1"/>
-          </a:lnRef>
-          <a:fillRef idx="3">
-            <a:schemeClr val="accent1"/>
-          </a:fillRef>
-          <a:effectRef idx="2">
-            <a:schemeClr val="accent1"/>
-          </a:effectRef>
-          <a:fontRef idx="minor">
-            <a:schemeClr val="lt1"/>
-          </a:fontRef>
-        </p:style>
-        <p:txBody>
-          <a:bodyPr rtlCol="0" anchor="ctr" lIns="0" rIns="0" tIns="0" bIns="0" wrap="square"/>
-          <a:lstStyle/>
-          <a:p>
-            <a:pPr algn="ctr"/>
-            <a:r>
-              <a:rPr sz="1300" b="1" i="0">
-                <a:solidFill>
-                  <a:srgbClr val="FFFFFF"/>
-                </a:solidFill>
-                <a:latin typeface="Arial"/>
-              </a:rPr>
-              <a:t>3</a:t>
-            </a:r>
-          </a:p>
-        </p:txBody>
-      </p:sp>
-      <p:sp>
-        <p:nvSpPr>
-          <p:cNvPr id="11" name="TextBox 10"/>
-          <p:cNvSpPr txBox="1"/>
-          <p:nvPr/>
-        </p:nvSpPr>
-        <p:spPr>
-          <a:xfrm>
-            <a:off x="1115568" y="4648200"/>
-            <a:ext cx="10527487" cy="1569720"/>
-          </a:xfrm>
-          <a:prstGeom prst="rect">
-            <a:avLst/>
-          </a:prstGeom>
-          <a:noFill/>
-        </p:spPr>
-        <p:txBody>
-          <a:bodyPr wrap="square">
-            <a:spAutoFit/>
-          </a:bodyPr>
-          <a:lstStyle/>
+              <a:t>Half the drafts contradict each other.</a:t>
+            </a:r>
+          </a:p>
           <a:p>
             <a:pPr>
               <a:spcAft>
-                <a:spcPts val="300"/>
+                <a:spcPts val="800"/>
               </a:spcAft>
             </a:pPr>
             <a:r>
-              <a:rPr sz="1900" b="1" i="0">
-                <a:solidFill>
-                  <a:srgbClr val="1A1A1A"/>
-                </a:solidFill>
-                <a:latin typeface="Arial"/>
-              </a:rPr>
-              <a:t>Add at most a few country-specific principles</a:t>
-            </a:r>
-          </a:p>
-          <a:p>
-            <a:pPr>
-              <a:spcAft>
-                <a:spcPts val="300"/>
-              </a:spcAft>
-            </a:pPr>
-            <a:r>
-              <a:rPr sz="1550" b="0" i="0">
+              <a:rPr sz="1700" b="0" i="0">
                 <a:solidFill>
                   <a:srgbClr val="595959"/>
                 </a:solidFill>
                 <a:latin typeface="Arial"/>
               </a:rPr>
-              <a:t>Only where PAERA genuinely does not cover something — deliberately, with a reason written down.</a:t>
-            </a:r>
-          </a:p>
-        </p:txBody>
-      </p:sp>
-      <p:sp>
-        <p:nvSpPr>
-          <p:cNvPr id="12" name="TextBox 11"/>
+              <a:t>There is a faster way — the principles already exist.</a:t>
+            </a:r>
+          </a:p>
+        </p:txBody>
+      </p:sp>
+      <p:sp>
+        <p:nvSpPr>
+          <p:cNvPr id="5" name="TextBox 4"/>
           <p:cNvSpPr txBox="1"/>
           <p:nvPr/>
         </p:nvSpPr>
@@ -14838,6 +11969,41 @@
                 <a:latin typeface="Arial"/>
               </a:rPr>
               <a:t>2.3 · Adopt your principles, don't draft them</a:t>
+            </a:r>
+          </a:p>
+        </p:txBody>
+      </p:sp>
+      <p:sp>
+        <p:nvSpPr>
+          <p:cNvPr id="6" name="TextBox 5"/>
+          <p:cNvSpPr txBox="1"/>
+          <p:nvPr/>
+        </p:nvSpPr>
+        <p:spPr>
+          <a:xfrm>
+            <a:off x="10058400" y="6473952"/>
+            <a:ext cx="1673352" cy="292608"/>
+          </a:xfrm>
+          <a:prstGeom prst="rect">
+            <a:avLst/>
+          </a:prstGeom>
+          <a:noFill/>
+        </p:spPr>
+        <p:txBody>
+          <a:bodyPr wrap="square">
+            <a:spAutoFit/>
+          </a:bodyPr>
+          <a:lstStyle/>
+          <a:p>
+            <a:pPr algn="r"/>
+            <a:r>
+              <a:rPr sz="900" b="0" i="0">
+                <a:solidFill>
+                  <a:srgbClr val="595959"/>
+                </a:solidFill>
+                <a:latin typeface="Arial"/>
+              </a:rPr>
+              <a:t>www.itu.int</a:t>
             </a:r>
           </a:p>
         </p:txBody>
@@ -14933,7 +12099,7 @@
                 </a:solidFill>
                 <a:latin typeface="Arial"/>
               </a:rPr>
-              <a:t>Make a principle bite — statement, reason, implication</a:t>
+              <a:t>A principle is a short rule that settles a design argument before it starts</a:t>
             </a:r>
           </a:p>
         </p:txBody>
@@ -14946,8 +12112,8 @@
         </p:nvSpPr>
         <p:spPr>
           <a:xfrm>
-            <a:off x="658368" y="1600200"/>
-            <a:ext cx="10881360" cy="1234440"/>
+            <a:off x="658368" y="1645920"/>
+            <a:ext cx="3493008" cy="1737360"/>
           </a:xfrm>
           <a:prstGeom prst="roundRect">
             <a:avLst>
@@ -14992,8 +12158,8 @@
         </p:nvSpPr>
         <p:spPr>
           <a:xfrm>
-            <a:off x="868680" y="1737360"/>
-            <a:ext cx="2194560" cy="365760"/>
+            <a:off x="859536" y="1792224"/>
+            <a:ext cx="3090672" cy="1463039"/>
           </a:xfrm>
           <a:prstGeom prst="rect">
             <a:avLst/>
@@ -15006,62 +12172,33 @@
           </a:bodyPr>
           <a:lstStyle/>
           <a:p>
-            <a:r>
-              <a:rPr sz="1100" b="1" i="0">
+            <a:pPr>
+              <a:spcAft>
+                <a:spcPts val="700"/>
+              </a:spcAft>
+            </a:pPr>
+            <a:r>
+              <a:rPr sz="1800" b="1" i="0">
                 <a:solidFill>
                   <a:srgbClr val="006E96"/>
                 </a:solidFill>
                 <a:latin typeface="Arial"/>
               </a:rPr>
-              <a:t>STATEMENT</a:t>
-            </a:r>
-          </a:p>
-        </p:txBody>
-      </p:sp>
-      <p:sp>
-        <p:nvSpPr>
-          <p:cNvPr id="6" name="TextBox 5"/>
-          <p:cNvSpPr txBox="1"/>
-          <p:nvPr/>
-        </p:nvSpPr>
-        <p:spPr>
-          <a:xfrm>
-            <a:off x="3108960" y="1709928"/>
-            <a:ext cx="8183879" cy="1005840"/>
-          </a:xfrm>
-          <a:prstGeom prst="rect">
-            <a:avLst/>
-          </a:prstGeom>
-          <a:noFill/>
-        </p:spPr>
-        <p:txBody>
-          <a:bodyPr wrap="square">
-            <a:spAutoFit/>
-          </a:bodyPr>
-          <a:lstStyle/>
-          <a:p>
-            <a:r>
-              <a:rPr sz="1800" b="0" i="0">
-                <a:solidFill>
-                  <a:srgbClr val="1A1A1A"/>
-                </a:solidFill>
-                <a:latin typeface="Arial"/>
-              </a:rPr>
-              <a:t>We consume an existing building block before we build a new one.</a:t>
-            </a:r>
-          </a:p>
-        </p:txBody>
-      </p:sp>
-      <p:sp>
-        <p:nvSpPr>
-          <p:cNvPr id="7" name="Rounded Rectangle 6"/>
+              <a:t>Reuse before you buy; buy before you build.</a:t>
+            </a:r>
+          </a:p>
+        </p:txBody>
+      </p:sp>
+      <p:sp>
+        <p:nvSpPr>
+          <p:cNvPr id="6" name="Rounded Rectangle 5"/>
           <p:cNvSpPr/>
           <p:nvPr/>
         </p:nvSpPr>
         <p:spPr>
           <a:xfrm>
-            <a:off x="658368" y="2990088"/>
-            <a:ext cx="10881360" cy="1234440"/>
+            <a:off x="4352544" y="1645920"/>
+            <a:ext cx="3493008" cy="1737360"/>
           </a:xfrm>
           <a:prstGeom prst="roundRect">
             <a:avLst>
@@ -15100,14 +12237,14 @@
       </p:sp>
       <p:sp>
         <p:nvSpPr>
-          <p:cNvPr id="8" name="TextBox 7"/>
+          <p:cNvPr id="7" name="TextBox 6"/>
           <p:cNvSpPr txBox="1"/>
           <p:nvPr/>
         </p:nvSpPr>
         <p:spPr>
           <a:xfrm>
-            <a:off x="868680" y="3127248"/>
-            <a:ext cx="2194560" cy="365760"/>
+            <a:off x="4553712" y="1792224"/>
+            <a:ext cx="3090672" cy="1463039"/>
           </a:xfrm>
           <a:prstGeom prst="rect">
             <a:avLst/>
@@ -15120,62 +12257,33 @@
           </a:bodyPr>
           <a:lstStyle/>
           <a:p>
-            <a:r>
-              <a:rPr sz="1100" b="1" i="0">
+            <a:pPr>
+              <a:spcAft>
+                <a:spcPts val="700"/>
+              </a:spcAft>
+            </a:pPr>
+            <a:r>
+              <a:rPr sz="1800" b="1" i="0">
                 <a:solidFill>
                   <a:srgbClr val="006E96"/>
                 </a:solidFill>
                 <a:latin typeface="Arial"/>
               </a:rPr>
-              <a:t>REASON</a:t>
-            </a:r>
-          </a:p>
-        </p:txBody>
-      </p:sp>
-      <p:sp>
-        <p:nvSpPr>
-          <p:cNvPr id="9" name="TextBox 8"/>
-          <p:cNvSpPr txBox="1"/>
-          <p:nvPr/>
-        </p:nvSpPr>
-        <p:spPr>
-          <a:xfrm>
-            <a:off x="3108960" y="3099816"/>
-            <a:ext cx="8183879" cy="1005840"/>
-          </a:xfrm>
-          <a:prstGeom prst="rect">
-            <a:avLst/>
-          </a:prstGeom>
-          <a:noFill/>
-        </p:spPr>
-        <p:txBody>
-          <a:bodyPr wrap="square">
-            <a:spAutoFit/>
-          </a:bodyPr>
-          <a:lstStyle/>
-          <a:p>
-            <a:r>
-              <a:rPr sz="1800" b="0" i="0">
-                <a:solidFill>
-                  <a:srgbClr val="1A1A1A"/>
-                </a:solidFill>
-                <a:latin typeface="Arial"/>
-              </a:rPr>
-              <a:t>The country pays once, not many times.</a:t>
-            </a:r>
-          </a:p>
-        </p:txBody>
-      </p:sp>
-      <p:sp>
-        <p:nvSpPr>
-          <p:cNvPr id="10" name="Rounded Rectangle 9"/>
+              <a:t>Data has one owner.</a:t>
+            </a:r>
+          </a:p>
+        </p:txBody>
+      </p:sp>
+      <p:sp>
+        <p:nvSpPr>
+          <p:cNvPr id="8" name="Rounded Rectangle 7"/>
           <p:cNvSpPr/>
           <p:nvPr/>
         </p:nvSpPr>
         <p:spPr>
           <a:xfrm>
-            <a:off x="658368" y="4379976"/>
-            <a:ext cx="10881360" cy="1463040"/>
+            <a:off x="8046720" y="1645920"/>
+            <a:ext cx="3493008" cy="1737360"/>
           </a:xfrm>
           <a:prstGeom prst="roundRect">
             <a:avLst>
@@ -15183,7 +12291,7 @@
             </a:avLst>
           </a:prstGeom>
           <a:solidFill>
-            <a:srgbClr val="009CD6"/>
+            <a:srgbClr val="E5F5FB"/>
           </a:solidFill>
           <a:ln>
             <a:noFill/>
@@ -15214,14 +12322,14 @@
       </p:sp>
       <p:sp>
         <p:nvSpPr>
-          <p:cNvPr id="11" name="TextBox 10"/>
+          <p:cNvPr id="9" name="TextBox 8"/>
           <p:cNvSpPr txBox="1"/>
           <p:nvPr/>
         </p:nvSpPr>
         <p:spPr>
           <a:xfrm>
-            <a:off x="868680" y="4517136"/>
-            <a:ext cx="2194560" cy="365760"/>
+            <a:off x="8247888" y="1792224"/>
+            <a:ext cx="3090672" cy="1463039"/>
           </a:xfrm>
           <a:prstGeom prst="rect">
             <a:avLst/>
@@ -15234,28 +12342,33 @@
           </a:bodyPr>
           <a:lstStyle/>
           <a:p>
-            <a:r>
-              <a:rPr sz="1100" b="1" i="0">
+            <a:pPr>
+              <a:spcAft>
+                <a:spcPts val="700"/>
+              </a:spcAft>
+            </a:pPr>
+            <a:r>
+              <a:rPr sz="1800" b="1" i="0">
                 <a:solidFill>
-                  <a:srgbClr val="FFFFFF"/>
+                  <a:srgbClr val="006E96"/>
                 </a:solidFill>
                 <a:latin typeface="Arial"/>
               </a:rPr>
-              <a:t>IMPLICATION</a:t>
-            </a:r>
-          </a:p>
-        </p:txBody>
-      </p:sp>
-      <p:sp>
-        <p:nvSpPr>
-          <p:cNvPr id="12" name="TextBox 11"/>
+              <a:t>Ask the citizen only once.</a:t>
+            </a:r>
+          </a:p>
+        </p:txBody>
+      </p:sp>
+      <p:sp>
+        <p:nvSpPr>
+          <p:cNvPr id="10" name="TextBox 9"/>
           <p:cNvSpPr txBox="1"/>
           <p:nvPr/>
         </p:nvSpPr>
         <p:spPr>
           <a:xfrm>
-            <a:off x="3108960" y="4489704"/>
-            <a:ext cx="8183879" cy="1234440"/>
+            <a:off x="658368" y="3749039"/>
+            <a:ext cx="10881360" cy="1463040"/>
           </a:xfrm>
           <a:prstGeom prst="rect">
             <a:avLst/>
@@ -15268,28 +12381,79 @@
           </a:bodyPr>
           <a:lstStyle/>
           <a:p>
-            <a:r>
-              <a:rPr sz="1900" b="1" i="0">
+            <a:pPr>
+              <a:spcAft>
+                <a:spcPts val="1000"/>
+              </a:spcAft>
+            </a:pPr>
+            <a:r>
+              <a:rPr sz="2100" b="0" i="0">
                 <a:solidFill>
-                  <a:srgbClr val="FFFFFF"/>
+                  <a:srgbClr val="1A1A1A"/>
                 </a:solidFill>
                 <a:latin typeface="Arial"/>
               </a:rPr>
-              <a:t>Any project proposing to build its own identity must first show why the shared one cannot be used — and the EA Board can say no.</a:t>
-            </a:r>
-          </a:p>
-        </p:txBody>
-      </p:sp>
-      <p:sp>
-        <p:nvSpPr>
-          <p:cNvPr id="13" name="TextBox 12"/>
+              <a:t>A decision you make once, so your team does not re-argue it on every project.</a:t>
+            </a:r>
+          </a:p>
+        </p:txBody>
+      </p:sp>
+      <p:sp>
+        <p:nvSpPr>
+          <p:cNvPr id="11" name="Rounded Rectangle 10"/>
+          <p:cNvSpPr/>
+          <p:nvPr/>
+        </p:nvSpPr>
+        <p:spPr>
+          <a:xfrm>
+            <a:off x="658368" y="4892040"/>
+            <a:ext cx="10881360" cy="1005840"/>
+          </a:xfrm>
+          <a:prstGeom prst="roundRect">
+            <a:avLst>
+              <a:gd name="adj" fmla="val 4500"/>
+            </a:avLst>
+          </a:prstGeom>
+          <a:solidFill>
+            <a:srgbClr val="F2F2F2"/>
+          </a:solidFill>
+          <a:ln>
+            <a:noFill/>
+          </a:ln>
+          <a:effectLst/>
+        </p:spPr>
+        <p:style>
+          <a:lnRef idx="1">
+            <a:schemeClr val="accent1"/>
+          </a:lnRef>
+          <a:fillRef idx="3">
+            <a:schemeClr val="accent1"/>
+          </a:fillRef>
+          <a:effectRef idx="2">
+            <a:schemeClr val="accent1"/>
+          </a:effectRef>
+          <a:fontRef idx="minor">
+            <a:schemeClr val="lt1"/>
+          </a:fontRef>
+        </p:style>
+        <p:txBody>
+          <a:bodyPr rtlCol="0" anchor="ctr"/>
+          <a:lstStyle/>
+          <a:p>
+            <a:pPr algn="ctr"/>
+          </a:p>
+        </p:txBody>
+      </p:sp>
+      <p:sp>
+        <p:nvSpPr>
+          <p:cNvPr id="12" name="TextBox 11"/>
           <p:cNvSpPr txBox="1"/>
           <p:nvPr/>
         </p:nvSpPr>
         <p:spPr>
           <a:xfrm>
-            <a:off x="658368" y="5897880"/>
-            <a:ext cx="10881360" cy="365760"/>
+            <a:off x="859536" y="5038344"/>
+            <a:ext cx="10479024" cy="731520"/>
           </a:xfrm>
           <a:prstGeom prst="rect">
             <a:avLst/>
@@ -15302,21 +12466,26 @@
           </a:bodyPr>
           <a:lstStyle/>
           <a:p>
-            <a:r>
-              <a:rPr sz="1450" b="0" i="0">
+            <a:pPr>
+              <a:spcAft>
+                <a:spcPts val="700"/>
+              </a:spcAft>
+            </a:pPr>
+            <a:r>
+              <a:rPr sz="2000" b="1" i="0">
                 <a:solidFill>
-                  <a:srgbClr val="595959"/>
+                  <a:srgbClr val="1A1A1A"/>
                 </a:solidFill>
                 <a:latin typeface="Arial"/>
               </a:rPr>
-              <a:t>A principle with a written implication can settle an argument. A principle without one cannot.</a:t>
-            </a:r>
-          </a:p>
-        </p:txBody>
-      </p:sp>
-      <p:sp>
-        <p:nvSpPr>
-          <p:cNvPr id="14" name="TextBox 13"/>
+              <a:t>If a principle never changes a decision, it is not a principle — it is a slogan.</a:t>
+            </a:r>
+          </a:p>
+        </p:txBody>
+      </p:sp>
+      <p:sp>
+        <p:nvSpPr>
+          <p:cNvPr id="13" name="TextBox 12"/>
           <p:cNvSpPr txBox="1"/>
           <p:nvPr/>
         </p:nvSpPr>
@@ -15368,6 +12537,2406 @@
       <p:grpSpPr/>
       <p:sp>
         <p:nvSpPr>
+          <p:cNvPr id="2" name="Rectangle 1"/>
+          <p:cNvSpPr/>
+          <p:nvPr/>
+        </p:nvSpPr>
+        <p:spPr>
+          <a:xfrm>
+            <a:off x="457200" y="384048"/>
+            <a:ext cx="45720" cy="256032"/>
+          </a:xfrm>
+          <a:prstGeom prst="rect">
+            <a:avLst/>
+          </a:prstGeom>
+          <a:solidFill>
+            <a:srgbClr val="009CD6"/>
+          </a:solidFill>
+          <a:ln>
+            <a:noFill/>
+          </a:ln>
+          <a:effectLst/>
+        </p:spPr>
+        <p:style>
+          <a:lnRef idx="1">
+            <a:schemeClr val="accent1"/>
+          </a:lnRef>
+          <a:fillRef idx="3">
+            <a:schemeClr val="accent1"/>
+          </a:fillRef>
+          <a:effectRef idx="2">
+            <a:schemeClr val="accent1"/>
+          </a:effectRef>
+          <a:fontRef idx="minor">
+            <a:schemeClr val="lt1"/>
+          </a:fontRef>
+        </p:style>
+        <p:txBody>
+          <a:bodyPr rtlCol="0" anchor="ctr"/>
+          <a:lstStyle/>
+          <a:p>
+            <a:pPr algn="ctr"/>
+          </a:p>
+        </p:txBody>
+      </p:sp>
+      <p:sp>
+        <p:nvSpPr>
+          <p:cNvPr id="3" name="TextBox 2"/>
+          <p:cNvSpPr txBox="1"/>
+          <p:nvPr/>
+        </p:nvSpPr>
+        <p:spPr>
+          <a:xfrm>
+            <a:off x="621792" y="274320"/>
+            <a:ext cx="11247120" cy="914400"/>
+          </a:xfrm>
+          <a:prstGeom prst="rect">
+            <a:avLst/>
+          </a:prstGeom>
+          <a:noFill/>
+        </p:spPr>
+        <p:txBody>
+          <a:bodyPr wrap="square">
+            <a:spAutoFit/>
+          </a:bodyPr>
+          <a:lstStyle/>
+          <a:p>
+            <a:r>
+              <a:rPr sz="2800" b="1" i="0">
+                <a:solidFill>
+                  <a:srgbClr val="1A1A1A"/>
+                </a:solidFill>
+                <a:latin typeface="Arial"/>
+              </a:rPr>
+              <a:t>PAERA gives you ten — already debated across many countries</a:t>
+            </a:r>
+          </a:p>
+        </p:txBody>
+      </p:sp>
+      <p:sp>
+        <p:nvSpPr>
+          <p:cNvPr id="4" name="Oval 3"/>
+          <p:cNvSpPr/>
+          <p:nvPr/>
+        </p:nvSpPr>
+        <p:spPr>
+          <a:xfrm>
+            <a:off x="658368" y="1536192"/>
+            <a:ext cx="310896" cy="310896"/>
+          </a:xfrm>
+          <a:prstGeom prst="ellipse">
+            <a:avLst/>
+          </a:prstGeom>
+          <a:solidFill>
+            <a:srgbClr val="009CD6"/>
+          </a:solidFill>
+          <a:ln>
+            <a:noFill/>
+          </a:ln>
+          <a:effectLst/>
+        </p:spPr>
+        <p:style>
+          <a:lnRef idx="1">
+            <a:schemeClr val="accent1"/>
+          </a:lnRef>
+          <a:fillRef idx="3">
+            <a:schemeClr val="accent1"/>
+          </a:fillRef>
+          <a:effectRef idx="2">
+            <a:schemeClr val="accent1"/>
+          </a:effectRef>
+          <a:fontRef idx="minor">
+            <a:schemeClr val="lt1"/>
+          </a:fontRef>
+        </p:style>
+        <p:txBody>
+          <a:bodyPr rtlCol="0" anchor="ctr" lIns="0" rIns="0" tIns="0" bIns="0" wrap="square"/>
+          <a:lstStyle/>
+          <a:p>
+            <a:pPr algn="ctr"/>
+            <a:r>
+              <a:rPr sz="1300" b="1" i="0">
+                <a:solidFill>
+                  <a:srgbClr val="FFFFFF"/>
+                </a:solidFill>
+                <a:latin typeface="Arial"/>
+              </a:rPr>
+              <a:t>1</a:t>
+            </a:r>
+          </a:p>
+        </p:txBody>
+      </p:sp>
+      <p:sp>
+        <p:nvSpPr>
+          <p:cNvPr id="5" name="TextBox 4"/>
+          <p:cNvSpPr txBox="1"/>
+          <p:nvPr/>
+        </p:nvSpPr>
+        <p:spPr>
+          <a:xfrm>
+            <a:off x="1115568" y="1481328"/>
+            <a:ext cx="4937760" cy="822960"/>
+          </a:xfrm>
+          <a:prstGeom prst="rect">
+            <a:avLst/>
+          </a:prstGeom>
+          <a:noFill/>
+        </p:spPr>
+        <p:txBody>
+          <a:bodyPr wrap="square">
+            <a:spAutoFit/>
+          </a:bodyPr>
+          <a:lstStyle/>
+          <a:p>
+            <a:r>
+              <a:rPr sz="1700" b="1" i="0">
+                <a:solidFill>
+                  <a:srgbClr val="1A1A1A"/>
+                </a:solidFill>
+                <a:latin typeface="Arial"/>
+              </a:rPr>
+              <a:t>Rule of law</a:t>
+            </a:r>
+          </a:p>
+        </p:txBody>
+      </p:sp>
+      <p:sp>
+        <p:nvSpPr>
+          <p:cNvPr id="6" name="Rectangle 5"/>
+          <p:cNvSpPr/>
+          <p:nvPr/>
+        </p:nvSpPr>
+        <p:spPr>
+          <a:xfrm>
+            <a:off x="658368" y="2322576"/>
+            <a:ext cx="5257800" cy="12700"/>
+          </a:xfrm>
+          <a:prstGeom prst="rect">
+            <a:avLst/>
+          </a:prstGeom>
+          <a:solidFill>
+            <a:srgbClr val="DDECF4"/>
+          </a:solidFill>
+          <a:ln>
+            <a:noFill/>
+          </a:ln>
+          <a:effectLst/>
+        </p:spPr>
+        <p:style>
+          <a:lnRef idx="1">
+            <a:schemeClr val="accent1"/>
+          </a:lnRef>
+          <a:fillRef idx="3">
+            <a:schemeClr val="accent1"/>
+          </a:fillRef>
+          <a:effectRef idx="2">
+            <a:schemeClr val="accent1"/>
+          </a:effectRef>
+          <a:fontRef idx="minor">
+            <a:schemeClr val="lt1"/>
+          </a:fontRef>
+        </p:style>
+        <p:txBody>
+          <a:bodyPr rtlCol="0" anchor="ctr"/>
+          <a:lstStyle/>
+          <a:p>
+            <a:pPr algn="ctr"/>
+          </a:p>
+        </p:txBody>
+      </p:sp>
+      <p:sp>
+        <p:nvSpPr>
+          <p:cNvPr id="7" name="Oval 6"/>
+          <p:cNvSpPr/>
+          <p:nvPr/>
+        </p:nvSpPr>
+        <p:spPr>
+          <a:xfrm>
+            <a:off x="658368" y="2468880"/>
+            <a:ext cx="310896" cy="310896"/>
+          </a:xfrm>
+          <a:prstGeom prst="ellipse">
+            <a:avLst/>
+          </a:prstGeom>
+          <a:solidFill>
+            <a:srgbClr val="009CD6"/>
+          </a:solidFill>
+          <a:ln>
+            <a:noFill/>
+          </a:ln>
+          <a:effectLst/>
+        </p:spPr>
+        <p:style>
+          <a:lnRef idx="1">
+            <a:schemeClr val="accent1"/>
+          </a:lnRef>
+          <a:fillRef idx="3">
+            <a:schemeClr val="accent1"/>
+          </a:fillRef>
+          <a:effectRef idx="2">
+            <a:schemeClr val="accent1"/>
+          </a:effectRef>
+          <a:fontRef idx="minor">
+            <a:schemeClr val="lt1"/>
+          </a:fontRef>
+        </p:style>
+        <p:txBody>
+          <a:bodyPr rtlCol="0" anchor="ctr" lIns="0" rIns="0" tIns="0" bIns="0" wrap="square"/>
+          <a:lstStyle/>
+          <a:p>
+            <a:pPr algn="ctr"/>
+            <a:r>
+              <a:rPr sz="1300" b="1" i="0">
+                <a:solidFill>
+                  <a:srgbClr val="FFFFFF"/>
+                </a:solidFill>
+                <a:latin typeface="Arial"/>
+              </a:rPr>
+              <a:t>2</a:t>
+            </a:r>
+          </a:p>
+        </p:txBody>
+      </p:sp>
+      <p:sp>
+        <p:nvSpPr>
+          <p:cNvPr id="8" name="TextBox 7"/>
+          <p:cNvSpPr txBox="1"/>
+          <p:nvPr/>
+        </p:nvSpPr>
+        <p:spPr>
+          <a:xfrm>
+            <a:off x="1115568" y="2414016"/>
+            <a:ext cx="4937760" cy="822960"/>
+          </a:xfrm>
+          <a:prstGeom prst="rect">
+            <a:avLst/>
+          </a:prstGeom>
+          <a:noFill/>
+        </p:spPr>
+        <p:txBody>
+          <a:bodyPr wrap="square">
+            <a:spAutoFit/>
+          </a:bodyPr>
+          <a:lstStyle/>
+          <a:p>
+            <a:r>
+              <a:rPr sz="1700" b="1" i="0">
+                <a:solidFill>
+                  <a:srgbClr val="1A1A1A"/>
+                </a:solidFill>
+                <a:latin typeface="Arial"/>
+              </a:rPr>
+              <a:t>Intrinsic security and privacy</a:t>
+            </a:r>
+          </a:p>
+        </p:txBody>
+      </p:sp>
+      <p:sp>
+        <p:nvSpPr>
+          <p:cNvPr id="9" name="Rectangle 8"/>
+          <p:cNvSpPr/>
+          <p:nvPr/>
+        </p:nvSpPr>
+        <p:spPr>
+          <a:xfrm>
+            <a:off x="658368" y="3255264"/>
+            <a:ext cx="5257800" cy="12700"/>
+          </a:xfrm>
+          <a:prstGeom prst="rect">
+            <a:avLst/>
+          </a:prstGeom>
+          <a:solidFill>
+            <a:srgbClr val="DDECF4"/>
+          </a:solidFill>
+          <a:ln>
+            <a:noFill/>
+          </a:ln>
+          <a:effectLst/>
+        </p:spPr>
+        <p:style>
+          <a:lnRef idx="1">
+            <a:schemeClr val="accent1"/>
+          </a:lnRef>
+          <a:fillRef idx="3">
+            <a:schemeClr val="accent1"/>
+          </a:fillRef>
+          <a:effectRef idx="2">
+            <a:schemeClr val="accent1"/>
+          </a:effectRef>
+          <a:fontRef idx="minor">
+            <a:schemeClr val="lt1"/>
+          </a:fontRef>
+        </p:style>
+        <p:txBody>
+          <a:bodyPr rtlCol="0" anchor="ctr"/>
+          <a:lstStyle/>
+          <a:p>
+            <a:pPr algn="ctr"/>
+          </a:p>
+        </p:txBody>
+      </p:sp>
+      <p:sp>
+        <p:nvSpPr>
+          <p:cNvPr id="10" name="Oval 9"/>
+          <p:cNvSpPr/>
+          <p:nvPr/>
+        </p:nvSpPr>
+        <p:spPr>
+          <a:xfrm>
+            <a:off x="658368" y="3401568"/>
+            <a:ext cx="310896" cy="310896"/>
+          </a:xfrm>
+          <a:prstGeom prst="ellipse">
+            <a:avLst/>
+          </a:prstGeom>
+          <a:solidFill>
+            <a:srgbClr val="009CD6"/>
+          </a:solidFill>
+          <a:ln>
+            <a:noFill/>
+          </a:ln>
+          <a:effectLst/>
+        </p:spPr>
+        <p:style>
+          <a:lnRef idx="1">
+            <a:schemeClr val="accent1"/>
+          </a:lnRef>
+          <a:fillRef idx="3">
+            <a:schemeClr val="accent1"/>
+          </a:fillRef>
+          <a:effectRef idx="2">
+            <a:schemeClr val="accent1"/>
+          </a:effectRef>
+          <a:fontRef idx="minor">
+            <a:schemeClr val="lt1"/>
+          </a:fontRef>
+        </p:style>
+        <p:txBody>
+          <a:bodyPr rtlCol="0" anchor="ctr" lIns="0" rIns="0" tIns="0" bIns="0" wrap="square"/>
+          <a:lstStyle/>
+          <a:p>
+            <a:pPr algn="ctr"/>
+            <a:r>
+              <a:rPr sz="1300" b="1" i="0">
+                <a:solidFill>
+                  <a:srgbClr val="FFFFFF"/>
+                </a:solidFill>
+                <a:latin typeface="Arial"/>
+              </a:rPr>
+              <a:t>3</a:t>
+            </a:r>
+          </a:p>
+        </p:txBody>
+      </p:sp>
+      <p:sp>
+        <p:nvSpPr>
+          <p:cNvPr id="11" name="TextBox 10"/>
+          <p:cNvSpPr txBox="1"/>
+          <p:nvPr/>
+        </p:nvSpPr>
+        <p:spPr>
+          <a:xfrm>
+            <a:off x="1115568" y="3346704"/>
+            <a:ext cx="4937760" cy="822960"/>
+          </a:xfrm>
+          <a:prstGeom prst="rect">
+            <a:avLst/>
+          </a:prstGeom>
+          <a:noFill/>
+        </p:spPr>
+        <p:txBody>
+          <a:bodyPr wrap="square">
+            <a:spAutoFit/>
+          </a:bodyPr>
+          <a:lstStyle/>
+          <a:p>
+            <a:r>
+              <a:rPr sz="1700" b="1" i="0">
+                <a:solidFill>
+                  <a:srgbClr val="1A1A1A"/>
+                </a:solidFill>
+                <a:latin typeface="Arial"/>
+              </a:rPr>
+              <a:t>Openness and transparency</a:t>
+            </a:r>
+          </a:p>
+        </p:txBody>
+      </p:sp>
+      <p:sp>
+        <p:nvSpPr>
+          <p:cNvPr id="12" name="Rectangle 11"/>
+          <p:cNvSpPr/>
+          <p:nvPr/>
+        </p:nvSpPr>
+        <p:spPr>
+          <a:xfrm>
+            <a:off x="658368" y="4187952"/>
+            <a:ext cx="5257800" cy="12700"/>
+          </a:xfrm>
+          <a:prstGeom prst="rect">
+            <a:avLst/>
+          </a:prstGeom>
+          <a:solidFill>
+            <a:srgbClr val="DDECF4"/>
+          </a:solidFill>
+          <a:ln>
+            <a:noFill/>
+          </a:ln>
+          <a:effectLst/>
+        </p:spPr>
+        <p:style>
+          <a:lnRef idx="1">
+            <a:schemeClr val="accent1"/>
+          </a:lnRef>
+          <a:fillRef idx="3">
+            <a:schemeClr val="accent1"/>
+          </a:fillRef>
+          <a:effectRef idx="2">
+            <a:schemeClr val="accent1"/>
+          </a:effectRef>
+          <a:fontRef idx="minor">
+            <a:schemeClr val="lt1"/>
+          </a:fontRef>
+        </p:style>
+        <p:txBody>
+          <a:bodyPr rtlCol="0" anchor="ctr"/>
+          <a:lstStyle/>
+          <a:p>
+            <a:pPr algn="ctr"/>
+          </a:p>
+        </p:txBody>
+      </p:sp>
+      <p:sp>
+        <p:nvSpPr>
+          <p:cNvPr id="13" name="Oval 12"/>
+          <p:cNvSpPr/>
+          <p:nvPr/>
+        </p:nvSpPr>
+        <p:spPr>
+          <a:xfrm>
+            <a:off x="658368" y="4334255"/>
+            <a:ext cx="310896" cy="310896"/>
+          </a:xfrm>
+          <a:prstGeom prst="ellipse">
+            <a:avLst/>
+          </a:prstGeom>
+          <a:solidFill>
+            <a:srgbClr val="009CD6"/>
+          </a:solidFill>
+          <a:ln>
+            <a:noFill/>
+          </a:ln>
+          <a:effectLst/>
+        </p:spPr>
+        <p:style>
+          <a:lnRef idx="1">
+            <a:schemeClr val="accent1"/>
+          </a:lnRef>
+          <a:fillRef idx="3">
+            <a:schemeClr val="accent1"/>
+          </a:fillRef>
+          <a:effectRef idx="2">
+            <a:schemeClr val="accent1"/>
+          </a:effectRef>
+          <a:fontRef idx="minor">
+            <a:schemeClr val="lt1"/>
+          </a:fontRef>
+        </p:style>
+        <p:txBody>
+          <a:bodyPr rtlCol="0" anchor="ctr" lIns="0" rIns="0" tIns="0" bIns="0" wrap="square"/>
+          <a:lstStyle/>
+          <a:p>
+            <a:pPr algn="ctr"/>
+            <a:r>
+              <a:rPr sz="1300" b="1" i="0">
+                <a:solidFill>
+                  <a:srgbClr val="FFFFFF"/>
+                </a:solidFill>
+                <a:latin typeface="Arial"/>
+              </a:rPr>
+              <a:t>4</a:t>
+            </a:r>
+          </a:p>
+        </p:txBody>
+      </p:sp>
+      <p:sp>
+        <p:nvSpPr>
+          <p:cNvPr id="14" name="TextBox 13"/>
+          <p:cNvSpPr txBox="1"/>
+          <p:nvPr/>
+        </p:nvSpPr>
+        <p:spPr>
+          <a:xfrm>
+            <a:off x="1115568" y="4279392"/>
+            <a:ext cx="4937760" cy="822960"/>
+          </a:xfrm>
+          <a:prstGeom prst="rect">
+            <a:avLst/>
+          </a:prstGeom>
+          <a:noFill/>
+        </p:spPr>
+        <p:txBody>
+          <a:bodyPr wrap="square">
+            <a:spAutoFit/>
+          </a:bodyPr>
+          <a:lstStyle/>
+          <a:p>
+            <a:r>
+              <a:rPr sz="1700" b="1" i="0">
+                <a:solidFill>
+                  <a:srgbClr val="1A1A1A"/>
+                </a:solidFill>
+                <a:latin typeface="Arial"/>
+              </a:rPr>
+              <a:t>Interoperability by default</a:t>
+            </a:r>
+          </a:p>
+        </p:txBody>
+      </p:sp>
+      <p:sp>
+        <p:nvSpPr>
+          <p:cNvPr id="15" name="Rectangle 14"/>
+          <p:cNvSpPr/>
+          <p:nvPr/>
+        </p:nvSpPr>
+        <p:spPr>
+          <a:xfrm>
+            <a:off x="658368" y="5120640"/>
+            <a:ext cx="5257800" cy="12700"/>
+          </a:xfrm>
+          <a:prstGeom prst="rect">
+            <a:avLst/>
+          </a:prstGeom>
+          <a:solidFill>
+            <a:srgbClr val="DDECF4"/>
+          </a:solidFill>
+          <a:ln>
+            <a:noFill/>
+          </a:ln>
+          <a:effectLst/>
+        </p:spPr>
+        <p:style>
+          <a:lnRef idx="1">
+            <a:schemeClr val="accent1"/>
+          </a:lnRef>
+          <a:fillRef idx="3">
+            <a:schemeClr val="accent1"/>
+          </a:fillRef>
+          <a:effectRef idx="2">
+            <a:schemeClr val="accent1"/>
+          </a:effectRef>
+          <a:fontRef idx="minor">
+            <a:schemeClr val="lt1"/>
+          </a:fontRef>
+        </p:style>
+        <p:txBody>
+          <a:bodyPr rtlCol="0" anchor="ctr"/>
+          <a:lstStyle/>
+          <a:p>
+            <a:pPr algn="ctr"/>
+          </a:p>
+        </p:txBody>
+      </p:sp>
+      <p:sp>
+        <p:nvSpPr>
+          <p:cNvPr id="16" name="Oval 15"/>
+          <p:cNvSpPr/>
+          <p:nvPr/>
+        </p:nvSpPr>
+        <p:spPr>
+          <a:xfrm>
+            <a:off x="658368" y="5266944"/>
+            <a:ext cx="310896" cy="310896"/>
+          </a:xfrm>
+          <a:prstGeom prst="ellipse">
+            <a:avLst/>
+          </a:prstGeom>
+          <a:solidFill>
+            <a:srgbClr val="009CD6"/>
+          </a:solidFill>
+          <a:ln>
+            <a:noFill/>
+          </a:ln>
+          <a:effectLst/>
+        </p:spPr>
+        <p:style>
+          <a:lnRef idx="1">
+            <a:schemeClr val="accent1"/>
+          </a:lnRef>
+          <a:fillRef idx="3">
+            <a:schemeClr val="accent1"/>
+          </a:fillRef>
+          <a:effectRef idx="2">
+            <a:schemeClr val="accent1"/>
+          </a:effectRef>
+          <a:fontRef idx="minor">
+            <a:schemeClr val="lt1"/>
+          </a:fontRef>
+        </p:style>
+        <p:txBody>
+          <a:bodyPr rtlCol="0" anchor="ctr" lIns="0" rIns="0" tIns="0" bIns="0" wrap="square"/>
+          <a:lstStyle/>
+          <a:p>
+            <a:pPr algn="ctr"/>
+            <a:r>
+              <a:rPr sz="1300" b="1" i="0">
+                <a:solidFill>
+                  <a:srgbClr val="FFFFFF"/>
+                </a:solidFill>
+                <a:latin typeface="Arial"/>
+              </a:rPr>
+              <a:t>5</a:t>
+            </a:r>
+          </a:p>
+        </p:txBody>
+      </p:sp>
+      <p:sp>
+        <p:nvSpPr>
+          <p:cNvPr id="17" name="TextBox 16"/>
+          <p:cNvSpPr txBox="1"/>
+          <p:nvPr/>
+        </p:nvSpPr>
+        <p:spPr>
+          <a:xfrm>
+            <a:off x="1115568" y="5212080"/>
+            <a:ext cx="4937760" cy="822960"/>
+          </a:xfrm>
+          <a:prstGeom prst="rect">
+            <a:avLst/>
+          </a:prstGeom>
+          <a:noFill/>
+        </p:spPr>
+        <p:txBody>
+          <a:bodyPr wrap="square">
+            <a:spAutoFit/>
+          </a:bodyPr>
+          <a:lstStyle/>
+          <a:p>
+            <a:r>
+              <a:rPr sz="1700" b="1" i="0">
+                <a:solidFill>
+                  <a:srgbClr val="1A1A1A"/>
+                </a:solidFill>
+                <a:latin typeface="Arial"/>
+              </a:rPr>
+              <a:t>Once-only</a:t>
+            </a:r>
+          </a:p>
+        </p:txBody>
+      </p:sp>
+      <p:sp>
+        <p:nvSpPr>
+          <p:cNvPr id="18" name="Oval 17"/>
+          <p:cNvSpPr/>
+          <p:nvPr/>
+        </p:nvSpPr>
+        <p:spPr>
+          <a:xfrm>
+            <a:off x="6281928" y="1536192"/>
+            <a:ext cx="310896" cy="310896"/>
+          </a:xfrm>
+          <a:prstGeom prst="ellipse">
+            <a:avLst/>
+          </a:prstGeom>
+          <a:solidFill>
+            <a:srgbClr val="009CD6"/>
+          </a:solidFill>
+          <a:ln>
+            <a:noFill/>
+          </a:ln>
+          <a:effectLst/>
+        </p:spPr>
+        <p:style>
+          <a:lnRef idx="1">
+            <a:schemeClr val="accent1"/>
+          </a:lnRef>
+          <a:fillRef idx="3">
+            <a:schemeClr val="accent1"/>
+          </a:fillRef>
+          <a:effectRef idx="2">
+            <a:schemeClr val="accent1"/>
+          </a:effectRef>
+          <a:fontRef idx="minor">
+            <a:schemeClr val="lt1"/>
+          </a:fontRef>
+        </p:style>
+        <p:txBody>
+          <a:bodyPr rtlCol="0" anchor="ctr" lIns="0" rIns="0" tIns="0" bIns="0" wrap="square"/>
+          <a:lstStyle/>
+          <a:p>
+            <a:pPr algn="ctr"/>
+            <a:r>
+              <a:rPr sz="1300" b="1" i="0">
+                <a:solidFill>
+                  <a:srgbClr val="FFFFFF"/>
+                </a:solidFill>
+                <a:latin typeface="Arial"/>
+              </a:rPr>
+              <a:t>6</a:t>
+            </a:r>
+          </a:p>
+        </p:txBody>
+      </p:sp>
+      <p:sp>
+        <p:nvSpPr>
+          <p:cNvPr id="19" name="TextBox 18"/>
+          <p:cNvSpPr txBox="1"/>
+          <p:nvPr/>
+        </p:nvSpPr>
+        <p:spPr>
+          <a:xfrm>
+            <a:off x="6739128" y="1481328"/>
+            <a:ext cx="4937760" cy="822960"/>
+          </a:xfrm>
+          <a:prstGeom prst="rect">
+            <a:avLst/>
+          </a:prstGeom>
+          <a:noFill/>
+        </p:spPr>
+        <p:txBody>
+          <a:bodyPr wrap="square">
+            <a:spAutoFit/>
+          </a:bodyPr>
+          <a:lstStyle/>
+          <a:p>
+            <a:r>
+              <a:rPr sz="1700" b="1" i="0">
+                <a:solidFill>
+                  <a:srgbClr val="1A1A1A"/>
+                </a:solidFill>
+                <a:latin typeface="Arial"/>
+              </a:rPr>
+              <a:t>User-centred and inclusive</a:t>
+            </a:r>
+          </a:p>
+        </p:txBody>
+      </p:sp>
+      <p:sp>
+        <p:nvSpPr>
+          <p:cNvPr id="20" name="Rectangle 19"/>
+          <p:cNvSpPr/>
+          <p:nvPr/>
+        </p:nvSpPr>
+        <p:spPr>
+          <a:xfrm>
+            <a:off x="6281928" y="2322576"/>
+            <a:ext cx="5257800" cy="12700"/>
+          </a:xfrm>
+          <a:prstGeom prst="rect">
+            <a:avLst/>
+          </a:prstGeom>
+          <a:solidFill>
+            <a:srgbClr val="DDECF4"/>
+          </a:solidFill>
+          <a:ln>
+            <a:noFill/>
+          </a:ln>
+          <a:effectLst/>
+        </p:spPr>
+        <p:style>
+          <a:lnRef idx="1">
+            <a:schemeClr val="accent1"/>
+          </a:lnRef>
+          <a:fillRef idx="3">
+            <a:schemeClr val="accent1"/>
+          </a:fillRef>
+          <a:effectRef idx="2">
+            <a:schemeClr val="accent1"/>
+          </a:effectRef>
+          <a:fontRef idx="minor">
+            <a:schemeClr val="lt1"/>
+          </a:fontRef>
+        </p:style>
+        <p:txBody>
+          <a:bodyPr rtlCol="0" anchor="ctr"/>
+          <a:lstStyle/>
+          <a:p>
+            <a:pPr algn="ctr"/>
+          </a:p>
+        </p:txBody>
+      </p:sp>
+      <p:sp>
+        <p:nvSpPr>
+          <p:cNvPr id="21" name="Oval 20"/>
+          <p:cNvSpPr/>
+          <p:nvPr/>
+        </p:nvSpPr>
+        <p:spPr>
+          <a:xfrm>
+            <a:off x="6281928" y="2468880"/>
+            <a:ext cx="310896" cy="310896"/>
+          </a:xfrm>
+          <a:prstGeom prst="ellipse">
+            <a:avLst/>
+          </a:prstGeom>
+          <a:solidFill>
+            <a:srgbClr val="009CD6"/>
+          </a:solidFill>
+          <a:ln>
+            <a:noFill/>
+          </a:ln>
+          <a:effectLst/>
+        </p:spPr>
+        <p:style>
+          <a:lnRef idx="1">
+            <a:schemeClr val="accent1"/>
+          </a:lnRef>
+          <a:fillRef idx="3">
+            <a:schemeClr val="accent1"/>
+          </a:fillRef>
+          <a:effectRef idx="2">
+            <a:schemeClr val="accent1"/>
+          </a:effectRef>
+          <a:fontRef idx="minor">
+            <a:schemeClr val="lt1"/>
+          </a:fontRef>
+        </p:style>
+        <p:txBody>
+          <a:bodyPr rtlCol="0" anchor="ctr" lIns="0" rIns="0" tIns="0" bIns="0" wrap="square"/>
+          <a:lstStyle/>
+          <a:p>
+            <a:pPr algn="ctr"/>
+            <a:r>
+              <a:rPr sz="1300" b="1" i="0">
+                <a:solidFill>
+                  <a:srgbClr val="FFFFFF"/>
+                </a:solidFill>
+                <a:latin typeface="Arial"/>
+              </a:rPr>
+              <a:t>7</a:t>
+            </a:r>
+          </a:p>
+        </p:txBody>
+      </p:sp>
+      <p:sp>
+        <p:nvSpPr>
+          <p:cNvPr id="22" name="TextBox 21"/>
+          <p:cNvSpPr txBox="1"/>
+          <p:nvPr/>
+        </p:nvSpPr>
+        <p:spPr>
+          <a:xfrm>
+            <a:off x="6739128" y="2414016"/>
+            <a:ext cx="4937760" cy="822960"/>
+          </a:xfrm>
+          <a:prstGeom prst="rect">
+            <a:avLst/>
+          </a:prstGeom>
+          <a:noFill/>
+        </p:spPr>
+        <p:txBody>
+          <a:bodyPr wrap="square">
+            <a:spAutoFit/>
+          </a:bodyPr>
+          <a:lstStyle/>
+          <a:p>
+            <a:r>
+              <a:rPr sz="1700" b="1" i="0">
+                <a:solidFill>
+                  <a:srgbClr val="1A1A1A"/>
+                </a:solidFill>
+                <a:latin typeface="Arial"/>
+              </a:rPr>
+              <a:t>Reuse and sharing</a:t>
+            </a:r>
+          </a:p>
+        </p:txBody>
+      </p:sp>
+      <p:sp>
+        <p:nvSpPr>
+          <p:cNvPr id="23" name="Rectangle 22"/>
+          <p:cNvSpPr/>
+          <p:nvPr/>
+        </p:nvSpPr>
+        <p:spPr>
+          <a:xfrm>
+            <a:off x="6281928" y="3255264"/>
+            <a:ext cx="5257800" cy="12700"/>
+          </a:xfrm>
+          <a:prstGeom prst="rect">
+            <a:avLst/>
+          </a:prstGeom>
+          <a:solidFill>
+            <a:srgbClr val="DDECF4"/>
+          </a:solidFill>
+          <a:ln>
+            <a:noFill/>
+          </a:ln>
+          <a:effectLst/>
+        </p:spPr>
+        <p:style>
+          <a:lnRef idx="1">
+            <a:schemeClr val="accent1"/>
+          </a:lnRef>
+          <a:fillRef idx="3">
+            <a:schemeClr val="accent1"/>
+          </a:fillRef>
+          <a:effectRef idx="2">
+            <a:schemeClr val="accent1"/>
+          </a:effectRef>
+          <a:fontRef idx="minor">
+            <a:schemeClr val="lt1"/>
+          </a:fontRef>
+        </p:style>
+        <p:txBody>
+          <a:bodyPr rtlCol="0" anchor="ctr"/>
+          <a:lstStyle/>
+          <a:p>
+            <a:pPr algn="ctr"/>
+          </a:p>
+        </p:txBody>
+      </p:sp>
+      <p:sp>
+        <p:nvSpPr>
+          <p:cNvPr id="24" name="Oval 23"/>
+          <p:cNvSpPr/>
+          <p:nvPr/>
+        </p:nvSpPr>
+        <p:spPr>
+          <a:xfrm>
+            <a:off x="6281928" y="3401568"/>
+            <a:ext cx="310896" cy="310896"/>
+          </a:xfrm>
+          <a:prstGeom prst="ellipse">
+            <a:avLst/>
+          </a:prstGeom>
+          <a:solidFill>
+            <a:srgbClr val="009CD6"/>
+          </a:solidFill>
+          <a:ln>
+            <a:noFill/>
+          </a:ln>
+          <a:effectLst/>
+        </p:spPr>
+        <p:style>
+          <a:lnRef idx="1">
+            <a:schemeClr val="accent1"/>
+          </a:lnRef>
+          <a:fillRef idx="3">
+            <a:schemeClr val="accent1"/>
+          </a:fillRef>
+          <a:effectRef idx="2">
+            <a:schemeClr val="accent1"/>
+          </a:effectRef>
+          <a:fontRef idx="minor">
+            <a:schemeClr val="lt1"/>
+          </a:fontRef>
+        </p:style>
+        <p:txBody>
+          <a:bodyPr rtlCol="0" anchor="ctr" lIns="0" rIns="0" tIns="0" bIns="0" wrap="square"/>
+          <a:lstStyle/>
+          <a:p>
+            <a:pPr algn="ctr"/>
+            <a:r>
+              <a:rPr sz="1300" b="1" i="0">
+                <a:solidFill>
+                  <a:srgbClr val="FFFFFF"/>
+                </a:solidFill>
+                <a:latin typeface="Arial"/>
+              </a:rPr>
+              <a:t>8</a:t>
+            </a:r>
+          </a:p>
+        </p:txBody>
+      </p:sp>
+      <p:sp>
+        <p:nvSpPr>
+          <p:cNvPr id="25" name="TextBox 24"/>
+          <p:cNvSpPr txBox="1"/>
+          <p:nvPr/>
+        </p:nvSpPr>
+        <p:spPr>
+          <a:xfrm>
+            <a:off x="6739128" y="3346704"/>
+            <a:ext cx="4937760" cy="822960"/>
+          </a:xfrm>
+          <a:prstGeom prst="rect">
+            <a:avLst/>
+          </a:prstGeom>
+          <a:noFill/>
+        </p:spPr>
+        <p:txBody>
+          <a:bodyPr wrap="square">
+            <a:spAutoFit/>
+          </a:bodyPr>
+          <a:lstStyle/>
+          <a:p>
+            <a:r>
+              <a:rPr sz="1700" b="1" i="0">
+                <a:solidFill>
+                  <a:srgbClr val="1A1A1A"/>
+                </a:solidFill>
+                <a:latin typeface="Arial"/>
+              </a:rPr>
+              <a:t>Data as a managed asset — one source of truth</a:t>
+            </a:r>
+          </a:p>
+        </p:txBody>
+      </p:sp>
+      <p:sp>
+        <p:nvSpPr>
+          <p:cNvPr id="26" name="Rectangle 25"/>
+          <p:cNvSpPr/>
+          <p:nvPr/>
+        </p:nvSpPr>
+        <p:spPr>
+          <a:xfrm>
+            <a:off x="6281928" y="4187952"/>
+            <a:ext cx="5257800" cy="12700"/>
+          </a:xfrm>
+          <a:prstGeom prst="rect">
+            <a:avLst/>
+          </a:prstGeom>
+          <a:solidFill>
+            <a:srgbClr val="DDECF4"/>
+          </a:solidFill>
+          <a:ln>
+            <a:noFill/>
+          </a:ln>
+          <a:effectLst/>
+        </p:spPr>
+        <p:style>
+          <a:lnRef idx="1">
+            <a:schemeClr val="accent1"/>
+          </a:lnRef>
+          <a:fillRef idx="3">
+            <a:schemeClr val="accent1"/>
+          </a:fillRef>
+          <a:effectRef idx="2">
+            <a:schemeClr val="accent1"/>
+          </a:effectRef>
+          <a:fontRef idx="minor">
+            <a:schemeClr val="lt1"/>
+          </a:fontRef>
+        </p:style>
+        <p:txBody>
+          <a:bodyPr rtlCol="0" anchor="ctr"/>
+          <a:lstStyle/>
+          <a:p>
+            <a:pPr algn="ctr"/>
+          </a:p>
+        </p:txBody>
+      </p:sp>
+      <p:sp>
+        <p:nvSpPr>
+          <p:cNvPr id="27" name="Oval 26"/>
+          <p:cNvSpPr/>
+          <p:nvPr/>
+        </p:nvSpPr>
+        <p:spPr>
+          <a:xfrm>
+            <a:off x="6281928" y="4334255"/>
+            <a:ext cx="310896" cy="310896"/>
+          </a:xfrm>
+          <a:prstGeom prst="ellipse">
+            <a:avLst/>
+          </a:prstGeom>
+          <a:solidFill>
+            <a:srgbClr val="009CD6"/>
+          </a:solidFill>
+          <a:ln>
+            <a:noFill/>
+          </a:ln>
+          <a:effectLst/>
+        </p:spPr>
+        <p:style>
+          <a:lnRef idx="1">
+            <a:schemeClr val="accent1"/>
+          </a:lnRef>
+          <a:fillRef idx="3">
+            <a:schemeClr val="accent1"/>
+          </a:fillRef>
+          <a:effectRef idx="2">
+            <a:schemeClr val="accent1"/>
+          </a:effectRef>
+          <a:fontRef idx="minor">
+            <a:schemeClr val="lt1"/>
+          </a:fontRef>
+        </p:style>
+        <p:txBody>
+          <a:bodyPr rtlCol="0" anchor="ctr" lIns="0" rIns="0" tIns="0" bIns="0" wrap="square"/>
+          <a:lstStyle/>
+          <a:p>
+            <a:pPr algn="ctr"/>
+            <a:r>
+              <a:rPr sz="1300" b="1" i="0">
+                <a:solidFill>
+                  <a:srgbClr val="FFFFFF"/>
+                </a:solidFill>
+                <a:latin typeface="Arial"/>
+              </a:rPr>
+              <a:t>9</a:t>
+            </a:r>
+          </a:p>
+        </p:txBody>
+      </p:sp>
+      <p:sp>
+        <p:nvSpPr>
+          <p:cNvPr id="28" name="TextBox 27"/>
+          <p:cNvSpPr txBox="1"/>
+          <p:nvPr/>
+        </p:nvSpPr>
+        <p:spPr>
+          <a:xfrm>
+            <a:off x="6739128" y="4279392"/>
+            <a:ext cx="4937760" cy="822960"/>
+          </a:xfrm>
+          <a:prstGeom prst="rect">
+            <a:avLst/>
+          </a:prstGeom>
+          <a:noFill/>
+        </p:spPr>
+        <p:txBody>
+          <a:bodyPr wrap="square">
+            <a:spAutoFit/>
+          </a:bodyPr>
+          <a:lstStyle/>
+          <a:p>
+            <a:r>
+              <a:rPr sz="1700" b="1" i="0">
+                <a:solidFill>
+                  <a:srgbClr val="1A1A1A"/>
+                </a:solidFill>
+                <a:latin typeface="Arial"/>
+              </a:rPr>
+              <a:t>Technology neutrality — avoid lock-in</a:t>
+            </a:r>
+          </a:p>
+        </p:txBody>
+      </p:sp>
+      <p:sp>
+        <p:nvSpPr>
+          <p:cNvPr id="29" name="Rectangle 28"/>
+          <p:cNvSpPr/>
+          <p:nvPr/>
+        </p:nvSpPr>
+        <p:spPr>
+          <a:xfrm>
+            <a:off x="6281928" y="5120640"/>
+            <a:ext cx="5257800" cy="12700"/>
+          </a:xfrm>
+          <a:prstGeom prst="rect">
+            <a:avLst/>
+          </a:prstGeom>
+          <a:solidFill>
+            <a:srgbClr val="DDECF4"/>
+          </a:solidFill>
+          <a:ln>
+            <a:noFill/>
+          </a:ln>
+          <a:effectLst/>
+        </p:spPr>
+        <p:style>
+          <a:lnRef idx="1">
+            <a:schemeClr val="accent1"/>
+          </a:lnRef>
+          <a:fillRef idx="3">
+            <a:schemeClr val="accent1"/>
+          </a:fillRef>
+          <a:effectRef idx="2">
+            <a:schemeClr val="accent1"/>
+          </a:effectRef>
+          <a:fontRef idx="minor">
+            <a:schemeClr val="lt1"/>
+          </a:fontRef>
+        </p:style>
+        <p:txBody>
+          <a:bodyPr rtlCol="0" anchor="ctr"/>
+          <a:lstStyle/>
+          <a:p>
+            <a:pPr algn="ctr"/>
+          </a:p>
+        </p:txBody>
+      </p:sp>
+      <p:sp>
+        <p:nvSpPr>
+          <p:cNvPr id="30" name="Oval 29"/>
+          <p:cNvSpPr/>
+          <p:nvPr/>
+        </p:nvSpPr>
+        <p:spPr>
+          <a:xfrm>
+            <a:off x="6281928" y="5266944"/>
+            <a:ext cx="310896" cy="310896"/>
+          </a:xfrm>
+          <a:prstGeom prst="ellipse">
+            <a:avLst/>
+          </a:prstGeom>
+          <a:solidFill>
+            <a:srgbClr val="009CD6"/>
+          </a:solidFill>
+          <a:ln>
+            <a:noFill/>
+          </a:ln>
+          <a:effectLst/>
+        </p:spPr>
+        <p:style>
+          <a:lnRef idx="1">
+            <a:schemeClr val="accent1"/>
+          </a:lnRef>
+          <a:fillRef idx="3">
+            <a:schemeClr val="accent1"/>
+          </a:fillRef>
+          <a:effectRef idx="2">
+            <a:schemeClr val="accent1"/>
+          </a:effectRef>
+          <a:fontRef idx="minor">
+            <a:schemeClr val="lt1"/>
+          </a:fontRef>
+        </p:style>
+        <p:txBody>
+          <a:bodyPr rtlCol="0" anchor="ctr" lIns="0" rIns="0" tIns="0" bIns="0" wrap="square"/>
+          <a:lstStyle/>
+          <a:p>
+            <a:pPr algn="ctr"/>
+            <a:r>
+              <a:rPr sz="1300" b="1" i="0">
+                <a:solidFill>
+                  <a:srgbClr val="FFFFFF"/>
+                </a:solidFill>
+                <a:latin typeface="Arial"/>
+              </a:rPr>
+              <a:t>10</a:t>
+            </a:r>
+          </a:p>
+        </p:txBody>
+      </p:sp>
+      <p:sp>
+        <p:nvSpPr>
+          <p:cNvPr id="31" name="TextBox 30"/>
+          <p:cNvSpPr txBox="1"/>
+          <p:nvPr/>
+        </p:nvSpPr>
+        <p:spPr>
+          <a:xfrm>
+            <a:off x="6739128" y="5212080"/>
+            <a:ext cx="4937760" cy="822960"/>
+          </a:xfrm>
+          <a:prstGeom prst="rect">
+            <a:avLst/>
+          </a:prstGeom>
+          <a:noFill/>
+        </p:spPr>
+        <p:txBody>
+          <a:bodyPr wrap="square">
+            <a:spAutoFit/>
+          </a:bodyPr>
+          <a:lstStyle/>
+          <a:p>
+            <a:r>
+              <a:rPr sz="1700" b="1" i="0">
+                <a:solidFill>
+                  <a:srgbClr val="1A1A1A"/>
+                </a:solidFill>
+                <a:latin typeface="Arial"/>
+              </a:rPr>
+              <a:t>Sustainability</a:t>
+            </a:r>
+          </a:p>
+        </p:txBody>
+      </p:sp>
+      <p:sp>
+        <p:nvSpPr>
+          <p:cNvPr id="32" name="TextBox 31"/>
+          <p:cNvSpPr txBox="1"/>
+          <p:nvPr/>
+        </p:nvSpPr>
+        <p:spPr>
+          <a:xfrm>
+            <a:off x="457200" y="6473952"/>
+            <a:ext cx="7772400" cy="292608"/>
+          </a:xfrm>
+          <a:prstGeom prst="rect">
+            <a:avLst/>
+          </a:prstGeom>
+          <a:noFill/>
+        </p:spPr>
+        <p:txBody>
+          <a:bodyPr wrap="square">
+            <a:spAutoFit/>
+          </a:bodyPr>
+          <a:lstStyle/>
+          <a:p>
+            <a:r>
+              <a:rPr sz="900" b="0" i="0">
+                <a:solidFill>
+                  <a:srgbClr val="595959"/>
+                </a:solidFill>
+                <a:latin typeface="Arial"/>
+              </a:rPr>
+              <a:t>2.3 · Adopt your principles, don't draft them</a:t>
+            </a:r>
+          </a:p>
+        </p:txBody>
+      </p:sp>
+    </p:spTree>
+  </p:cSld>
+  <p:clrMapOvr>
+    <a:masterClrMapping/>
+  </p:clrMapOvr>
+</p:sld>
+</file>
+
+<file path=ppt/slides/slide24.xml><?xml version="1.0" encoding="utf-8"?>
+<p:sld xmlns:a="http://schemas.openxmlformats.org/drawingml/2006/main" xmlns:p="http://schemas.openxmlformats.org/presentationml/2006/main" xmlns:r="http://schemas.openxmlformats.org/officeDocument/2006/relationships">
+  <p:cSld>
+    <p:spTree>
+      <p:nvGrpSpPr>
+        <p:cNvPr id="1" name=""/>
+        <p:cNvGrpSpPr/>
+        <p:nvPr/>
+      </p:nvGrpSpPr>
+      <p:grpSpPr/>
+      <p:sp>
+        <p:nvSpPr>
+          <p:cNvPr id="2" name="Rectangle 1"/>
+          <p:cNvSpPr/>
+          <p:nvPr/>
+        </p:nvSpPr>
+        <p:spPr>
+          <a:xfrm>
+            <a:off x="457200" y="384048"/>
+            <a:ext cx="45720" cy="256032"/>
+          </a:xfrm>
+          <a:prstGeom prst="rect">
+            <a:avLst/>
+          </a:prstGeom>
+          <a:solidFill>
+            <a:srgbClr val="009CD6"/>
+          </a:solidFill>
+          <a:ln>
+            <a:noFill/>
+          </a:ln>
+          <a:effectLst/>
+        </p:spPr>
+        <p:style>
+          <a:lnRef idx="1">
+            <a:schemeClr val="accent1"/>
+          </a:lnRef>
+          <a:fillRef idx="3">
+            <a:schemeClr val="accent1"/>
+          </a:fillRef>
+          <a:effectRef idx="2">
+            <a:schemeClr val="accent1"/>
+          </a:effectRef>
+          <a:fontRef idx="minor">
+            <a:schemeClr val="lt1"/>
+          </a:fontRef>
+        </p:style>
+        <p:txBody>
+          <a:bodyPr rtlCol="0" anchor="ctr"/>
+          <a:lstStyle/>
+          <a:p>
+            <a:pPr algn="ctr"/>
+          </a:p>
+        </p:txBody>
+      </p:sp>
+      <p:sp>
+        <p:nvSpPr>
+          <p:cNvPr id="3" name="TextBox 2"/>
+          <p:cNvSpPr txBox="1"/>
+          <p:nvPr/>
+        </p:nvSpPr>
+        <p:spPr>
+          <a:xfrm>
+            <a:off x="621792" y="274320"/>
+            <a:ext cx="11247120" cy="914400"/>
+          </a:xfrm>
+          <a:prstGeom prst="rect">
+            <a:avLst/>
+          </a:prstGeom>
+          <a:noFill/>
+        </p:spPr>
+        <p:txBody>
+          <a:bodyPr wrap="square">
+            <a:spAutoFit/>
+          </a:bodyPr>
+          <a:lstStyle/>
+          <a:p>
+            <a:r>
+              <a:rPr sz="2800" b="1" i="0">
+                <a:solidFill>
+                  <a:srgbClr val="1A1A1A"/>
+                </a:solidFill>
+                <a:latin typeface="Arial"/>
+              </a:rPr>
+              <a:t>Adopting them is three steps, not a three-month workshop</a:t>
+            </a:r>
+          </a:p>
+        </p:txBody>
+      </p:sp>
+      <p:sp>
+        <p:nvSpPr>
+          <p:cNvPr id="4" name="Oval 3"/>
+          <p:cNvSpPr/>
+          <p:nvPr/>
+        </p:nvSpPr>
+        <p:spPr>
+          <a:xfrm>
+            <a:off x="621792" y="1463040"/>
+            <a:ext cx="310896" cy="310896"/>
+          </a:xfrm>
+          <a:prstGeom prst="ellipse">
+            <a:avLst/>
+          </a:prstGeom>
+          <a:solidFill>
+            <a:srgbClr val="009CD6"/>
+          </a:solidFill>
+          <a:ln>
+            <a:noFill/>
+          </a:ln>
+          <a:effectLst/>
+        </p:spPr>
+        <p:style>
+          <a:lnRef idx="1">
+            <a:schemeClr val="accent1"/>
+          </a:lnRef>
+          <a:fillRef idx="3">
+            <a:schemeClr val="accent1"/>
+          </a:fillRef>
+          <a:effectRef idx="2">
+            <a:schemeClr val="accent1"/>
+          </a:effectRef>
+          <a:fontRef idx="minor">
+            <a:schemeClr val="lt1"/>
+          </a:fontRef>
+        </p:style>
+        <p:txBody>
+          <a:bodyPr rtlCol="0" anchor="ctr" lIns="0" rIns="0" tIns="0" bIns="0" wrap="square"/>
+          <a:lstStyle/>
+          <a:p>
+            <a:pPr algn="ctr"/>
+            <a:r>
+              <a:rPr sz="1300" b="1" i="0">
+                <a:solidFill>
+                  <a:srgbClr val="FFFFFF"/>
+                </a:solidFill>
+                <a:latin typeface="Arial"/>
+              </a:rPr>
+              <a:t>1</a:t>
+            </a:r>
+          </a:p>
+        </p:txBody>
+      </p:sp>
+      <p:sp>
+        <p:nvSpPr>
+          <p:cNvPr id="5" name="TextBox 4"/>
+          <p:cNvSpPr txBox="1"/>
+          <p:nvPr/>
+        </p:nvSpPr>
+        <p:spPr>
+          <a:xfrm>
+            <a:off x="1115568" y="1417320"/>
+            <a:ext cx="10527487" cy="1569720"/>
+          </a:xfrm>
+          <a:prstGeom prst="rect">
+            <a:avLst/>
+          </a:prstGeom>
+          <a:noFill/>
+        </p:spPr>
+        <p:txBody>
+          <a:bodyPr wrap="square">
+            <a:spAutoFit/>
+          </a:bodyPr>
+          <a:lstStyle/>
+          <a:p>
+            <a:pPr>
+              <a:spcAft>
+                <a:spcPts val="300"/>
+              </a:spcAft>
+            </a:pPr>
+            <a:r>
+              <a:rPr sz="1900" b="1" i="0">
+                <a:solidFill>
+                  <a:srgbClr val="1A1A1A"/>
+                </a:solidFill>
+                <a:latin typeface="Arial"/>
+              </a:rPr>
+              <a:t>Adopt the ten as your baseline</a:t>
+            </a:r>
+          </a:p>
+          <a:p>
+            <a:pPr>
+              <a:spcAft>
+                <a:spcPts val="300"/>
+              </a:spcAft>
+            </a:pPr>
+            <a:r>
+              <a:rPr sz="1550" b="0" i="0">
+                <a:solidFill>
+                  <a:srgbClr val="595959"/>
+                </a:solidFill>
+                <a:latin typeface="Arial"/>
+              </a:rPr>
+              <a:t>You inherit the thinking instead of starting from a blank page.</a:t>
+            </a:r>
+          </a:p>
+        </p:txBody>
+      </p:sp>
+      <p:sp>
+        <p:nvSpPr>
+          <p:cNvPr id="6" name="Rectangle 5"/>
+          <p:cNvSpPr/>
+          <p:nvPr/>
+        </p:nvSpPr>
+        <p:spPr>
+          <a:xfrm>
+            <a:off x="621792" y="2991612"/>
+            <a:ext cx="10881360" cy="12700"/>
+          </a:xfrm>
+          <a:prstGeom prst="rect">
+            <a:avLst/>
+          </a:prstGeom>
+          <a:solidFill>
+            <a:srgbClr val="DDECF4"/>
+          </a:solidFill>
+          <a:ln>
+            <a:noFill/>
+          </a:ln>
+          <a:effectLst/>
+        </p:spPr>
+        <p:style>
+          <a:lnRef idx="1">
+            <a:schemeClr val="accent1"/>
+          </a:lnRef>
+          <a:fillRef idx="3">
+            <a:schemeClr val="accent1"/>
+          </a:fillRef>
+          <a:effectRef idx="2">
+            <a:schemeClr val="accent1"/>
+          </a:effectRef>
+          <a:fontRef idx="minor">
+            <a:schemeClr val="lt1"/>
+          </a:fontRef>
+        </p:style>
+        <p:txBody>
+          <a:bodyPr rtlCol="0" anchor="ctr"/>
+          <a:lstStyle/>
+          <a:p>
+            <a:pPr algn="ctr"/>
+          </a:p>
+        </p:txBody>
+      </p:sp>
+      <p:sp>
+        <p:nvSpPr>
+          <p:cNvPr id="7" name="Oval 6"/>
+          <p:cNvSpPr/>
+          <p:nvPr/>
+        </p:nvSpPr>
+        <p:spPr>
+          <a:xfrm>
+            <a:off x="621792" y="3078479"/>
+            <a:ext cx="310896" cy="310896"/>
+          </a:xfrm>
+          <a:prstGeom prst="ellipse">
+            <a:avLst/>
+          </a:prstGeom>
+          <a:solidFill>
+            <a:srgbClr val="009CD6"/>
+          </a:solidFill>
+          <a:ln>
+            <a:noFill/>
+          </a:ln>
+          <a:effectLst/>
+        </p:spPr>
+        <p:style>
+          <a:lnRef idx="1">
+            <a:schemeClr val="accent1"/>
+          </a:lnRef>
+          <a:fillRef idx="3">
+            <a:schemeClr val="accent1"/>
+          </a:fillRef>
+          <a:effectRef idx="2">
+            <a:schemeClr val="accent1"/>
+          </a:effectRef>
+          <a:fontRef idx="minor">
+            <a:schemeClr val="lt1"/>
+          </a:fontRef>
+        </p:style>
+        <p:txBody>
+          <a:bodyPr rtlCol="0" anchor="ctr" lIns="0" rIns="0" tIns="0" bIns="0" wrap="square"/>
+          <a:lstStyle/>
+          <a:p>
+            <a:pPr algn="ctr"/>
+            <a:r>
+              <a:rPr sz="1300" b="1" i="0">
+                <a:solidFill>
+                  <a:srgbClr val="FFFFFF"/>
+                </a:solidFill>
+                <a:latin typeface="Arial"/>
+              </a:rPr>
+              <a:t>2</a:t>
+            </a:r>
+          </a:p>
+        </p:txBody>
+      </p:sp>
+      <p:sp>
+        <p:nvSpPr>
+          <p:cNvPr id="8" name="TextBox 7"/>
+          <p:cNvSpPr txBox="1"/>
+          <p:nvPr/>
+        </p:nvSpPr>
+        <p:spPr>
+          <a:xfrm>
+            <a:off x="1115568" y="3032760"/>
+            <a:ext cx="10527487" cy="1569720"/>
+          </a:xfrm>
+          <a:prstGeom prst="rect">
+            <a:avLst/>
+          </a:prstGeom>
+          <a:noFill/>
+        </p:spPr>
+        <p:txBody>
+          <a:bodyPr wrap="square">
+            <a:spAutoFit/>
+          </a:bodyPr>
+          <a:lstStyle/>
+          <a:p>
+            <a:pPr>
+              <a:spcAft>
+                <a:spcPts val="300"/>
+              </a:spcAft>
+            </a:pPr>
+            <a:r>
+              <a:rPr sz="1900" b="1" i="0">
+                <a:solidFill>
+                  <a:srgbClr val="1A1A1A"/>
+                </a:solidFill>
+                <a:latin typeface="Arial"/>
+              </a:rPr>
+              <a:t>Tailor the wording to your country</a:t>
+            </a:r>
+          </a:p>
+          <a:p>
+            <a:pPr>
+              <a:spcAft>
+                <a:spcPts val="300"/>
+              </a:spcAft>
+            </a:pPr>
+            <a:r>
+              <a:rPr sz="1550" b="0" i="0">
+                <a:solidFill>
+                  <a:srgbClr val="595959"/>
+                </a:solidFill>
+                <a:latin typeface="Arial"/>
+              </a:rPr>
+              <a:t>Point each principle at your own laws, your data-protection act, your procurement rules, so it has teeth in your context.</a:t>
+            </a:r>
+          </a:p>
+        </p:txBody>
+      </p:sp>
+      <p:sp>
+        <p:nvSpPr>
+          <p:cNvPr id="9" name="Rectangle 8"/>
+          <p:cNvSpPr/>
+          <p:nvPr/>
+        </p:nvSpPr>
+        <p:spPr>
+          <a:xfrm>
+            <a:off x="621792" y="4607052"/>
+            <a:ext cx="10881360" cy="12700"/>
+          </a:xfrm>
+          <a:prstGeom prst="rect">
+            <a:avLst/>
+          </a:prstGeom>
+          <a:solidFill>
+            <a:srgbClr val="DDECF4"/>
+          </a:solidFill>
+          <a:ln>
+            <a:noFill/>
+          </a:ln>
+          <a:effectLst/>
+        </p:spPr>
+        <p:style>
+          <a:lnRef idx="1">
+            <a:schemeClr val="accent1"/>
+          </a:lnRef>
+          <a:fillRef idx="3">
+            <a:schemeClr val="accent1"/>
+          </a:fillRef>
+          <a:effectRef idx="2">
+            <a:schemeClr val="accent1"/>
+          </a:effectRef>
+          <a:fontRef idx="minor">
+            <a:schemeClr val="lt1"/>
+          </a:fontRef>
+        </p:style>
+        <p:txBody>
+          <a:bodyPr rtlCol="0" anchor="ctr"/>
+          <a:lstStyle/>
+          <a:p>
+            <a:pPr algn="ctr"/>
+          </a:p>
+        </p:txBody>
+      </p:sp>
+      <p:sp>
+        <p:nvSpPr>
+          <p:cNvPr id="10" name="Oval 9"/>
+          <p:cNvSpPr/>
+          <p:nvPr/>
+        </p:nvSpPr>
+        <p:spPr>
+          <a:xfrm>
+            <a:off x="621792" y="4693920"/>
+            <a:ext cx="310896" cy="310896"/>
+          </a:xfrm>
+          <a:prstGeom prst="ellipse">
+            <a:avLst/>
+          </a:prstGeom>
+          <a:solidFill>
+            <a:srgbClr val="009CD6"/>
+          </a:solidFill>
+          <a:ln>
+            <a:noFill/>
+          </a:ln>
+          <a:effectLst/>
+        </p:spPr>
+        <p:style>
+          <a:lnRef idx="1">
+            <a:schemeClr val="accent1"/>
+          </a:lnRef>
+          <a:fillRef idx="3">
+            <a:schemeClr val="accent1"/>
+          </a:fillRef>
+          <a:effectRef idx="2">
+            <a:schemeClr val="accent1"/>
+          </a:effectRef>
+          <a:fontRef idx="minor">
+            <a:schemeClr val="lt1"/>
+          </a:fontRef>
+        </p:style>
+        <p:txBody>
+          <a:bodyPr rtlCol="0" anchor="ctr" lIns="0" rIns="0" tIns="0" bIns="0" wrap="square"/>
+          <a:lstStyle/>
+          <a:p>
+            <a:pPr algn="ctr"/>
+            <a:r>
+              <a:rPr sz="1300" b="1" i="0">
+                <a:solidFill>
+                  <a:srgbClr val="FFFFFF"/>
+                </a:solidFill>
+                <a:latin typeface="Arial"/>
+              </a:rPr>
+              <a:t>3</a:t>
+            </a:r>
+          </a:p>
+        </p:txBody>
+      </p:sp>
+      <p:sp>
+        <p:nvSpPr>
+          <p:cNvPr id="11" name="TextBox 10"/>
+          <p:cNvSpPr txBox="1"/>
+          <p:nvPr/>
+        </p:nvSpPr>
+        <p:spPr>
+          <a:xfrm>
+            <a:off x="1115568" y="4648200"/>
+            <a:ext cx="10527487" cy="1569720"/>
+          </a:xfrm>
+          <a:prstGeom prst="rect">
+            <a:avLst/>
+          </a:prstGeom>
+          <a:noFill/>
+        </p:spPr>
+        <p:txBody>
+          <a:bodyPr wrap="square">
+            <a:spAutoFit/>
+          </a:bodyPr>
+          <a:lstStyle/>
+          <a:p>
+            <a:pPr>
+              <a:spcAft>
+                <a:spcPts val="300"/>
+              </a:spcAft>
+            </a:pPr>
+            <a:r>
+              <a:rPr sz="1900" b="1" i="0">
+                <a:solidFill>
+                  <a:srgbClr val="1A1A1A"/>
+                </a:solidFill>
+                <a:latin typeface="Arial"/>
+              </a:rPr>
+              <a:t>Add at most a few country-specific principles</a:t>
+            </a:r>
+          </a:p>
+          <a:p>
+            <a:pPr>
+              <a:spcAft>
+                <a:spcPts val="300"/>
+              </a:spcAft>
+            </a:pPr>
+            <a:r>
+              <a:rPr sz="1550" b="0" i="0">
+                <a:solidFill>
+                  <a:srgbClr val="595959"/>
+                </a:solidFill>
+                <a:latin typeface="Arial"/>
+              </a:rPr>
+              <a:t>Only where PAERA genuinely does not cover something — deliberately, with a reason written down.</a:t>
+            </a:r>
+          </a:p>
+        </p:txBody>
+      </p:sp>
+      <p:sp>
+        <p:nvSpPr>
+          <p:cNvPr id="12" name="TextBox 11"/>
+          <p:cNvSpPr txBox="1"/>
+          <p:nvPr/>
+        </p:nvSpPr>
+        <p:spPr>
+          <a:xfrm>
+            <a:off x="457200" y="6473952"/>
+            <a:ext cx="7772400" cy="292608"/>
+          </a:xfrm>
+          <a:prstGeom prst="rect">
+            <a:avLst/>
+          </a:prstGeom>
+          <a:noFill/>
+        </p:spPr>
+        <p:txBody>
+          <a:bodyPr wrap="square">
+            <a:spAutoFit/>
+          </a:bodyPr>
+          <a:lstStyle/>
+          <a:p>
+            <a:r>
+              <a:rPr sz="900" b="0" i="0">
+                <a:solidFill>
+                  <a:srgbClr val="595959"/>
+                </a:solidFill>
+                <a:latin typeface="Arial"/>
+              </a:rPr>
+              <a:t>2.3 · Adopt your principles, don't draft them</a:t>
+            </a:r>
+          </a:p>
+        </p:txBody>
+      </p:sp>
+    </p:spTree>
+  </p:cSld>
+  <p:clrMapOvr>
+    <a:masterClrMapping/>
+  </p:clrMapOvr>
+</p:sld>
+</file>
+
+<file path=ppt/slides/slide25.xml><?xml version="1.0" encoding="utf-8"?>
+<p:sld xmlns:a="http://schemas.openxmlformats.org/drawingml/2006/main" xmlns:p="http://schemas.openxmlformats.org/presentationml/2006/main" xmlns:r="http://schemas.openxmlformats.org/officeDocument/2006/relationships">
+  <p:cSld>
+    <p:spTree>
+      <p:nvGrpSpPr>
+        <p:cNvPr id="1" name=""/>
+        <p:cNvGrpSpPr/>
+        <p:nvPr/>
+      </p:nvGrpSpPr>
+      <p:grpSpPr/>
+      <p:sp>
+        <p:nvSpPr>
+          <p:cNvPr id="2" name="Rectangle 1"/>
+          <p:cNvSpPr/>
+          <p:nvPr/>
+        </p:nvSpPr>
+        <p:spPr>
+          <a:xfrm>
+            <a:off x="457200" y="384048"/>
+            <a:ext cx="45720" cy="256032"/>
+          </a:xfrm>
+          <a:prstGeom prst="rect">
+            <a:avLst/>
+          </a:prstGeom>
+          <a:solidFill>
+            <a:srgbClr val="009CD6"/>
+          </a:solidFill>
+          <a:ln>
+            <a:noFill/>
+          </a:ln>
+          <a:effectLst/>
+        </p:spPr>
+        <p:style>
+          <a:lnRef idx="1">
+            <a:schemeClr val="accent1"/>
+          </a:lnRef>
+          <a:fillRef idx="3">
+            <a:schemeClr val="accent1"/>
+          </a:fillRef>
+          <a:effectRef idx="2">
+            <a:schemeClr val="accent1"/>
+          </a:effectRef>
+          <a:fontRef idx="minor">
+            <a:schemeClr val="lt1"/>
+          </a:fontRef>
+        </p:style>
+        <p:txBody>
+          <a:bodyPr rtlCol="0" anchor="ctr"/>
+          <a:lstStyle/>
+          <a:p>
+            <a:pPr algn="ctr"/>
+          </a:p>
+        </p:txBody>
+      </p:sp>
+      <p:sp>
+        <p:nvSpPr>
+          <p:cNvPr id="3" name="TextBox 2"/>
+          <p:cNvSpPr txBox="1"/>
+          <p:nvPr/>
+        </p:nvSpPr>
+        <p:spPr>
+          <a:xfrm>
+            <a:off x="621792" y="274320"/>
+            <a:ext cx="11247120" cy="914400"/>
+          </a:xfrm>
+          <a:prstGeom prst="rect">
+            <a:avLst/>
+          </a:prstGeom>
+          <a:noFill/>
+        </p:spPr>
+        <p:txBody>
+          <a:bodyPr wrap="square">
+            <a:spAutoFit/>
+          </a:bodyPr>
+          <a:lstStyle/>
+          <a:p>
+            <a:r>
+              <a:rPr sz="2800" b="1" i="0">
+                <a:solidFill>
+                  <a:srgbClr val="1A1A1A"/>
+                </a:solidFill>
+                <a:latin typeface="Arial"/>
+              </a:rPr>
+              <a:t>Make a principle bite — statement, reason, implication</a:t>
+            </a:r>
+          </a:p>
+        </p:txBody>
+      </p:sp>
+      <p:sp>
+        <p:nvSpPr>
+          <p:cNvPr id="4" name="Rounded Rectangle 3"/>
+          <p:cNvSpPr/>
+          <p:nvPr/>
+        </p:nvSpPr>
+        <p:spPr>
+          <a:xfrm>
+            <a:off x="658368" y="1600200"/>
+            <a:ext cx="10881360" cy="1234440"/>
+          </a:xfrm>
+          <a:prstGeom prst="roundRect">
+            <a:avLst>
+              <a:gd name="adj" fmla="val 4500"/>
+            </a:avLst>
+          </a:prstGeom>
+          <a:solidFill>
+            <a:srgbClr val="E5F5FB"/>
+          </a:solidFill>
+          <a:ln>
+            <a:noFill/>
+          </a:ln>
+          <a:effectLst/>
+        </p:spPr>
+        <p:style>
+          <a:lnRef idx="1">
+            <a:schemeClr val="accent1"/>
+          </a:lnRef>
+          <a:fillRef idx="3">
+            <a:schemeClr val="accent1"/>
+          </a:fillRef>
+          <a:effectRef idx="2">
+            <a:schemeClr val="accent1"/>
+          </a:effectRef>
+          <a:fontRef idx="minor">
+            <a:schemeClr val="lt1"/>
+          </a:fontRef>
+        </p:style>
+        <p:txBody>
+          <a:bodyPr rtlCol="0" anchor="ctr"/>
+          <a:lstStyle/>
+          <a:p>
+            <a:pPr algn="ctr"/>
+          </a:p>
+        </p:txBody>
+      </p:sp>
+      <p:sp>
+        <p:nvSpPr>
+          <p:cNvPr id="5" name="TextBox 4"/>
+          <p:cNvSpPr txBox="1"/>
+          <p:nvPr/>
+        </p:nvSpPr>
+        <p:spPr>
+          <a:xfrm>
+            <a:off x="868680" y="1737360"/>
+            <a:ext cx="2194560" cy="365760"/>
+          </a:xfrm>
+          <a:prstGeom prst="rect">
+            <a:avLst/>
+          </a:prstGeom>
+          <a:noFill/>
+        </p:spPr>
+        <p:txBody>
+          <a:bodyPr wrap="square">
+            <a:spAutoFit/>
+          </a:bodyPr>
+          <a:lstStyle/>
+          <a:p>
+            <a:r>
+              <a:rPr sz="1100" b="1" i="0">
+                <a:solidFill>
+                  <a:srgbClr val="006E96"/>
+                </a:solidFill>
+                <a:latin typeface="Arial"/>
+              </a:rPr>
+              <a:t>STATEMENT</a:t>
+            </a:r>
+          </a:p>
+        </p:txBody>
+      </p:sp>
+      <p:sp>
+        <p:nvSpPr>
+          <p:cNvPr id="6" name="TextBox 5"/>
+          <p:cNvSpPr txBox="1"/>
+          <p:nvPr/>
+        </p:nvSpPr>
+        <p:spPr>
+          <a:xfrm>
+            <a:off x="3108960" y="1709928"/>
+            <a:ext cx="8183879" cy="1005840"/>
+          </a:xfrm>
+          <a:prstGeom prst="rect">
+            <a:avLst/>
+          </a:prstGeom>
+          <a:noFill/>
+        </p:spPr>
+        <p:txBody>
+          <a:bodyPr wrap="square">
+            <a:spAutoFit/>
+          </a:bodyPr>
+          <a:lstStyle/>
+          <a:p>
+            <a:r>
+              <a:rPr sz="1800" b="0" i="0">
+                <a:solidFill>
+                  <a:srgbClr val="1A1A1A"/>
+                </a:solidFill>
+                <a:latin typeface="Arial"/>
+              </a:rPr>
+              <a:t>We consume an existing building block before we build a new one.</a:t>
+            </a:r>
+          </a:p>
+        </p:txBody>
+      </p:sp>
+      <p:sp>
+        <p:nvSpPr>
+          <p:cNvPr id="7" name="Rounded Rectangle 6"/>
+          <p:cNvSpPr/>
+          <p:nvPr/>
+        </p:nvSpPr>
+        <p:spPr>
+          <a:xfrm>
+            <a:off x="658368" y="2990088"/>
+            <a:ext cx="10881360" cy="1234440"/>
+          </a:xfrm>
+          <a:prstGeom prst="roundRect">
+            <a:avLst>
+              <a:gd name="adj" fmla="val 4500"/>
+            </a:avLst>
+          </a:prstGeom>
+          <a:solidFill>
+            <a:srgbClr val="E5F5FB"/>
+          </a:solidFill>
+          <a:ln>
+            <a:noFill/>
+          </a:ln>
+          <a:effectLst/>
+        </p:spPr>
+        <p:style>
+          <a:lnRef idx="1">
+            <a:schemeClr val="accent1"/>
+          </a:lnRef>
+          <a:fillRef idx="3">
+            <a:schemeClr val="accent1"/>
+          </a:fillRef>
+          <a:effectRef idx="2">
+            <a:schemeClr val="accent1"/>
+          </a:effectRef>
+          <a:fontRef idx="minor">
+            <a:schemeClr val="lt1"/>
+          </a:fontRef>
+        </p:style>
+        <p:txBody>
+          <a:bodyPr rtlCol="0" anchor="ctr"/>
+          <a:lstStyle/>
+          <a:p>
+            <a:pPr algn="ctr"/>
+          </a:p>
+        </p:txBody>
+      </p:sp>
+      <p:sp>
+        <p:nvSpPr>
+          <p:cNvPr id="8" name="TextBox 7"/>
+          <p:cNvSpPr txBox="1"/>
+          <p:nvPr/>
+        </p:nvSpPr>
+        <p:spPr>
+          <a:xfrm>
+            <a:off x="868680" y="3127248"/>
+            <a:ext cx="2194560" cy="365760"/>
+          </a:xfrm>
+          <a:prstGeom prst="rect">
+            <a:avLst/>
+          </a:prstGeom>
+          <a:noFill/>
+        </p:spPr>
+        <p:txBody>
+          <a:bodyPr wrap="square">
+            <a:spAutoFit/>
+          </a:bodyPr>
+          <a:lstStyle/>
+          <a:p>
+            <a:r>
+              <a:rPr sz="1100" b="1" i="0">
+                <a:solidFill>
+                  <a:srgbClr val="006E96"/>
+                </a:solidFill>
+                <a:latin typeface="Arial"/>
+              </a:rPr>
+              <a:t>REASON</a:t>
+            </a:r>
+          </a:p>
+        </p:txBody>
+      </p:sp>
+      <p:sp>
+        <p:nvSpPr>
+          <p:cNvPr id="9" name="TextBox 8"/>
+          <p:cNvSpPr txBox="1"/>
+          <p:nvPr/>
+        </p:nvSpPr>
+        <p:spPr>
+          <a:xfrm>
+            <a:off x="3108960" y="3099816"/>
+            <a:ext cx="8183879" cy="1005840"/>
+          </a:xfrm>
+          <a:prstGeom prst="rect">
+            <a:avLst/>
+          </a:prstGeom>
+          <a:noFill/>
+        </p:spPr>
+        <p:txBody>
+          <a:bodyPr wrap="square">
+            <a:spAutoFit/>
+          </a:bodyPr>
+          <a:lstStyle/>
+          <a:p>
+            <a:r>
+              <a:rPr sz="1800" b="0" i="0">
+                <a:solidFill>
+                  <a:srgbClr val="1A1A1A"/>
+                </a:solidFill>
+                <a:latin typeface="Arial"/>
+              </a:rPr>
+              <a:t>The country pays once, not many times.</a:t>
+            </a:r>
+          </a:p>
+        </p:txBody>
+      </p:sp>
+      <p:sp>
+        <p:nvSpPr>
+          <p:cNvPr id="10" name="Rounded Rectangle 9"/>
+          <p:cNvSpPr/>
+          <p:nvPr/>
+        </p:nvSpPr>
+        <p:spPr>
+          <a:xfrm>
+            <a:off x="658368" y="4379976"/>
+            <a:ext cx="10881360" cy="1463040"/>
+          </a:xfrm>
+          <a:prstGeom prst="roundRect">
+            <a:avLst>
+              <a:gd name="adj" fmla="val 4500"/>
+            </a:avLst>
+          </a:prstGeom>
+          <a:solidFill>
+            <a:srgbClr val="009CD6"/>
+          </a:solidFill>
+          <a:ln>
+            <a:noFill/>
+          </a:ln>
+          <a:effectLst/>
+        </p:spPr>
+        <p:style>
+          <a:lnRef idx="1">
+            <a:schemeClr val="accent1"/>
+          </a:lnRef>
+          <a:fillRef idx="3">
+            <a:schemeClr val="accent1"/>
+          </a:fillRef>
+          <a:effectRef idx="2">
+            <a:schemeClr val="accent1"/>
+          </a:effectRef>
+          <a:fontRef idx="minor">
+            <a:schemeClr val="lt1"/>
+          </a:fontRef>
+        </p:style>
+        <p:txBody>
+          <a:bodyPr rtlCol="0" anchor="ctr"/>
+          <a:lstStyle/>
+          <a:p>
+            <a:pPr algn="ctr"/>
+          </a:p>
+        </p:txBody>
+      </p:sp>
+      <p:sp>
+        <p:nvSpPr>
+          <p:cNvPr id="11" name="TextBox 10"/>
+          <p:cNvSpPr txBox="1"/>
+          <p:nvPr/>
+        </p:nvSpPr>
+        <p:spPr>
+          <a:xfrm>
+            <a:off x="868680" y="4517136"/>
+            <a:ext cx="2194560" cy="365760"/>
+          </a:xfrm>
+          <a:prstGeom prst="rect">
+            <a:avLst/>
+          </a:prstGeom>
+          <a:noFill/>
+        </p:spPr>
+        <p:txBody>
+          <a:bodyPr wrap="square">
+            <a:spAutoFit/>
+          </a:bodyPr>
+          <a:lstStyle/>
+          <a:p>
+            <a:r>
+              <a:rPr sz="1100" b="1" i="0">
+                <a:solidFill>
+                  <a:srgbClr val="FFFFFF"/>
+                </a:solidFill>
+                <a:latin typeface="Arial"/>
+              </a:rPr>
+              <a:t>IMPLICATION</a:t>
+            </a:r>
+          </a:p>
+        </p:txBody>
+      </p:sp>
+      <p:sp>
+        <p:nvSpPr>
+          <p:cNvPr id="12" name="TextBox 11"/>
+          <p:cNvSpPr txBox="1"/>
+          <p:nvPr/>
+        </p:nvSpPr>
+        <p:spPr>
+          <a:xfrm>
+            <a:off x="3108960" y="4489704"/>
+            <a:ext cx="8183879" cy="1234440"/>
+          </a:xfrm>
+          <a:prstGeom prst="rect">
+            <a:avLst/>
+          </a:prstGeom>
+          <a:noFill/>
+        </p:spPr>
+        <p:txBody>
+          <a:bodyPr wrap="square">
+            <a:spAutoFit/>
+          </a:bodyPr>
+          <a:lstStyle/>
+          <a:p>
+            <a:r>
+              <a:rPr sz="1900" b="1" i="0">
+                <a:solidFill>
+                  <a:srgbClr val="FFFFFF"/>
+                </a:solidFill>
+                <a:latin typeface="Arial"/>
+              </a:rPr>
+              <a:t>Any project proposing to build its own identity must first show why the shared one cannot be used — and the EA Board can say no.</a:t>
+            </a:r>
+          </a:p>
+        </p:txBody>
+      </p:sp>
+      <p:sp>
+        <p:nvSpPr>
+          <p:cNvPr id="13" name="TextBox 12"/>
+          <p:cNvSpPr txBox="1"/>
+          <p:nvPr/>
+        </p:nvSpPr>
+        <p:spPr>
+          <a:xfrm>
+            <a:off x="658368" y="5897880"/>
+            <a:ext cx="10881360" cy="365760"/>
+          </a:xfrm>
+          <a:prstGeom prst="rect">
+            <a:avLst/>
+          </a:prstGeom>
+          <a:noFill/>
+        </p:spPr>
+        <p:txBody>
+          <a:bodyPr wrap="square">
+            <a:spAutoFit/>
+          </a:bodyPr>
+          <a:lstStyle/>
+          <a:p>
+            <a:r>
+              <a:rPr sz="1450" b="0" i="0">
+                <a:solidFill>
+                  <a:srgbClr val="595959"/>
+                </a:solidFill>
+                <a:latin typeface="Arial"/>
+              </a:rPr>
+              <a:t>A principle with a written implication can settle an argument. A principle without one cannot.</a:t>
+            </a:r>
+          </a:p>
+        </p:txBody>
+      </p:sp>
+      <p:sp>
+        <p:nvSpPr>
+          <p:cNvPr id="14" name="TextBox 13"/>
+          <p:cNvSpPr txBox="1"/>
+          <p:nvPr/>
+        </p:nvSpPr>
+        <p:spPr>
+          <a:xfrm>
+            <a:off x="457200" y="6473952"/>
+            <a:ext cx="7772400" cy="292608"/>
+          </a:xfrm>
+          <a:prstGeom prst="rect">
+            <a:avLst/>
+          </a:prstGeom>
+          <a:noFill/>
+        </p:spPr>
+        <p:txBody>
+          <a:bodyPr wrap="square">
+            <a:spAutoFit/>
+          </a:bodyPr>
+          <a:lstStyle/>
+          <a:p>
+            <a:r>
+              <a:rPr sz="900" b="0" i="0">
+                <a:solidFill>
+                  <a:srgbClr val="595959"/>
+                </a:solidFill>
+                <a:latin typeface="Arial"/>
+              </a:rPr>
+              <a:t>2.3 · Adopt your principles, don't draft them</a:t>
+            </a:r>
+          </a:p>
+        </p:txBody>
+      </p:sp>
+    </p:spTree>
+  </p:cSld>
+  <p:clrMapOvr>
+    <a:masterClrMapping/>
+  </p:clrMapOvr>
+</p:sld>
+</file>
+
+<file path=ppt/slides/slide26.xml><?xml version="1.0" encoding="utf-8"?>
+<p:sld xmlns:a="http://schemas.openxmlformats.org/drawingml/2006/main" xmlns:p="http://schemas.openxmlformats.org/presentationml/2006/main" xmlns:r="http://schemas.openxmlformats.org/officeDocument/2006/relationships">
+  <p:cSld>
+    <p:spTree>
+      <p:nvGrpSpPr>
+        <p:cNvPr id="1" name=""/>
+        <p:cNvGrpSpPr/>
+        <p:nvPr/>
+      </p:nvGrpSpPr>
+      <p:grpSpPr/>
+      <p:sp>
+        <p:nvSpPr>
           <p:cNvPr id="2" name="TextBox 1"/>
           <p:cNvSpPr txBox="1"/>
           <p:nvPr/>
@@ -15599,7 +15168,7 @@
 </p:sld>
 </file>
 
-<file path=ppt/slides/slide24.xml><?xml version="1.0" encoding="utf-8"?>
+<file path=ppt/slides/slide27.xml><?xml version="1.0" encoding="utf-8"?>
 <p:sld xmlns:a="http://schemas.openxmlformats.org/drawingml/2006/main" xmlns:p="http://schemas.openxmlformats.org/presentationml/2006/main" xmlns:r="http://schemas.openxmlformats.org/officeDocument/2006/relationships">
   <p:cSld>
     <p:spTree>

--- a/10-Knowledge-Products/KP1-GEA/videos/module_2/en/decks/KP1_M2_2.3_Deck_v0.2.pptx
+++ b/10-Knowledge-Products/KP1-GEA/videos/module_2/en/decks/KP1_M2_2.3_Deck_v0.2.pptx
@@ -11777,7 +11777,7 @@
                 </a:solidFill>
                 <a:latin typeface="Arial"/>
               </a:rPr>
-              <a:t>~4 minutes · standalone video · voice-over on text slides</a:t>
+              <a:t>standalone video · voice-over on text slides</a:t>
             </a:r>
           </a:p>
         </p:txBody>

--- a/10-Knowledge-Products/KP1-GEA/videos/module_2/en/decks/KP1_M2_2.3_Deck_v0.2.pptx
+++ b/10-Knowledge-Products/KP1-GEA/videos/module_2/en/decks/KP1_M2_2.3_Deck_v0.2.pptx
@@ -11641,7 +11641,7 @@
                 </a:solidFill>
                 <a:latin typeface="Arial"/>
               </a:rPr>
-              <a:t>KP1 · MODULE 2 · VIDEO 2.3</a:t>
+              <a:t>MODULE 2 · VIDEO 2.3</a:t>
             </a:r>
           </a:p>
         </p:txBody>
